--- a/0- Systemcalls and IO.pptx
+++ b/0- Systemcalls and IO.pptx
@@ -33,6 +33,7 @@
     <p:sldId id="269" r:id="rId28"/>
     <p:sldId id="270" r:id="rId29"/>
     <p:sldId id="271" r:id="rId30"/>
+    <p:sldId id="272" r:id="rId31"/>
   </p:sldIdLst>
   <p:sldSz cx="9144000" cy="6858000"/>
   <p:notesSz cx="7559675" cy="10691813"/>
@@ -3830,6 +3831,280 @@
           <a:chExt cx="0" cy="0"/>
         </a:xfrm>
       </p:grpSpPr>
+      <p:sp>
+        <p:nvSpPr>
+          <p:cNvPr id="58" name="PlaceHolder 1"/>
+          <p:cNvSpPr>
+            <a:spLocks noGrp="1"/>
+          </p:cNvSpPr>
+          <p:nvPr>
+            <p:ph type="title"/>
+          </p:nvPr>
+        </p:nvSpPr>
+        <p:spPr>
+          <a:xfrm>
+            <a:off x="457200" y="273600"/>
+            <a:ext cx="8229240" cy="1144800"/>
+          </a:xfrm>
+          <a:prstGeom prst="rect">
+            <a:avLst/>
+          </a:prstGeom>
+          <a:noFill/>
+          <a:ln w="0">
+            <a:noFill/>
+          </a:ln>
+        </p:spPr>
+        <p:txBody>
+          <a:bodyPr lIns="0" rIns="0" tIns="0" bIns="0" anchor="ctr">
+            <a:noAutofit/>
+          </a:bodyPr>
+          <a:p>
+            <a:pPr indent="0" algn="ctr">
+              <a:buNone/>
+            </a:pPr>
+            <a:r>
+              <a:rPr b="0" lang="en-US" sz="4400" spc="-1" strike="noStrike">
+                <a:solidFill>
+                  <a:srgbClr val="000000"/>
+                </a:solidFill>
+                <a:latin typeface="Arial"/>
+              </a:rPr>
+              <a:t>Click to edit the title text format</a:t>
+            </a:r>
+            <a:endParaRPr b="0" lang="en-US" sz="4400" spc="-1" strike="noStrike">
+              <a:solidFill>
+                <a:srgbClr val="000000"/>
+              </a:solidFill>
+              <a:latin typeface="Arial"/>
+            </a:endParaRPr>
+          </a:p>
+        </p:txBody>
+      </p:sp>
+      <p:sp>
+        <p:nvSpPr>
+          <p:cNvPr id="59" name="PlaceHolder 2"/>
+          <p:cNvSpPr>
+            <a:spLocks noGrp="1"/>
+          </p:cNvSpPr>
+          <p:nvPr>
+            <p:ph type="body"/>
+          </p:nvPr>
+        </p:nvSpPr>
+        <p:spPr>
+          <a:xfrm>
+            <a:off x="457200" y="1604520"/>
+            <a:ext cx="8229240" cy="3977280"/>
+          </a:xfrm>
+          <a:prstGeom prst="rect">
+            <a:avLst/>
+          </a:prstGeom>
+          <a:noFill/>
+          <a:ln w="0">
+            <a:noFill/>
+          </a:ln>
+        </p:spPr>
+        <p:txBody>
+          <a:bodyPr lIns="0" rIns="0" tIns="0" bIns="0" anchor="t">
+            <a:normAutofit/>
+          </a:bodyPr>
+          <a:p>
+            <a:pPr marL="432000" indent="-324000">
+              <a:spcBef>
+                <a:spcPts val="1417"/>
+              </a:spcBef>
+              <a:buClr>
+                <a:srgbClr val="000000"/>
+              </a:buClr>
+              <a:buSzPct val="45000"/>
+              <a:buFont typeface="Wingdings" charset="2"/>
+              <a:buChar char=""/>
+            </a:pPr>
+            <a:r>
+              <a:rPr b="0" lang="en-US" sz="3200" spc="-1" strike="noStrike">
+                <a:solidFill>
+                  <a:srgbClr val="000000"/>
+                </a:solidFill>
+                <a:latin typeface="Arial"/>
+              </a:rPr>
+              <a:t>Click to edit the outline text format</a:t>
+            </a:r>
+            <a:endParaRPr b="0" lang="en-US" sz="3200" spc="-1" strike="noStrike">
+              <a:solidFill>
+                <a:srgbClr val="000000"/>
+              </a:solidFill>
+              <a:latin typeface="Arial"/>
+            </a:endParaRPr>
+          </a:p>
+          <a:p>
+            <a:pPr lvl="1" marL="864000" indent="-324000">
+              <a:spcBef>
+                <a:spcPts val="1134"/>
+              </a:spcBef>
+              <a:buClr>
+                <a:srgbClr val="000000"/>
+              </a:buClr>
+              <a:buSzPct val="75000"/>
+              <a:buFont typeface="Symbol" charset="2"/>
+              <a:buChar char=""/>
+            </a:pPr>
+            <a:r>
+              <a:rPr b="0" lang="en-US" sz="2800" spc="-1" strike="noStrike">
+                <a:solidFill>
+                  <a:srgbClr val="000000"/>
+                </a:solidFill>
+                <a:latin typeface="Arial"/>
+              </a:rPr>
+              <a:t>Second Outline Level</a:t>
+            </a:r>
+            <a:endParaRPr b="0" lang="en-US" sz="2800" spc="-1" strike="noStrike">
+              <a:solidFill>
+                <a:srgbClr val="000000"/>
+              </a:solidFill>
+              <a:latin typeface="Arial"/>
+            </a:endParaRPr>
+          </a:p>
+          <a:p>
+            <a:pPr lvl="2" marL="1296000" indent="-288000">
+              <a:spcBef>
+                <a:spcPts val="850"/>
+              </a:spcBef>
+              <a:buClr>
+                <a:srgbClr val="000000"/>
+              </a:buClr>
+              <a:buSzPct val="45000"/>
+              <a:buFont typeface="Wingdings" charset="2"/>
+              <a:buChar char=""/>
+            </a:pPr>
+            <a:r>
+              <a:rPr b="0" lang="en-US" sz="2400" spc="-1" strike="noStrike">
+                <a:solidFill>
+                  <a:srgbClr val="000000"/>
+                </a:solidFill>
+                <a:latin typeface="Arial"/>
+              </a:rPr>
+              <a:t>Third Outline Level</a:t>
+            </a:r>
+            <a:endParaRPr b="0" lang="en-US" sz="2400" spc="-1" strike="noStrike">
+              <a:solidFill>
+                <a:srgbClr val="000000"/>
+              </a:solidFill>
+              <a:latin typeface="Arial"/>
+            </a:endParaRPr>
+          </a:p>
+          <a:p>
+            <a:pPr lvl="3" marL="1728000" indent="-216000">
+              <a:spcBef>
+                <a:spcPts val="567"/>
+              </a:spcBef>
+              <a:buClr>
+                <a:srgbClr val="000000"/>
+              </a:buClr>
+              <a:buSzPct val="75000"/>
+              <a:buFont typeface="Symbol" charset="2"/>
+              <a:buChar char=""/>
+            </a:pPr>
+            <a:r>
+              <a:rPr b="0" lang="en-US" sz="2000" spc="-1" strike="noStrike">
+                <a:solidFill>
+                  <a:srgbClr val="000000"/>
+                </a:solidFill>
+                <a:latin typeface="Arial"/>
+              </a:rPr>
+              <a:t>Fourth Outline Level</a:t>
+            </a:r>
+            <a:endParaRPr b="0" lang="en-US" sz="2000" spc="-1" strike="noStrike">
+              <a:solidFill>
+                <a:srgbClr val="000000"/>
+              </a:solidFill>
+              <a:latin typeface="Arial"/>
+            </a:endParaRPr>
+          </a:p>
+          <a:p>
+            <a:pPr lvl="4" marL="2160000" indent="-216000">
+              <a:spcBef>
+                <a:spcPts val="283"/>
+              </a:spcBef>
+              <a:buClr>
+                <a:srgbClr val="000000"/>
+              </a:buClr>
+              <a:buSzPct val="45000"/>
+              <a:buFont typeface="Wingdings" charset="2"/>
+              <a:buChar char=""/>
+            </a:pPr>
+            <a:r>
+              <a:rPr b="0" lang="en-US" sz="2000" spc="-1" strike="noStrike">
+                <a:solidFill>
+                  <a:srgbClr val="000000"/>
+                </a:solidFill>
+                <a:latin typeface="Arial"/>
+              </a:rPr>
+              <a:t>Fifth Outline Level</a:t>
+            </a:r>
+            <a:endParaRPr b="0" lang="en-US" sz="2000" spc="-1" strike="noStrike">
+              <a:solidFill>
+                <a:srgbClr val="000000"/>
+              </a:solidFill>
+              <a:latin typeface="Arial"/>
+            </a:endParaRPr>
+          </a:p>
+          <a:p>
+            <a:pPr lvl="5" marL="2592000" indent="-216000">
+              <a:spcBef>
+                <a:spcPts val="283"/>
+              </a:spcBef>
+              <a:buClr>
+                <a:srgbClr val="000000"/>
+              </a:buClr>
+              <a:buSzPct val="45000"/>
+              <a:buFont typeface="Wingdings" charset="2"/>
+              <a:buChar char=""/>
+            </a:pPr>
+            <a:r>
+              <a:rPr b="0" lang="en-US" sz="2000" spc="-1" strike="noStrike">
+                <a:solidFill>
+                  <a:srgbClr val="000000"/>
+                </a:solidFill>
+                <a:latin typeface="Arial"/>
+              </a:rPr>
+              <a:t>Sixth Outline Level</a:t>
+            </a:r>
+            <a:endParaRPr b="0" lang="en-US" sz="2000" spc="-1" strike="noStrike">
+              <a:solidFill>
+                <a:srgbClr val="000000"/>
+              </a:solidFill>
+              <a:latin typeface="Arial"/>
+            </a:endParaRPr>
+          </a:p>
+          <a:p>
+            <a:pPr lvl="6" marL="3024000" indent="-216000">
+              <a:spcBef>
+                <a:spcPts val="283"/>
+              </a:spcBef>
+              <a:buClr>
+                <a:srgbClr val="000000"/>
+              </a:buClr>
+              <a:buSzPct val="45000"/>
+              <a:buFont typeface="Wingdings" charset="2"/>
+              <a:buChar char=""/>
+            </a:pPr>
+            <a:r>
+              <a:rPr b="0" lang="en-US" sz="2000" spc="-1" strike="noStrike">
+                <a:solidFill>
+                  <a:srgbClr val="000000"/>
+                </a:solidFill>
+                <a:latin typeface="Arial"/>
+              </a:rPr>
+              <a:t>Seventh Outline Level</a:t>
+            </a:r>
+            <a:endParaRPr b="0" lang="en-US" sz="2000" spc="-1" strike="noStrike">
+              <a:solidFill>
+                <a:srgbClr val="000000"/>
+              </a:solidFill>
+              <a:latin typeface="Arial"/>
+            </a:endParaRPr>
+          </a:p>
+        </p:txBody>
+      </p:sp>
     </p:spTree>
   </p:cSld>
   <p:clrMap bg1="lt1" bg2="lt2" tx1="dk1" tx2="dk2" accent1="accent1" accent2="accent2" accent3="accent3" accent4="accent4" accent5="accent5" accent6="accent6" hlink="hlink" folHlink="folHlink"/>
@@ -3901,7 +4176,16 @@
                 </a:solidFill>
                 <a:latin typeface="Arial"/>
               </a:rPr>
-              <a:t>Click to edit the title text format</a:t>
+              <a:t>Click to edit the title text </a:t>
+            </a:r>
+            <a:r>
+              <a:rPr b="0" lang="en-US" sz="1800" spc="-1" strike="noStrike">
+                <a:solidFill>
+                  <a:srgbClr val="000000"/>
+                </a:solidFill>
+                <a:latin typeface="Arial"/>
+              </a:rPr>
+              <a:t>format</a:t>
             </a:r>
             <a:endParaRPr b="0" lang="en-US" sz="1800" spc="-1" strike="noStrike">
               <a:solidFill>
@@ -5448,7 +5732,16 @@
                 </a:solidFill>
                 <a:latin typeface="Arial"/>
               </a:rPr>
-              <a:t>Click to edit the title text format</a:t>
+              <a:t>Click to edit the title text </a:t>
+            </a:r>
+            <a:r>
+              <a:rPr b="0" lang="en-US" sz="4400" spc="-1" strike="noStrike">
+                <a:solidFill>
+                  <a:srgbClr val="000000"/>
+                </a:solidFill>
+                <a:latin typeface="Arial"/>
+              </a:rPr>
+              <a:t>format</a:t>
             </a:r>
             <a:endParaRPr b="0" lang="en-US" sz="4400" spc="-1" strike="noStrike">
               <a:solidFill>
@@ -6940,14 +7233,14 @@
       </p:grpSpPr>
       <p:sp>
         <p:nvSpPr>
-          <p:cNvPr id="58" name="CustomShape 1"/>
+          <p:cNvPr id="60" name="CustomShape 1"/>
           <p:cNvSpPr/>
           <p:nvPr/>
         </p:nvSpPr>
         <p:spPr>
           <a:xfrm>
             <a:off x="685800" y="2130480"/>
-            <a:ext cx="7769880" cy="1467360"/>
+            <a:ext cx="7769520" cy="1467000"/>
           </a:xfrm>
           <a:prstGeom prst="rect">
             <a:avLst/>
@@ -7045,14 +7338,14 @@
       </p:sp>
       <p:sp>
         <p:nvSpPr>
-          <p:cNvPr id="59" name="CustomShape 2"/>
+          <p:cNvPr id="61" name="CustomShape 2"/>
           <p:cNvSpPr/>
           <p:nvPr/>
         </p:nvSpPr>
         <p:spPr>
           <a:xfrm>
             <a:off x="1371600" y="3886200"/>
-            <a:ext cx="6398280" cy="1749960"/>
+            <a:ext cx="6397920" cy="1749600"/>
           </a:xfrm>
           <a:prstGeom prst="rect">
             <a:avLst/>
@@ -7144,979 +7437,29 @@
           <a:chExt cx="0" cy="0"/>
         </a:xfrm>
       </p:grpSpPr>
-      <p:sp>
-        <p:nvSpPr>
-          <p:cNvPr id="86" name="CustomShape 1"/>
-          <p:cNvSpPr/>
+      <p:pic>
+        <p:nvPicPr>
+          <p:cNvPr id="88" name="Picture 1" descr=""/>
+          <p:cNvPicPr/>
           <p:nvPr/>
-        </p:nvSpPr>
+        </p:nvPicPr>
+        <p:blipFill>
+          <a:blip r:embed="rId1"/>
+          <a:stretch/>
+        </p:blipFill>
         <p:spPr>
           <a:xfrm>
-            <a:off x="2798280" y="193680"/>
-            <a:ext cx="3373560" cy="459000"/>
+            <a:off x="152280" y="76320"/>
+            <a:ext cx="8988840" cy="6778800"/>
           </a:xfrm>
           <a:prstGeom prst="rect">
             <a:avLst/>
           </a:prstGeom>
-          <a:noFill/>
           <a:ln w="0">
             <a:noFill/>
           </a:ln>
         </p:spPr>
-        <p:style>
-          <a:lnRef idx="0"/>
-          <a:fillRef idx="0"/>
-          <a:effectRef idx="0"/>
-          <a:fontRef idx="minor"/>
-        </p:style>
-        <p:txBody>
-          <a:bodyPr wrap="none" lIns="90000" rIns="90000" tIns="46800" bIns="46800" anchor="t">
-            <a:spAutoFit/>
-          </a:bodyPr>
-          <a:p>
-            <a:pPr>
-              <a:lnSpc>
-                <a:spcPct val="100000"/>
-              </a:lnSpc>
-              <a:tabLst>
-                <a:tab algn="l" pos="0"/>
-                <a:tab algn="l" pos="457200"/>
-                <a:tab algn="l" pos="914400"/>
-                <a:tab algn="l" pos="1371600"/>
-                <a:tab algn="l" pos="1828800"/>
-                <a:tab algn="l" pos="2286000"/>
-                <a:tab algn="l" pos="2743200"/>
-                <a:tab algn="l" pos="3200400"/>
-                <a:tab algn="l" pos="3657600"/>
-                <a:tab algn="l" pos="4114800"/>
-                <a:tab algn="l" pos="4572000"/>
-                <a:tab algn="l" pos="5029200"/>
-                <a:tab algn="l" pos="5486400"/>
-                <a:tab algn="l" pos="5943600"/>
-                <a:tab algn="l" pos="6400800"/>
-                <a:tab algn="l" pos="6858000"/>
-                <a:tab algn="l" pos="7315200"/>
-                <a:tab algn="l" pos="7772400"/>
-                <a:tab algn="l" pos="8229600"/>
-                <a:tab algn="l" pos="8686800"/>
-                <a:tab algn="l" pos="9144000"/>
-              </a:tabLst>
-            </a:pPr>
-            <a:r>
-              <a:rPr b="0" lang="en-US" sz="2400" spc="-1" strike="noStrike" u="sng">
-                <a:solidFill>
-                  <a:srgbClr val="000000"/>
-                </a:solidFill>
-                <a:uFillTx/>
-                <a:latin typeface="Times New Roman"/>
-                <a:ea typeface="WenQuanYi Micro Hei"/>
-              </a:rPr>
-              <a:t>System calls &amp; ‘C’ library</a:t>
-            </a:r>
-            <a:endParaRPr b="0" lang="en-US" sz="2400" spc="-1" strike="noStrike">
-              <a:solidFill>
-                <a:srgbClr val="000000"/>
-              </a:solidFill>
-              <a:latin typeface="Arial"/>
-            </a:endParaRPr>
-          </a:p>
-        </p:txBody>
-      </p:sp>
-      <p:sp>
-        <p:nvSpPr>
-          <p:cNvPr id="87" name="CustomShape 2"/>
-          <p:cNvSpPr/>
-          <p:nvPr/>
-        </p:nvSpPr>
-        <p:spPr>
-          <a:xfrm>
-            <a:off x="61200" y="662400"/>
-            <a:ext cx="10053360" cy="5886720"/>
-          </a:xfrm>
-          <a:prstGeom prst="rect">
-            <a:avLst/>
-          </a:prstGeom>
-          <a:noFill/>
-          <a:ln w="0">
-            <a:noFill/>
-          </a:ln>
-        </p:spPr>
-        <p:style>
-          <a:lnRef idx="0"/>
-          <a:fillRef idx="0"/>
-          <a:effectRef idx="0"/>
-          <a:fontRef idx="minor"/>
-        </p:style>
-        <p:txBody>
-          <a:bodyPr wrap="none" lIns="90000" rIns="90000" tIns="46800" bIns="46800" anchor="t">
-            <a:spAutoFit/>
-          </a:bodyPr>
-          <a:p>
-            <a:pPr algn="just">
-              <a:lnSpc>
-                <a:spcPct val="100000"/>
-              </a:lnSpc>
-              <a:tabLst>
-                <a:tab algn="l" pos="0"/>
-                <a:tab algn="l" pos="457200"/>
-                <a:tab algn="l" pos="914400"/>
-                <a:tab algn="l" pos="1371600"/>
-                <a:tab algn="l" pos="1828800"/>
-                <a:tab algn="l" pos="2286000"/>
-                <a:tab algn="l" pos="2743200"/>
-                <a:tab algn="l" pos="3200400"/>
-                <a:tab algn="l" pos="3657600"/>
-                <a:tab algn="l" pos="4114800"/>
-                <a:tab algn="l" pos="4572000"/>
-                <a:tab algn="l" pos="5029200"/>
-                <a:tab algn="l" pos="5486400"/>
-                <a:tab algn="l" pos="5943600"/>
-                <a:tab algn="l" pos="6400800"/>
-                <a:tab algn="l" pos="6858000"/>
-                <a:tab algn="l" pos="7315200"/>
-                <a:tab algn="l" pos="7772400"/>
-                <a:tab algn="l" pos="8229600"/>
-                <a:tab algn="l" pos="8686800"/>
-                <a:tab algn="l" pos="9144000"/>
-              </a:tabLst>
-            </a:pPr>
-            <a:r>
-              <a:rPr b="0" lang="en-US" sz="2000" spc="-1" strike="noStrike">
-                <a:solidFill>
-                  <a:srgbClr val="000000"/>
-                </a:solidFill>
-                <a:latin typeface="Times New Roman"/>
-                <a:ea typeface="WenQuanYi Micro Hei"/>
-              </a:rPr>
-              <a:t>A </a:t>
-            </a:r>
-            <a:r>
-              <a:rPr b="0" i="1" lang="en-US" sz="2000" spc="-1" strike="noStrike">
-                <a:solidFill>
-                  <a:srgbClr val="000000"/>
-                </a:solidFill>
-                <a:latin typeface="Times New Roman"/>
-                <a:ea typeface="WenQuanYi Micro Hei"/>
-              </a:rPr>
-              <a:t>library function </a:t>
-            </a:r>
-            <a:r>
-              <a:rPr b="0" lang="en-US" sz="2000" spc="-1" strike="noStrike">
-                <a:solidFill>
-                  <a:srgbClr val="000000"/>
-                </a:solidFill>
-                <a:latin typeface="Times New Roman"/>
-                <a:ea typeface="WenQuanYi Micro Hei"/>
-              </a:rPr>
-              <a:t>is an ordinary function that resides in a library external to your program. </a:t>
-            </a:r>
-            <a:endParaRPr b="0" lang="en-US" sz="2000" spc="-1" strike="noStrike">
-              <a:solidFill>
-                <a:srgbClr val="000000"/>
-              </a:solidFill>
-              <a:latin typeface="Arial"/>
-            </a:endParaRPr>
-          </a:p>
-          <a:p>
-            <a:pPr algn="just">
-              <a:lnSpc>
-                <a:spcPct val="100000"/>
-              </a:lnSpc>
-              <a:tabLst>
-                <a:tab algn="l" pos="0"/>
-                <a:tab algn="l" pos="457200"/>
-                <a:tab algn="l" pos="914400"/>
-                <a:tab algn="l" pos="1371600"/>
-                <a:tab algn="l" pos="1828800"/>
-                <a:tab algn="l" pos="2286000"/>
-                <a:tab algn="l" pos="2743200"/>
-                <a:tab algn="l" pos="3200400"/>
-                <a:tab algn="l" pos="3657600"/>
-                <a:tab algn="l" pos="4114800"/>
-                <a:tab algn="l" pos="4572000"/>
-                <a:tab algn="l" pos="5029200"/>
-                <a:tab algn="l" pos="5486400"/>
-                <a:tab algn="l" pos="5943600"/>
-                <a:tab algn="l" pos="6400800"/>
-                <a:tab algn="l" pos="6858000"/>
-                <a:tab algn="l" pos="7315200"/>
-                <a:tab algn="l" pos="7772400"/>
-                <a:tab algn="l" pos="8229600"/>
-                <a:tab algn="l" pos="8686800"/>
-                <a:tab algn="l" pos="9144000"/>
-              </a:tabLst>
-            </a:pPr>
-            <a:r>
-              <a:rPr b="0" lang="en-US" sz="2000" spc="-1" strike="noStrike">
-                <a:solidFill>
-                  <a:srgbClr val="000000"/>
-                </a:solidFill>
-                <a:latin typeface="Times New Roman"/>
-                <a:ea typeface="WenQuanYi Micro Hei"/>
-              </a:rPr>
-              <a:t>For example, getopt_long and fopen are functions provided in the C library. A call to a</a:t>
-            </a:r>
-            <a:endParaRPr b="0" lang="en-US" sz="2000" spc="-1" strike="noStrike">
-              <a:solidFill>
-                <a:srgbClr val="000000"/>
-              </a:solidFill>
-              <a:latin typeface="Arial"/>
-            </a:endParaRPr>
-          </a:p>
-          <a:p>
-            <a:pPr algn="just">
-              <a:lnSpc>
-                <a:spcPct val="100000"/>
-              </a:lnSpc>
-              <a:tabLst>
-                <a:tab algn="l" pos="0"/>
-                <a:tab algn="l" pos="457200"/>
-                <a:tab algn="l" pos="914400"/>
-                <a:tab algn="l" pos="1371600"/>
-                <a:tab algn="l" pos="1828800"/>
-                <a:tab algn="l" pos="2286000"/>
-                <a:tab algn="l" pos="2743200"/>
-                <a:tab algn="l" pos="3200400"/>
-                <a:tab algn="l" pos="3657600"/>
-                <a:tab algn="l" pos="4114800"/>
-                <a:tab algn="l" pos="4572000"/>
-                <a:tab algn="l" pos="5029200"/>
-                <a:tab algn="l" pos="5486400"/>
-                <a:tab algn="l" pos="5943600"/>
-                <a:tab algn="l" pos="6400800"/>
-                <a:tab algn="l" pos="6858000"/>
-                <a:tab algn="l" pos="7315200"/>
-                <a:tab algn="l" pos="7772400"/>
-                <a:tab algn="l" pos="8229600"/>
-                <a:tab algn="l" pos="8686800"/>
-                <a:tab algn="l" pos="9144000"/>
-              </a:tabLst>
-            </a:pPr>
-            <a:r>
-              <a:rPr b="0" lang="en-US" sz="2000" spc="-1" strike="noStrike">
-                <a:solidFill>
-                  <a:srgbClr val="000000"/>
-                </a:solidFill>
-                <a:latin typeface="Times New Roman"/>
-                <a:ea typeface="WenQuanYi Micro Hei"/>
-              </a:rPr>
-              <a:t>library function is just like any other function call. The arguments are placed in processor</a:t>
-            </a:r>
-            <a:endParaRPr b="0" lang="en-US" sz="2000" spc="-1" strike="noStrike">
-              <a:solidFill>
-                <a:srgbClr val="000000"/>
-              </a:solidFill>
-              <a:latin typeface="Arial"/>
-            </a:endParaRPr>
-          </a:p>
-          <a:p>
-            <a:pPr algn="just">
-              <a:lnSpc>
-                <a:spcPct val="100000"/>
-              </a:lnSpc>
-              <a:tabLst>
-                <a:tab algn="l" pos="0"/>
-                <a:tab algn="l" pos="457200"/>
-                <a:tab algn="l" pos="914400"/>
-                <a:tab algn="l" pos="1371600"/>
-                <a:tab algn="l" pos="1828800"/>
-                <a:tab algn="l" pos="2286000"/>
-                <a:tab algn="l" pos="2743200"/>
-                <a:tab algn="l" pos="3200400"/>
-                <a:tab algn="l" pos="3657600"/>
-                <a:tab algn="l" pos="4114800"/>
-                <a:tab algn="l" pos="4572000"/>
-                <a:tab algn="l" pos="5029200"/>
-                <a:tab algn="l" pos="5486400"/>
-                <a:tab algn="l" pos="5943600"/>
-                <a:tab algn="l" pos="6400800"/>
-                <a:tab algn="l" pos="6858000"/>
-                <a:tab algn="l" pos="7315200"/>
-                <a:tab algn="l" pos="7772400"/>
-                <a:tab algn="l" pos="8229600"/>
-                <a:tab algn="l" pos="8686800"/>
-                <a:tab algn="l" pos="9144000"/>
-              </a:tabLst>
-            </a:pPr>
-            <a:r>
-              <a:rPr b="0" lang="en-US" sz="2000" spc="-1" strike="noStrike">
-                <a:solidFill>
-                  <a:srgbClr val="000000"/>
-                </a:solidFill>
-                <a:latin typeface="Times New Roman"/>
-                <a:ea typeface="WenQuanYi Micro Hei"/>
-              </a:rPr>
-              <a:t>Registers  or onto the stack, and execution is transferred to the start of the function’s code, which</a:t>
-            </a:r>
-            <a:endParaRPr b="0" lang="en-US" sz="2000" spc="-1" strike="noStrike">
-              <a:solidFill>
-                <a:srgbClr val="000000"/>
-              </a:solidFill>
-              <a:latin typeface="Arial"/>
-            </a:endParaRPr>
-          </a:p>
-          <a:p>
-            <a:pPr algn="just">
-              <a:lnSpc>
-                <a:spcPct val="100000"/>
-              </a:lnSpc>
-              <a:tabLst>
-                <a:tab algn="l" pos="0"/>
-                <a:tab algn="l" pos="457200"/>
-                <a:tab algn="l" pos="914400"/>
-                <a:tab algn="l" pos="1371600"/>
-                <a:tab algn="l" pos="1828800"/>
-                <a:tab algn="l" pos="2286000"/>
-                <a:tab algn="l" pos="2743200"/>
-                <a:tab algn="l" pos="3200400"/>
-                <a:tab algn="l" pos="3657600"/>
-                <a:tab algn="l" pos="4114800"/>
-                <a:tab algn="l" pos="4572000"/>
-                <a:tab algn="l" pos="5029200"/>
-                <a:tab algn="l" pos="5486400"/>
-                <a:tab algn="l" pos="5943600"/>
-                <a:tab algn="l" pos="6400800"/>
-                <a:tab algn="l" pos="6858000"/>
-                <a:tab algn="l" pos="7315200"/>
-                <a:tab algn="l" pos="7772400"/>
-                <a:tab algn="l" pos="8229600"/>
-                <a:tab algn="l" pos="8686800"/>
-                <a:tab algn="l" pos="9144000"/>
-              </a:tabLst>
-            </a:pPr>
-            <a:r>
-              <a:rPr b="0" lang="en-US" sz="2000" spc="-1" strike="noStrike">
-                <a:solidFill>
-                  <a:srgbClr val="000000"/>
-                </a:solidFill>
-                <a:latin typeface="Times New Roman"/>
-                <a:ea typeface="WenQuanYi Micro Hei"/>
-              </a:rPr>
-              <a:t>typically resides in a loaded shared library.</a:t>
-            </a:r>
-            <a:endParaRPr b="0" lang="en-US" sz="2000" spc="-1" strike="noStrike">
-              <a:solidFill>
-                <a:srgbClr val="000000"/>
-              </a:solidFill>
-              <a:latin typeface="Arial"/>
-            </a:endParaRPr>
-          </a:p>
-          <a:p>
-            <a:pPr>
-              <a:lnSpc>
-                <a:spcPct val="100000"/>
-              </a:lnSpc>
-              <a:tabLst>
-                <a:tab algn="l" pos="0"/>
-                <a:tab algn="l" pos="457200"/>
-                <a:tab algn="l" pos="914400"/>
-                <a:tab algn="l" pos="1371600"/>
-                <a:tab algn="l" pos="1828800"/>
-                <a:tab algn="l" pos="2286000"/>
-                <a:tab algn="l" pos="2743200"/>
-                <a:tab algn="l" pos="3200400"/>
-                <a:tab algn="l" pos="3657600"/>
-                <a:tab algn="l" pos="4114800"/>
-                <a:tab algn="l" pos="4572000"/>
-                <a:tab algn="l" pos="5029200"/>
-                <a:tab algn="l" pos="5486400"/>
-                <a:tab algn="l" pos="5943600"/>
-                <a:tab algn="l" pos="6400800"/>
-                <a:tab algn="l" pos="6858000"/>
-                <a:tab algn="l" pos="7315200"/>
-                <a:tab algn="l" pos="7772400"/>
-                <a:tab algn="l" pos="8229600"/>
-                <a:tab algn="l" pos="8686800"/>
-                <a:tab algn="l" pos="9144000"/>
-              </a:tabLst>
-            </a:pPr>
-            <a:r>
-              <a:rPr b="0" lang="en-US" sz="2000" spc="-1" strike="noStrike">
-                <a:solidFill>
-                  <a:srgbClr val="000000"/>
-                </a:solidFill>
-                <a:latin typeface="Times New Roman"/>
-                <a:ea typeface="WenQuanYi Micro Hei"/>
-              </a:rPr>
-              <a:t>Many library functions don’t make any use of system calls (e.g., the string-</a:t>
-            </a:r>
-            <a:endParaRPr b="0" lang="en-US" sz="2000" spc="-1" strike="noStrike">
-              <a:solidFill>
-                <a:srgbClr val="000000"/>
-              </a:solidFill>
-              <a:latin typeface="Arial"/>
-            </a:endParaRPr>
-          </a:p>
-          <a:p>
-            <a:pPr>
-              <a:lnSpc>
-                <a:spcPct val="100000"/>
-              </a:lnSpc>
-              <a:tabLst>
-                <a:tab algn="l" pos="0"/>
-                <a:tab algn="l" pos="457200"/>
-                <a:tab algn="l" pos="914400"/>
-                <a:tab algn="l" pos="1371600"/>
-                <a:tab algn="l" pos="1828800"/>
-                <a:tab algn="l" pos="2286000"/>
-                <a:tab algn="l" pos="2743200"/>
-                <a:tab algn="l" pos="3200400"/>
-                <a:tab algn="l" pos="3657600"/>
-                <a:tab algn="l" pos="4114800"/>
-                <a:tab algn="l" pos="4572000"/>
-                <a:tab algn="l" pos="5029200"/>
-                <a:tab algn="l" pos="5486400"/>
-                <a:tab algn="l" pos="5943600"/>
-                <a:tab algn="l" pos="6400800"/>
-                <a:tab algn="l" pos="6858000"/>
-                <a:tab algn="l" pos="7315200"/>
-                <a:tab algn="l" pos="7772400"/>
-                <a:tab algn="l" pos="8229600"/>
-                <a:tab algn="l" pos="8686800"/>
-                <a:tab algn="l" pos="9144000"/>
-              </a:tabLst>
-            </a:pPr>
-            <a:r>
-              <a:rPr b="0" lang="en-US" sz="2000" spc="-1" strike="noStrike">
-                <a:solidFill>
-                  <a:srgbClr val="000000"/>
-                </a:solidFill>
-                <a:latin typeface="Times New Roman"/>
-                <a:ea typeface="WenQuanYi Micro Hei"/>
-              </a:rPr>
-              <a:t>manipulation functions). On the other hand, some library functions are layered on</a:t>
-            </a:r>
-            <a:endParaRPr b="0" lang="en-US" sz="2000" spc="-1" strike="noStrike">
-              <a:solidFill>
-                <a:srgbClr val="000000"/>
-              </a:solidFill>
-              <a:latin typeface="Arial"/>
-            </a:endParaRPr>
-          </a:p>
-          <a:p>
-            <a:pPr>
-              <a:lnSpc>
-                <a:spcPct val="100000"/>
-              </a:lnSpc>
-              <a:tabLst>
-                <a:tab algn="l" pos="0"/>
-                <a:tab algn="l" pos="457200"/>
-                <a:tab algn="l" pos="914400"/>
-                <a:tab algn="l" pos="1371600"/>
-                <a:tab algn="l" pos="1828800"/>
-                <a:tab algn="l" pos="2286000"/>
-                <a:tab algn="l" pos="2743200"/>
-                <a:tab algn="l" pos="3200400"/>
-                <a:tab algn="l" pos="3657600"/>
-                <a:tab algn="l" pos="4114800"/>
-                <a:tab algn="l" pos="4572000"/>
-                <a:tab algn="l" pos="5029200"/>
-                <a:tab algn="l" pos="5486400"/>
-                <a:tab algn="l" pos="5943600"/>
-                <a:tab algn="l" pos="6400800"/>
-                <a:tab algn="l" pos="6858000"/>
-                <a:tab algn="l" pos="7315200"/>
-                <a:tab algn="l" pos="7772400"/>
-                <a:tab algn="l" pos="8229600"/>
-                <a:tab algn="l" pos="8686800"/>
-                <a:tab algn="l" pos="9144000"/>
-              </a:tabLst>
-            </a:pPr>
-            <a:r>
-              <a:rPr b="0" lang="en-US" sz="2000" spc="-1" strike="noStrike">
-                <a:solidFill>
-                  <a:srgbClr val="000000"/>
-                </a:solidFill>
-                <a:latin typeface="Times New Roman"/>
-                <a:ea typeface="WenQuanYi Micro Hei"/>
-              </a:rPr>
-              <a:t>top of system calls. </a:t>
-            </a:r>
-            <a:endParaRPr b="0" lang="en-US" sz="2000" spc="-1" strike="noStrike">
-              <a:solidFill>
-                <a:srgbClr val="000000"/>
-              </a:solidFill>
-              <a:latin typeface="Arial"/>
-            </a:endParaRPr>
-          </a:p>
-          <a:p>
-            <a:pPr>
-              <a:lnSpc>
-                <a:spcPct val="100000"/>
-              </a:lnSpc>
-              <a:tabLst>
-                <a:tab algn="l" pos="0"/>
-                <a:tab algn="l" pos="457200"/>
-                <a:tab algn="l" pos="914400"/>
-                <a:tab algn="l" pos="1371600"/>
-                <a:tab algn="l" pos="1828800"/>
-                <a:tab algn="l" pos="2286000"/>
-                <a:tab algn="l" pos="2743200"/>
-                <a:tab algn="l" pos="3200400"/>
-                <a:tab algn="l" pos="3657600"/>
-                <a:tab algn="l" pos="4114800"/>
-                <a:tab algn="l" pos="4572000"/>
-                <a:tab algn="l" pos="5029200"/>
-                <a:tab algn="l" pos="5486400"/>
-                <a:tab algn="l" pos="5943600"/>
-                <a:tab algn="l" pos="6400800"/>
-                <a:tab algn="l" pos="6858000"/>
-                <a:tab algn="l" pos="7315200"/>
-                <a:tab algn="l" pos="7772400"/>
-                <a:tab algn="l" pos="8229600"/>
-                <a:tab algn="l" pos="8686800"/>
-                <a:tab algn="l" pos="9144000"/>
-              </a:tabLst>
-            </a:pPr>
-            <a:endParaRPr b="0" lang="en-US" sz="2000" spc="-1" strike="noStrike">
-              <a:solidFill>
-                <a:srgbClr val="000000"/>
-              </a:solidFill>
-              <a:latin typeface="Arial"/>
-            </a:endParaRPr>
-          </a:p>
-          <a:p>
-            <a:pPr>
-              <a:lnSpc>
-                <a:spcPct val="100000"/>
-              </a:lnSpc>
-              <a:tabLst>
-                <a:tab algn="l" pos="0"/>
-                <a:tab algn="l" pos="457200"/>
-                <a:tab algn="l" pos="914400"/>
-                <a:tab algn="l" pos="1371600"/>
-                <a:tab algn="l" pos="1828800"/>
-                <a:tab algn="l" pos="2286000"/>
-                <a:tab algn="l" pos="2743200"/>
-                <a:tab algn="l" pos="3200400"/>
-                <a:tab algn="l" pos="3657600"/>
-                <a:tab algn="l" pos="4114800"/>
-                <a:tab algn="l" pos="4572000"/>
-                <a:tab algn="l" pos="5029200"/>
-                <a:tab algn="l" pos="5486400"/>
-                <a:tab algn="l" pos="5943600"/>
-                <a:tab algn="l" pos="6400800"/>
-                <a:tab algn="l" pos="6858000"/>
-                <a:tab algn="l" pos="7315200"/>
-                <a:tab algn="l" pos="7772400"/>
-                <a:tab algn="l" pos="8229600"/>
-                <a:tab algn="l" pos="8686800"/>
-                <a:tab algn="l" pos="9144000"/>
-              </a:tabLst>
-            </a:pPr>
-            <a:r>
-              <a:rPr b="0" lang="en-US" sz="2000" spc="-1" strike="noStrike">
-                <a:solidFill>
-                  <a:srgbClr val="000000"/>
-                </a:solidFill>
-                <a:latin typeface="Times New Roman"/>
-                <a:ea typeface="WenQuanYi Micro Hei"/>
-              </a:rPr>
-              <a:t>For example, the fopen() library function uses the open() system call to actually open a file.</a:t>
-            </a:r>
-            <a:endParaRPr b="0" lang="en-US" sz="2000" spc="-1" strike="noStrike">
-              <a:solidFill>
-                <a:srgbClr val="000000"/>
-              </a:solidFill>
-              <a:latin typeface="Arial"/>
-            </a:endParaRPr>
-          </a:p>
-          <a:p>
-            <a:pPr>
-              <a:lnSpc>
-                <a:spcPct val="100000"/>
-              </a:lnSpc>
-              <a:tabLst>
-                <a:tab algn="l" pos="0"/>
-                <a:tab algn="l" pos="457200"/>
-                <a:tab algn="l" pos="914400"/>
-                <a:tab algn="l" pos="1371600"/>
-                <a:tab algn="l" pos="1828800"/>
-                <a:tab algn="l" pos="2286000"/>
-                <a:tab algn="l" pos="2743200"/>
-                <a:tab algn="l" pos="3200400"/>
-                <a:tab algn="l" pos="3657600"/>
-                <a:tab algn="l" pos="4114800"/>
-                <a:tab algn="l" pos="4572000"/>
-                <a:tab algn="l" pos="5029200"/>
-                <a:tab algn="l" pos="5486400"/>
-                <a:tab algn="l" pos="5943600"/>
-                <a:tab algn="l" pos="6400800"/>
-                <a:tab algn="l" pos="6858000"/>
-                <a:tab algn="l" pos="7315200"/>
-                <a:tab algn="l" pos="7772400"/>
-                <a:tab algn="l" pos="8229600"/>
-                <a:tab algn="l" pos="8686800"/>
-                <a:tab algn="l" pos="9144000"/>
-              </a:tabLst>
-            </a:pPr>
-            <a:r>
-              <a:rPr b="0" lang="en-US" sz="2000" spc="-1" strike="noStrike">
-                <a:solidFill>
-                  <a:srgbClr val="000000"/>
-                </a:solidFill>
-                <a:latin typeface="Times New Roman"/>
-                <a:ea typeface="WenQuanYi Micro Hei"/>
-              </a:rPr>
-              <a:t>Often, library functions are designed to provide a more caller-friendly interface than the</a:t>
-            </a:r>
-            <a:endParaRPr b="0" lang="en-US" sz="2000" spc="-1" strike="noStrike">
-              <a:solidFill>
-                <a:srgbClr val="000000"/>
-              </a:solidFill>
-              <a:latin typeface="Arial"/>
-            </a:endParaRPr>
-          </a:p>
-          <a:p>
-            <a:pPr>
-              <a:lnSpc>
-                <a:spcPct val="100000"/>
-              </a:lnSpc>
-              <a:tabLst>
-                <a:tab algn="l" pos="0"/>
-                <a:tab algn="l" pos="457200"/>
-                <a:tab algn="l" pos="914400"/>
-                <a:tab algn="l" pos="1371600"/>
-                <a:tab algn="l" pos="1828800"/>
-                <a:tab algn="l" pos="2286000"/>
-                <a:tab algn="l" pos="2743200"/>
-                <a:tab algn="l" pos="3200400"/>
-                <a:tab algn="l" pos="3657600"/>
-                <a:tab algn="l" pos="4114800"/>
-                <a:tab algn="l" pos="4572000"/>
-                <a:tab algn="l" pos="5029200"/>
-                <a:tab algn="l" pos="5486400"/>
-                <a:tab algn="l" pos="5943600"/>
-                <a:tab algn="l" pos="6400800"/>
-                <a:tab algn="l" pos="6858000"/>
-                <a:tab algn="l" pos="7315200"/>
-                <a:tab algn="l" pos="7772400"/>
-                <a:tab algn="l" pos="8229600"/>
-                <a:tab algn="l" pos="8686800"/>
-                <a:tab algn="l" pos="9144000"/>
-              </a:tabLst>
-            </a:pPr>
-            <a:r>
-              <a:rPr b="0" lang="en-US" sz="2000" spc="-1" strike="noStrike">
-                <a:solidFill>
-                  <a:srgbClr val="000000"/>
-                </a:solidFill>
-                <a:latin typeface="Times New Roman"/>
-                <a:ea typeface="WenQuanYi Micro Hei"/>
-              </a:rPr>
-              <a:t>underlying system call. </a:t>
-            </a:r>
-            <a:endParaRPr b="0" lang="en-US" sz="2000" spc="-1" strike="noStrike">
-              <a:solidFill>
-                <a:srgbClr val="000000"/>
-              </a:solidFill>
-              <a:latin typeface="Arial"/>
-            </a:endParaRPr>
-          </a:p>
-          <a:p>
-            <a:pPr>
-              <a:lnSpc>
-                <a:spcPct val="100000"/>
-              </a:lnSpc>
-              <a:tabLst>
-                <a:tab algn="l" pos="0"/>
-                <a:tab algn="l" pos="457200"/>
-                <a:tab algn="l" pos="914400"/>
-                <a:tab algn="l" pos="1371600"/>
-                <a:tab algn="l" pos="1828800"/>
-                <a:tab algn="l" pos="2286000"/>
-                <a:tab algn="l" pos="2743200"/>
-                <a:tab algn="l" pos="3200400"/>
-                <a:tab algn="l" pos="3657600"/>
-                <a:tab algn="l" pos="4114800"/>
-                <a:tab algn="l" pos="4572000"/>
-                <a:tab algn="l" pos="5029200"/>
-                <a:tab algn="l" pos="5486400"/>
-                <a:tab algn="l" pos="5943600"/>
-                <a:tab algn="l" pos="6400800"/>
-                <a:tab algn="l" pos="6858000"/>
-                <a:tab algn="l" pos="7315200"/>
-                <a:tab algn="l" pos="7772400"/>
-                <a:tab algn="l" pos="8229600"/>
-                <a:tab algn="l" pos="8686800"/>
-                <a:tab algn="l" pos="9144000"/>
-              </a:tabLst>
-            </a:pPr>
-            <a:endParaRPr b="0" lang="en-US" sz="2000" spc="-1" strike="noStrike">
-              <a:solidFill>
-                <a:srgbClr val="000000"/>
-              </a:solidFill>
-              <a:latin typeface="Arial"/>
-            </a:endParaRPr>
-          </a:p>
-          <a:p>
-            <a:pPr>
-              <a:lnSpc>
-                <a:spcPct val="100000"/>
-              </a:lnSpc>
-              <a:tabLst>
-                <a:tab algn="l" pos="0"/>
-                <a:tab algn="l" pos="457200"/>
-                <a:tab algn="l" pos="914400"/>
-                <a:tab algn="l" pos="1371600"/>
-                <a:tab algn="l" pos="1828800"/>
-                <a:tab algn="l" pos="2286000"/>
-                <a:tab algn="l" pos="2743200"/>
-                <a:tab algn="l" pos="3200400"/>
-                <a:tab algn="l" pos="3657600"/>
-                <a:tab algn="l" pos="4114800"/>
-                <a:tab algn="l" pos="4572000"/>
-                <a:tab algn="l" pos="5029200"/>
-                <a:tab algn="l" pos="5486400"/>
-                <a:tab algn="l" pos="5943600"/>
-                <a:tab algn="l" pos="6400800"/>
-                <a:tab algn="l" pos="6858000"/>
-                <a:tab algn="l" pos="7315200"/>
-                <a:tab algn="l" pos="7772400"/>
-                <a:tab algn="l" pos="8229600"/>
-                <a:tab algn="l" pos="8686800"/>
-                <a:tab algn="l" pos="9144000"/>
-              </a:tabLst>
-            </a:pPr>
-            <a:r>
-              <a:rPr b="0" lang="en-US" sz="2000" spc="-1" strike="noStrike">
-                <a:solidFill>
-                  <a:srgbClr val="000000"/>
-                </a:solidFill>
-                <a:latin typeface="Times New Roman"/>
-                <a:ea typeface="WenQuanYi Micro Hei"/>
-              </a:rPr>
-              <a:t>For example, the printf() function provides output formatting and data buffering, </a:t>
-            </a:r>
-            <a:endParaRPr b="0" lang="en-US" sz="2000" spc="-1" strike="noStrike">
-              <a:solidFill>
-                <a:srgbClr val="000000"/>
-              </a:solidFill>
-              <a:latin typeface="Arial"/>
-            </a:endParaRPr>
-          </a:p>
-          <a:p>
-            <a:pPr>
-              <a:lnSpc>
-                <a:spcPct val="100000"/>
-              </a:lnSpc>
-              <a:tabLst>
-                <a:tab algn="l" pos="0"/>
-                <a:tab algn="l" pos="457200"/>
-                <a:tab algn="l" pos="914400"/>
-                <a:tab algn="l" pos="1371600"/>
-                <a:tab algn="l" pos="1828800"/>
-                <a:tab algn="l" pos="2286000"/>
-                <a:tab algn="l" pos="2743200"/>
-                <a:tab algn="l" pos="3200400"/>
-                <a:tab algn="l" pos="3657600"/>
-                <a:tab algn="l" pos="4114800"/>
-                <a:tab algn="l" pos="4572000"/>
-                <a:tab algn="l" pos="5029200"/>
-                <a:tab algn="l" pos="5486400"/>
-                <a:tab algn="l" pos="5943600"/>
-                <a:tab algn="l" pos="6400800"/>
-                <a:tab algn="l" pos="6858000"/>
-                <a:tab algn="l" pos="7315200"/>
-                <a:tab algn="l" pos="7772400"/>
-                <a:tab algn="l" pos="8229600"/>
-                <a:tab algn="l" pos="8686800"/>
-                <a:tab algn="l" pos="9144000"/>
-              </a:tabLst>
-            </a:pPr>
-            <a:r>
-              <a:rPr b="0" lang="en-US" sz="2000" spc="-1" strike="noStrike">
-                <a:solidFill>
-                  <a:srgbClr val="000000"/>
-                </a:solidFill>
-                <a:latin typeface="Times New Roman"/>
-                <a:ea typeface="WenQuanYi Micro Hei"/>
-              </a:rPr>
-              <a:t>whereas the write() systemcall just outputs a block of bytes. </a:t>
-            </a:r>
-            <a:endParaRPr b="0" lang="en-US" sz="2000" spc="-1" strike="noStrike">
-              <a:solidFill>
-                <a:srgbClr val="000000"/>
-              </a:solidFill>
-              <a:latin typeface="Arial"/>
-            </a:endParaRPr>
-          </a:p>
-          <a:p>
-            <a:pPr>
-              <a:lnSpc>
-                <a:spcPct val="100000"/>
-              </a:lnSpc>
-              <a:tabLst>
-                <a:tab algn="l" pos="0"/>
-                <a:tab algn="l" pos="457200"/>
-                <a:tab algn="l" pos="914400"/>
-                <a:tab algn="l" pos="1371600"/>
-                <a:tab algn="l" pos="1828800"/>
-                <a:tab algn="l" pos="2286000"/>
-                <a:tab algn="l" pos="2743200"/>
-                <a:tab algn="l" pos="3200400"/>
-                <a:tab algn="l" pos="3657600"/>
-                <a:tab algn="l" pos="4114800"/>
-                <a:tab algn="l" pos="4572000"/>
-                <a:tab algn="l" pos="5029200"/>
-                <a:tab algn="l" pos="5486400"/>
-                <a:tab algn="l" pos="5943600"/>
-                <a:tab algn="l" pos="6400800"/>
-                <a:tab algn="l" pos="6858000"/>
-                <a:tab algn="l" pos="7315200"/>
-                <a:tab algn="l" pos="7772400"/>
-                <a:tab algn="l" pos="8229600"/>
-                <a:tab algn="l" pos="8686800"/>
-                <a:tab algn="l" pos="9144000"/>
-              </a:tabLst>
-            </a:pPr>
-            <a:r>
-              <a:rPr b="0" lang="en-US" sz="2000" spc="-1" strike="noStrike">
-                <a:solidFill>
-                  <a:srgbClr val="000000"/>
-                </a:solidFill>
-                <a:latin typeface="Times New Roman"/>
-                <a:ea typeface="WenQuanYi Micro Hei"/>
-              </a:rPr>
-              <a:t>Similarly, the malloc() and free() functions performvarious bookkeeping tasks </a:t>
-            </a:r>
-            <a:endParaRPr b="0" lang="en-US" sz="2000" spc="-1" strike="noStrike">
-              <a:solidFill>
-                <a:srgbClr val="000000"/>
-              </a:solidFill>
-              <a:latin typeface="Arial"/>
-            </a:endParaRPr>
-          </a:p>
-          <a:p>
-            <a:pPr>
-              <a:lnSpc>
-                <a:spcPct val="100000"/>
-              </a:lnSpc>
-              <a:tabLst>
-                <a:tab algn="l" pos="0"/>
-                <a:tab algn="l" pos="457200"/>
-                <a:tab algn="l" pos="914400"/>
-                <a:tab algn="l" pos="1371600"/>
-                <a:tab algn="l" pos="1828800"/>
-                <a:tab algn="l" pos="2286000"/>
-                <a:tab algn="l" pos="2743200"/>
-                <a:tab algn="l" pos="3200400"/>
-                <a:tab algn="l" pos="3657600"/>
-                <a:tab algn="l" pos="4114800"/>
-                <a:tab algn="l" pos="4572000"/>
-                <a:tab algn="l" pos="5029200"/>
-                <a:tab algn="l" pos="5486400"/>
-                <a:tab algn="l" pos="5943600"/>
-                <a:tab algn="l" pos="6400800"/>
-                <a:tab algn="l" pos="6858000"/>
-                <a:tab algn="l" pos="7315200"/>
-                <a:tab algn="l" pos="7772400"/>
-                <a:tab algn="l" pos="8229600"/>
-                <a:tab algn="l" pos="8686800"/>
-                <a:tab algn="l" pos="9144000"/>
-              </a:tabLst>
-            </a:pPr>
-            <a:r>
-              <a:rPr b="0" lang="en-US" sz="2000" spc="-1" strike="noStrike">
-                <a:solidFill>
-                  <a:srgbClr val="000000"/>
-                </a:solidFill>
-                <a:latin typeface="Times New Roman"/>
-                <a:ea typeface="WenQuanYi Micro Hei"/>
-              </a:rPr>
-              <a:t>that make them a much easier way to allocate and free memory than the </a:t>
-            </a:r>
-            <a:endParaRPr b="0" lang="en-US" sz="2000" spc="-1" strike="noStrike">
-              <a:solidFill>
-                <a:srgbClr val="000000"/>
-              </a:solidFill>
-              <a:latin typeface="Arial"/>
-            </a:endParaRPr>
-          </a:p>
-          <a:p>
-            <a:pPr>
-              <a:lnSpc>
-                <a:spcPct val="100000"/>
-              </a:lnSpc>
-              <a:tabLst>
-                <a:tab algn="l" pos="0"/>
-                <a:tab algn="l" pos="457200"/>
-                <a:tab algn="l" pos="914400"/>
-                <a:tab algn="l" pos="1371600"/>
-                <a:tab algn="l" pos="1828800"/>
-                <a:tab algn="l" pos="2286000"/>
-                <a:tab algn="l" pos="2743200"/>
-                <a:tab algn="l" pos="3200400"/>
-                <a:tab algn="l" pos="3657600"/>
-                <a:tab algn="l" pos="4114800"/>
-                <a:tab algn="l" pos="4572000"/>
-                <a:tab algn="l" pos="5029200"/>
-                <a:tab algn="l" pos="5486400"/>
-                <a:tab algn="l" pos="5943600"/>
-                <a:tab algn="l" pos="6400800"/>
-                <a:tab algn="l" pos="6858000"/>
-                <a:tab algn="l" pos="7315200"/>
-                <a:tab algn="l" pos="7772400"/>
-                <a:tab algn="l" pos="8229600"/>
-                <a:tab algn="l" pos="8686800"/>
-                <a:tab algn="l" pos="9144000"/>
-              </a:tabLst>
-            </a:pPr>
-            <a:r>
-              <a:rPr b="0" lang="en-US" sz="2000" spc="-1" strike="noStrike">
-                <a:solidFill>
-                  <a:srgbClr val="000000"/>
-                </a:solidFill>
-                <a:latin typeface="Times New Roman"/>
-                <a:ea typeface="WenQuanYi Micro Hei"/>
-              </a:rPr>
-              <a:t>underlying brk() system call.</a:t>
-            </a:r>
-            <a:endParaRPr b="0" lang="en-US" sz="2000" spc="-1" strike="noStrike">
-              <a:solidFill>
-                <a:srgbClr val="000000"/>
-              </a:solidFill>
-              <a:latin typeface="Arial"/>
-            </a:endParaRPr>
-          </a:p>
-          <a:p>
-            <a:pPr>
-              <a:lnSpc>
-                <a:spcPct val="100000"/>
-              </a:lnSpc>
-              <a:tabLst>
-                <a:tab algn="l" pos="0"/>
-                <a:tab algn="l" pos="457200"/>
-                <a:tab algn="l" pos="914400"/>
-                <a:tab algn="l" pos="1371600"/>
-                <a:tab algn="l" pos="1828800"/>
-                <a:tab algn="l" pos="2286000"/>
-                <a:tab algn="l" pos="2743200"/>
-                <a:tab algn="l" pos="3200400"/>
-                <a:tab algn="l" pos="3657600"/>
-                <a:tab algn="l" pos="4114800"/>
-                <a:tab algn="l" pos="4572000"/>
-                <a:tab algn="l" pos="5029200"/>
-                <a:tab algn="l" pos="5486400"/>
-                <a:tab algn="l" pos="5943600"/>
-                <a:tab algn="l" pos="6400800"/>
-                <a:tab algn="l" pos="6858000"/>
-                <a:tab algn="l" pos="7315200"/>
-                <a:tab algn="l" pos="7772400"/>
-                <a:tab algn="l" pos="8229600"/>
-                <a:tab algn="l" pos="8686800"/>
-                <a:tab algn="l" pos="9144000"/>
-              </a:tabLst>
-            </a:pPr>
-            <a:endParaRPr b="0" lang="en-US" sz="2000" spc="-1" strike="noStrike">
-              <a:solidFill>
-                <a:srgbClr val="000000"/>
-              </a:solidFill>
-              <a:latin typeface="Arial"/>
-            </a:endParaRPr>
-          </a:p>
-        </p:txBody>
-      </p:sp>
+      </p:pic>
     </p:spTree>
   </p:cSld>
   <mc:AlternateContent>
@@ -8149,14 +7492,14 @@
       </p:grpSpPr>
       <p:sp>
         <p:nvSpPr>
-          <p:cNvPr id="88" name="CustomShape 1"/>
+          <p:cNvPr id="89" name="CustomShape 1"/>
           <p:cNvSpPr/>
           <p:nvPr/>
         </p:nvSpPr>
         <p:spPr>
           <a:xfrm>
-            <a:off x="178560" y="144000"/>
-            <a:ext cx="8965080" cy="1624320"/>
+            <a:off x="2798280" y="193680"/>
+            <a:ext cx="3373200" cy="459000"/>
           </a:xfrm>
           <a:prstGeom prst="rect">
             <a:avLst/>
@@ -8173,154 +7516,50 @@
           <a:fontRef idx="minor"/>
         </p:style>
         <p:txBody>
-          <a:bodyPr lIns="90000" rIns="90000" tIns="45000" bIns="45000" anchor="t">
-            <a:noAutofit/>
+          <a:bodyPr wrap="none" lIns="90000" rIns="90000" tIns="46800" bIns="46800" anchor="t">
+            <a:spAutoFit/>
           </a:bodyPr>
           <a:p>
             <a:pPr>
               <a:lnSpc>
                 <a:spcPct val="100000"/>
               </a:lnSpc>
-            </a:pPr>
-            <a:r>
-              <a:rPr b="1" lang="en-IN" sz="1800" spc="-1" strike="noStrike">
-                <a:solidFill>
-                  <a:srgbClr val="000000"/>
-                </a:solidFill>
-                <a:latin typeface="Arial"/>
-                <a:ea typeface="DejaVu Sans"/>
-              </a:rPr>
-              <a:t>Handling Errors from System Calls and Library Functions</a:t>
-            </a:r>
-            <a:endParaRPr b="0" lang="en-US" sz="1800" spc="-1" strike="noStrike">
-              <a:solidFill>
-                <a:srgbClr val="000000"/>
-              </a:solidFill>
-              <a:latin typeface="Arial"/>
-            </a:endParaRPr>
-          </a:p>
-          <a:p>
-            <a:pPr>
-              <a:lnSpc>
-                <a:spcPct val="100000"/>
-              </a:lnSpc>
-            </a:pPr>
-            <a:endParaRPr b="0" lang="en-US" sz="1800" spc="-1" strike="noStrike">
-              <a:solidFill>
-                <a:srgbClr val="000000"/>
-              </a:solidFill>
-              <a:latin typeface="Arial"/>
-            </a:endParaRPr>
-          </a:p>
-          <a:p>
-            <a:pPr algn="just">
-              <a:lnSpc>
-                <a:spcPct val="100000"/>
-              </a:lnSpc>
-            </a:pPr>
-            <a:r>
-              <a:rPr b="0" lang="en-IN" sz="1800" spc="-1" strike="noStrike">
-                <a:solidFill>
-                  <a:srgbClr val="000000"/>
-                </a:solidFill>
-                <a:latin typeface="Arial"/>
-                <a:ea typeface="DejaVu Sans"/>
-              </a:rPr>
-              <a:t>Almost every system call and library function returns some type of status value indi</a:t>
-            </a:r>
-            <a:endParaRPr b="0" lang="en-US" sz="1800" spc="-1" strike="noStrike">
-              <a:solidFill>
-                <a:srgbClr val="000000"/>
-              </a:solidFill>
-              <a:latin typeface="Arial"/>
-            </a:endParaRPr>
-          </a:p>
-          <a:p>
-            <a:pPr algn="just">
-              <a:lnSpc>
-                <a:spcPct val="100000"/>
-              </a:lnSpc>
-            </a:pPr>
-            <a:r>
-              <a:rPr b="0" lang="en-IN" sz="1800" spc="-1" strike="noStrike">
-                <a:solidFill>
-                  <a:srgbClr val="000000"/>
-                </a:solidFill>
-                <a:latin typeface="Arial"/>
-                <a:ea typeface="DejaVu Sans"/>
-              </a:rPr>
-              <a:t>cating whether the call succeeded or failed. This status value should always be</a:t>
-            </a:r>
-            <a:endParaRPr b="0" lang="en-US" sz="1800" spc="-1" strike="noStrike">
-              <a:solidFill>
-                <a:srgbClr val="000000"/>
-              </a:solidFill>
-              <a:latin typeface="Arial"/>
-            </a:endParaRPr>
-          </a:p>
-          <a:p>
-            <a:pPr algn="just">
-              <a:lnSpc>
-                <a:spcPct val="100000"/>
-              </a:lnSpc>
-            </a:pPr>
-            <a:r>
-              <a:rPr b="0" lang="en-IN" sz="1800" spc="-1" strike="noStrike">
-                <a:solidFill>
-                  <a:srgbClr val="000000"/>
-                </a:solidFill>
-                <a:latin typeface="Arial"/>
-                <a:ea typeface="DejaVu Sans"/>
-              </a:rPr>
-              <a:t>checked to see whether the call succeeded. If it did not, then appropriate action</a:t>
-            </a:r>
-            <a:endParaRPr b="0" lang="en-US" sz="1800" spc="-1" strike="noStrike">
-              <a:solidFill>
-                <a:srgbClr val="000000"/>
-              </a:solidFill>
-              <a:latin typeface="Arial"/>
-            </a:endParaRPr>
-          </a:p>
-          <a:p>
-            <a:pPr algn="just">
-              <a:lnSpc>
-                <a:spcPct val="100000"/>
-              </a:lnSpc>
-            </a:pPr>
-            <a:r>
-              <a:rPr b="0" lang="en-IN" sz="1800" spc="-1" strike="noStrike">
-                <a:solidFill>
-                  <a:srgbClr val="000000"/>
-                </a:solidFill>
-                <a:latin typeface="Arial"/>
-                <a:ea typeface="DejaVu Sans"/>
-              </a:rPr>
-              <a:t>should be taken—at the very least, the program should display an error message</a:t>
-            </a:r>
-            <a:endParaRPr b="0" lang="en-US" sz="1800" spc="-1" strike="noStrike">
-              <a:solidFill>
-                <a:srgbClr val="000000"/>
-              </a:solidFill>
-              <a:latin typeface="Arial"/>
-            </a:endParaRPr>
-          </a:p>
-          <a:p>
-            <a:pPr algn="just">
-              <a:lnSpc>
-                <a:spcPct val="100000"/>
-              </a:lnSpc>
-            </a:pPr>
-            <a:r>
-              <a:rPr b="0" lang="en-IN" sz="1800" spc="-1" strike="noStrike">
-                <a:solidFill>
-                  <a:srgbClr val="000000"/>
-                </a:solidFill>
-                <a:latin typeface="Arial"/>
-                <a:ea typeface="DejaVu Sans"/>
-              </a:rPr>
-              <a:t>warning that something unexpected occurred.</a:t>
-            </a:r>
-            <a:endParaRPr b="0" lang="en-US" sz="1800" spc="-1" strike="noStrike">
+              <a:tabLst>
+                <a:tab algn="l" pos="0"/>
+                <a:tab algn="l" pos="457200"/>
+                <a:tab algn="l" pos="914400"/>
+                <a:tab algn="l" pos="1371600"/>
+                <a:tab algn="l" pos="1828800"/>
+                <a:tab algn="l" pos="2286000"/>
+                <a:tab algn="l" pos="2743200"/>
+                <a:tab algn="l" pos="3200400"/>
+                <a:tab algn="l" pos="3657600"/>
+                <a:tab algn="l" pos="4114800"/>
+                <a:tab algn="l" pos="4572000"/>
+                <a:tab algn="l" pos="5029200"/>
+                <a:tab algn="l" pos="5486400"/>
+                <a:tab algn="l" pos="5943600"/>
+                <a:tab algn="l" pos="6400800"/>
+                <a:tab algn="l" pos="6858000"/>
+                <a:tab algn="l" pos="7315200"/>
+                <a:tab algn="l" pos="7772400"/>
+                <a:tab algn="l" pos="8229600"/>
+                <a:tab algn="l" pos="8686800"/>
+                <a:tab algn="l" pos="9144000"/>
+              </a:tabLst>
+            </a:pPr>
+            <a:r>
+              <a:rPr b="0" lang="en-US" sz="2400" spc="-1" strike="noStrike" u="sng">
+                <a:solidFill>
+                  <a:srgbClr val="000000"/>
+                </a:solidFill>
+                <a:uFillTx/>
+                <a:latin typeface="Times New Roman"/>
+                <a:ea typeface="WenQuanYi Micro Hei"/>
+              </a:rPr>
+              <a:t>System calls &amp; ‘C’ library</a:t>
+            </a:r>
+            <a:endParaRPr b="0" lang="en-US" sz="2400" spc="-1" strike="noStrike">
               <a:solidFill>
                 <a:srgbClr val="000000"/>
               </a:solidFill>
@@ -8331,14 +7570,14 @@
       </p:sp>
       <p:sp>
         <p:nvSpPr>
-          <p:cNvPr id="89" name="CustomShape 2"/>
+          <p:cNvPr id="90" name="CustomShape 2"/>
           <p:cNvSpPr/>
           <p:nvPr/>
         </p:nvSpPr>
         <p:spPr>
           <a:xfrm>
-            <a:off x="360000" y="1845360"/>
-            <a:ext cx="3249360" cy="600480"/>
+            <a:off x="61200" y="662400"/>
+            <a:ext cx="10053000" cy="5886720"/>
           </a:xfrm>
           <a:prstGeom prst="rect">
             <a:avLst/>
@@ -8355,16 +7594,299 @@
           <a:fontRef idx="minor"/>
         </p:style>
         <p:txBody>
-          <a:bodyPr lIns="90000" rIns="90000" tIns="45000" bIns="45000" anchor="t">
-            <a:noAutofit/>
+          <a:bodyPr wrap="none" lIns="90000" rIns="90000" tIns="46800" bIns="46800" anchor="t">
+            <a:spAutoFit/>
           </a:bodyPr>
           <a:p>
+            <a:pPr algn="just">
+              <a:lnSpc>
+                <a:spcPct val="100000"/>
+              </a:lnSpc>
+              <a:tabLst>
+                <a:tab algn="l" pos="0"/>
+                <a:tab algn="l" pos="457200"/>
+                <a:tab algn="l" pos="914400"/>
+                <a:tab algn="l" pos="1371600"/>
+                <a:tab algn="l" pos="1828800"/>
+                <a:tab algn="l" pos="2286000"/>
+                <a:tab algn="l" pos="2743200"/>
+                <a:tab algn="l" pos="3200400"/>
+                <a:tab algn="l" pos="3657600"/>
+                <a:tab algn="l" pos="4114800"/>
+                <a:tab algn="l" pos="4572000"/>
+                <a:tab algn="l" pos="5029200"/>
+                <a:tab algn="l" pos="5486400"/>
+                <a:tab algn="l" pos="5943600"/>
+                <a:tab algn="l" pos="6400800"/>
+                <a:tab algn="l" pos="6858000"/>
+                <a:tab algn="l" pos="7315200"/>
+                <a:tab algn="l" pos="7772400"/>
+                <a:tab algn="l" pos="8229600"/>
+                <a:tab algn="l" pos="8686800"/>
+                <a:tab algn="l" pos="9144000"/>
+              </a:tabLst>
+            </a:pPr>
+            <a:r>
+              <a:rPr b="0" lang="en-US" sz="2000" spc="-1" strike="noStrike">
+                <a:solidFill>
+                  <a:srgbClr val="000000"/>
+                </a:solidFill>
+                <a:latin typeface="Times New Roman"/>
+                <a:ea typeface="WenQuanYi Micro Hei"/>
+              </a:rPr>
+              <a:t>A </a:t>
+            </a:r>
+            <a:r>
+              <a:rPr b="0" i="1" lang="en-US" sz="2000" spc="-1" strike="noStrike">
+                <a:solidFill>
+                  <a:srgbClr val="000000"/>
+                </a:solidFill>
+                <a:latin typeface="Times New Roman"/>
+                <a:ea typeface="WenQuanYi Micro Hei"/>
+              </a:rPr>
+              <a:t>library function </a:t>
+            </a:r>
+            <a:r>
+              <a:rPr b="0" lang="en-US" sz="2000" spc="-1" strike="noStrike">
+                <a:solidFill>
+                  <a:srgbClr val="000000"/>
+                </a:solidFill>
+                <a:latin typeface="Times New Roman"/>
+                <a:ea typeface="WenQuanYi Micro Hei"/>
+              </a:rPr>
+              <a:t>is an ordinary function that resides in a library external to your program. </a:t>
+            </a:r>
+            <a:endParaRPr b="0" lang="en-US" sz="2000" spc="-1" strike="noStrike">
+              <a:solidFill>
+                <a:srgbClr val="000000"/>
+              </a:solidFill>
+              <a:latin typeface="Arial"/>
+            </a:endParaRPr>
+          </a:p>
+          <a:p>
+            <a:pPr algn="just">
+              <a:lnSpc>
+                <a:spcPct val="100000"/>
+              </a:lnSpc>
+              <a:tabLst>
+                <a:tab algn="l" pos="0"/>
+                <a:tab algn="l" pos="457200"/>
+                <a:tab algn="l" pos="914400"/>
+                <a:tab algn="l" pos="1371600"/>
+                <a:tab algn="l" pos="1828800"/>
+                <a:tab algn="l" pos="2286000"/>
+                <a:tab algn="l" pos="2743200"/>
+                <a:tab algn="l" pos="3200400"/>
+                <a:tab algn="l" pos="3657600"/>
+                <a:tab algn="l" pos="4114800"/>
+                <a:tab algn="l" pos="4572000"/>
+                <a:tab algn="l" pos="5029200"/>
+                <a:tab algn="l" pos="5486400"/>
+                <a:tab algn="l" pos="5943600"/>
+                <a:tab algn="l" pos="6400800"/>
+                <a:tab algn="l" pos="6858000"/>
+                <a:tab algn="l" pos="7315200"/>
+                <a:tab algn="l" pos="7772400"/>
+                <a:tab algn="l" pos="8229600"/>
+                <a:tab algn="l" pos="8686800"/>
+                <a:tab algn="l" pos="9144000"/>
+              </a:tabLst>
+            </a:pPr>
+            <a:r>
+              <a:rPr b="0" lang="en-US" sz="2000" spc="-1" strike="noStrike">
+                <a:solidFill>
+                  <a:srgbClr val="000000"/>
+                </a:solidFill>
+                <a:latin typeface="Times New Roman"/>
+                <a:ea typeface="WenQuanYi Micro Hei"/>
+              </a:rPr>
+              <a:t>For example, getopt_long and fopen are functions provided in the C library. A call to a</a:t>
+            </a:r>
+            <a:endParaRPr b="0" lang="en-US" sz="2000" spc="-1" strike="noStrike">
+              <a:solidFill>
+                <a:srgbClr val="000000"/>
+              </a:solidFill>
+              <a:latin typeface="Arial"/>
+            </a:endParaRPr>
+          </a:p>
+          <a:p>
+            <a:pPr algn="just">
+              <a:lnSpc>
+                <a:spcPct val="100000"/>
+              </a:lnSpc>
+              <a:tabLst>
+                <a:tab algn="l" pos="0"/>
+                <a:tab algn="l" pos="457200"/>
+                <a:tab algn="l" pos="914400"/>
+                <a:tab algn="l" pos="1371600"/>
+                <a:tab algn="l" pos="1828800"/>
+                <a:tab algn="l" pos="2286000"/>
+                <a:tab algn="l" pos="2743200"/>
+                <a:tab algn="l" pos="3200400"/>
+                <a:tab algn="l" pos="3657600"/>
+                <a:tab algn="l" pos="4114800"/>
+                <a:tab algn="l" pos="4572000"/>
+                <a:tab algn="l" pos="5029200"/>
+                <a:tab algn="l" pos="5486400"/>
+                <a:tab algn="l" pos="5943600"/>
+                <a:tab algn="l" pos="6400800"/>
+                <a:tab algn="l" pos="6858000"/>
+                <a:tab algn="l" pos="7315200"/>
+                <a:tab algn="l" pos="7772400"/>
+                <a:tab algn="l" pos="8229600"/>
+                <a:tab algn="l" pos="8686800"/>
+                <a:tab algn="l" pos="9144000"/>
+              </a:tabLst>
+            </a:pPr>
+            <a:r>
+              <a:rPr b="0" lang="en-US" sz="2000" spc="-1" strike="noStrike">
+                <a:solidFill>
+                  <a:srgbClr val="000000"/>
+                </a:solidFill>
+                <a:latin typeface="Times New Roman"/>
+                <a:ea typeface="WenQuanYi Micro Hei"/>
+              </a:rPr>
+              <a:t>library function is just like any other function call. The arguments are placed in processor</a:t>
+            </a:r>
+            <a:endParaRPr b="0" lang="en-US" sz="2000" spc="-1" strike="noStrike">
+              <a:solidFill>
+                <a:srgbClr val="000000"/>
+              </a:solidFill>
+              <a:latin typeface="Arial"/>
+            </a:endParaRPr>
+          </a:p>
+          <a:p>
+            <a:pPr algn="just">
+              <a:lnSpc>
+                <a:spcPct val="100000"/>
+              </a:lnSpc>
+              <a:tabLst>
+                <a:tab algn="l" pos="0"/>
+                <a:tab algn="l" pos="457200"/>
+                <a:tab algn="l" pos="914400"/>
+                <a:tab algn="l" pos="1371600"/>
+                <a:tab algn="l" pos="1828800"/>
+                <a:tab algn="l" pos="2286000"/>
+                <a:tab algn="l" pos="2743200"/>
+                <a:tab algn="l" pos="3200400"/>
+                <a:tab algn="l" pos="3657600"/>
+                <a:tab algn="l" pos="4114800"/>
+                <a:tab algn="l" pos="4572000"/>
+                <a:tab algn="l" pos="5029200"/>
+                <a:tab algn="l" pos="5486400"/>
+                <a:tab algn="l" pos="5943600"/>
+                <a:tab algn="l" pos="6400800"/>
+                <a:tab algn="l" pos="6858000"/>
+                <a:tab algn="l" pos="7315200"/>
+                <a:tab algn="l" pos="7772400"/>
+                <a:tab algn="l" pos="8229600"/>
+                <a:tab algn="l" pos="8686800"/>
+                <a:tab algn="l" pos="9144000"/>
+              </a:tabLst>
+            </a:pPr>
+            <a:r>
+              <a:rPr b="0" lang="en-US" sz="2000" spc="-1" strike="noStrike">
+                <a:solidFill>
+                  <a:srgbClr val="000000"/>
+                </a:solidFill>
+                <a:latin typeface="Times New Roman"/>
+                <a:ea typeface="WenQuanYi Micro Hei"/>
+              </a:rPr>
+              <a:t>Registers  or onto the stack, and execution is transferred to the start of the function’s code, which</a:t>
+            </a:r>
+            <a:endParaRPr b="0" lang="en-US" sz="2000" spc="-1" strike="noStrike">
+              <a:solidFill>
+                <a:srgbClr val="000000"/>
+              </a:solidFill>
+              <a:latin typeface="Arial"/>
+            </a:endParaRPr>
+          </a:p>
+          <a:p>
+            <a:pPr algn="just">
+              <a:lnSpc>
+                <a:spcPct val="100000"/>
+              </a:lnSpc>
+              <a:tabLst>
+                <a:tab algn="l" pos="0"/>
+                <a:tab algn="l" pos="457200"/>
+                <a:tab algn="l" pos="914400"/>
+                <a:tab algn="l" pos="1371600"/>
+                <a:tab algn="l" pos="1828800"/>
+                <a:tab algn="l" pos="2286000"/>
+                <a:tab algn="l" pos="2743200"/>
+                <a:tab algn="l" pos="3200400"/>
+                <a:tab algn="l" pos="3657600"/>
+                <a:tab algn="l" pos="4114800"/>
+                <a:tab algn="l" pos="4572000"/>
+                <a:tab algn="l" pos="5029200"/>
+                <a:tab algn="l" pos="5486400"/>
+                <a:tab algn="l" pos="5943600"/>
+                <a:tab algn="l" pos="6400800"/>
+                <a:tab algn="l" pos="6858000"/>
+                <a:tab algn="l" pos="7315200"/>
+                <a:tab algn="l" pos="7772400"/>
+                <a:tab algn="l" pos="8229600"/>
+                <a:tab algn="l" pos="8686800"/>
+                <a:tab algn="l" pos="9144000"/>
+              </a:tabLst>
+            </a:pPr>
+            <a:r>
+              <a:rPr b="0" lang="en-US" sz="2000" spc="-1" strike="noStrike">
+                <a:solidFill>
+                  <a:srgbClr val="000000"/>
+                </a:solidFill>
+                <a:latin typeface="Times New Roman"/>
+                <a:ea typeface="WenQuanYi Micro Hei"/>
+              </a:rPr>
+              <a:t>typically resides in a loaded shared library.</a:t>
+            </a:r>
+            <a:endParaRPr b="0" lang="en-US" sz="2000" spc="-1" strike="noStrike">
+              <a:solidFill>
+                <a:srgbClr val="000000"/>
+              </a:solidFill>
+              <a:latin typeface="Arial"/>
+            </a:endParaRPr>
+          </a:p>
+          <a:p>
             <a:pPr>
               <a:lnSpc>
                 <a:spcPct val="100000"/>
               </a:lnSpc>
-            </a:pPr>
-            <a:endParaRPr b="0" lang="en-US" sz="1800" spc="-1" strike="noStrike">
+              <a:tabLst>
+                <a:tab algn="l" pos="0"/>
+                <a:tab algn="l" pos="457200"/>
+                <a:tab algn="l" pos="914400"/>
+                <a:tab algn="l" pos="1371600"/>
+                <a:tab algn="l" pos="1828800"/>
+                <a:tab algn="l" pos="2286000"/>
+                <a:tab algn="l" pos="2743200"/>
+                <a:tab algn="l" pos="3200400"/>
+                <a:tab algn="l" pos="3657600"/>
+                <a:tab algn="l" pos="4114800"/>
+                <a:tab algn="l" pos="4572000"/>
+                <a:tab algn="l" pos="5029200"/>
+                <a:tab algn="l" pos="5486400"/>
+                <a:tab algn="l" pos="5943600"/>
+                <a:tab algn="l" pos="6400800"/>
+                <a:tab algn="l" pos="6858000"/>
+                <a:tab algn="l" pos="7315200"/>
+                <a:tab algn="l" pos="7772400"/>
+                <a:tab algn="l" pos="8229600"/>
+                <a:tab algn="l" pos="8686800"/>
+                <a:tab algn="l" pos="9144000"/>
+              </a:tabLst>
+            </a:pPr>
+            <a:r>
+              <a:rPr b="0" lang="en-US" sz="2000" spc="-1" strike="noStrike">
+                <a:solidFill>
+                  <a:srgbClr val="000000"/>
+                </a:solidFill>
+                <a:latin typeface="Times New Roman"/>
+                <a:ea typeface="WenQuanYi Micro Hei"/>
+              </a:rPr>
+              <a:t>Many library functions don’t make any use of system calls (e.g., the string-</a:t>
+            </a:r>
+            <a:endParaRPr b="0" lang="en-US" sz="2000" spc="-1" strike="noStrike">
               <a:solidFill>
                 <a:srgbClr val="000000"/>
               </a:solidFill>
@@ -8376,18 +7898,41 @@
               <a:lnSpc>
                 <a:spcPct val="100000"/>
               </a:lnSpc>
-            </a:pPr>
-            <a:r>
-              <a:rPr b="0" lang="en-IN" sz="1800" spc="-1" strike="noStrike">
-                <a:solidFill>
-                  <a:srgbClr val="000000"/>
-                </a:solidFill>
-                <a:latin typeface="Arial"/>
-                <a:ea typeface="DejaVu Sans"/>
-              </a:rPr>
-              <a:t>#include &lt;stdio.h&gt;</a:t>
-            </a:r>
-            <a:endParaRPr b="0" lang="en-US" sz="1800" spc="-1" strike="noStrike">
+              <a:tabLst>
+                <a:tab algn="l" pos="0"/>
+                <a:tab algn="l" pos="457200"/>
+                <a:tab algn="l" pos="914400"/>
+                <a:tab algn="l" pos="1371600"/>
+                <a:tab algn="l" pos="1828800"/>
+                <a:tab algn="l" pos="2286000"/>
+                <a:tab algn="l" pos="2743200"/>
+                <a:tab algn="l" pos="3200400"/>
+                <a:tab algn="l" pos="3657600"/>
+                <a:tab algn="l" pos="4114800"/>
+                <a:tab algn="l" pos="4572000"/>
+                <a:tab algn="l" pos="5029200"/>
+                <a:tab algn="l" pos="5486400"/>
+                <a:tab algn="l" pos="5943600"/>
+                <a:tab algn="l" pos="6400800"/>
+                <a:tab algn="l" pos="6858000"/>
+                <a:tab algn="l" pos="7315200"/>
+                <a:tab algn="l" pos="7772400"/>
+                <a:tab algn="l" pos="8229600"/>
+                <a:tab algn="l" pos="8686800"/>
+                <a:tab algn="l" pos="9144000"/>
+              </a:tabLst>
+            </a:pPr>
+            <a:r>
+              <a:rPr b="0" lang="en-US" sz="2000" spc="-1" strike="noStrike">
+                <a:solidFill>
+                  <a:srgbClr val="000000"/>
+                </a:solidFill>
+                <a:latin typeface="Times New Roman"/>
+                <a:ea typeface="WenQuanYi Micro Hei"/>
+              </a:rPr>
+              <a:t>manipulation functions). On the other hand, some library functions are layered on</a:t>
+            </a:r>
+            <a:endParaRPr b="0" lang="en-US" sz="2000" spc="-1" strike="noStrike">
               <a:solidFill>
                 <a:srgbClr val="000000"/>
               </a:solidFill>
@@ -8399,8 +7944,41 @@
               <a:lnSpc>
                 <a:spcPct val="100000"/>
               </a:lnSpc>
-            </a:pPr>
-            <a:endParaRPr b="0" lang="en-US" sz="1800" spc="-1" strike="noStrike">
+              <a:tabLst>
+                <a:tab algn="l" pos="0"/>
+                <a:tab algn="l" pos="457200"/>
+                <a:tab algn="l" pos="914400"/>
+                <a:tab algn="l" pos="1371600"/>
+                <a:tab algn="l" pos="1828800"/>
+                <a:tab algn="l" pos="2286000"/>
+                <a:tab algn="l" pos="2743200"/>
+                <a:tab algn="l" pos="3200400"/>
+                <a:tab algn="l" pos="3657600"/>
+                <a:tab algn="l" pos="4114800"/>
+                <a:tab algn="l" pos="4572000"/>
+                <a:tab algn="l" pos="5029200"/>
+                <a:tab algn="l" pos="5486400"/>
+                <a:tab algn="l" pos="5943600"/>
+                <a:tab algn="l" pos="6400800"/>
+                <a:tab algn="l" pos="6858000"/>
+                <a:tab algn="l" pos="7315200"/>
+                <a:tab algn="l" pos="7772400"/>
+                <a:tab algn="l" pos="8229600"/>
+                <a:tab algn="l" pos="8686800"/>
+                <a:tab algn="l" pos="9144000"/>
+              </a:tabLst>
+            </a:pPr>
+            <a:r>
+              <a:rPr b="0" lang="en-US" sz="2000" spc="-1" strike="noStrike">
+                <a:solidFill>
+                  <a:srgbClr val="000000"/>
+                </a:solidFill>
+                <a:latin typeface="Times New Roman"/>
+                <a:ea typeface="WenQuanYi Micro Hei"/>
+              </a:rPr>
+              <a:t>top of system calls. </a:t>
+            </a:r>
+            <a:endParaRPr b="0" lang="en-US" sz="2000" spc="-1" strike="noStrike">
               <a:solidFill>
                 <a:srgbClr val="000000"/>
               </a:solidFill>
@@ -8412,8 +7990,31 @@
               <a:lnSpc>
                 <a:spcPct val="100000"/>
               </a:lnSpc>
-            </a:pPr>
-            <a:endParaRPr b="0" lang="en-US" sz="1800" spc="-1" strike="noStrike">
+              <a:tabLst>
+                <a:tab algn="l" pos="0"/>
+                <a:tab algn="l" pos="457200"/>
+                <a:tab algn="l" pos="914400"/>
+                <a:tab algn="l" pos="1371600"/>
+                <a:tab algn="l" pos="1828800"/>
+                <a:tab algn="l" pos="2286000"/>
+                <a:tab algn="l" pos="2743200"/>
+                <a:tab algn="l" pos="3200400"/>
+                <a:tab algn="l" pos="3657600"/>
+                <a:tab algn="l" pos="4114800"/>
+                <a:tab algn="l" pos="4572000"/>
+                <a:tab algn="l" pos="5029200"/>
+                <a:tab algn="l" pos="5486400"/>
+                <a:tab algn="l" pos="5943600"/>
+                <a:tab algn="l" pos="6400800"/>
+                <a:tab algn="l" pos="6858000"/>
+                <a:tab algn="l" pos="7315200"/>
+                <a:tab algn="l" pos="7772400"/>
+                <a:tab algn="l" pos="8229600"/>
+                <a:tab algn="l" pos="8686800"/>
+                <a:tab algn="l" pos="9144000"/>
+              </a:tabLst>
+            </a:pPr>
+            <a:endParaRPr b="0" lang="en-US" sz="2000" spc="-1" strike="noStrike">
               <a:solidFill>
                 <a:srgbClr val="000000"/>
               </a:solidFill>
@@ -8425,8 +8026,41 @@
               <a:lnSpc>
                 <a:spcPct val="100000"/>
               </a:lnSpc>
-            </a:pPr>
-            <a:endParaRPr b="0" lang="en-US" sz="1800" spc="-1" strike="noStrike">
+              <a:tabLst>
+                <a:tab algn="l" pos="0"/>
+                <a:tab algn="l" pos="457200"/>
+                <a:tab algn="l" pos="914400"/>
+                <a:tab algn="l" pos="1371600"/>
+                <a:tab algn="l" pos="1828800"/>
+                <a:tab algn="l" pos="2286000"/>
+                <a:tab algn="l" pos="2743200"/>
+                <a:tab algn="l" pos="3200400"/>
+                <a:tab algn="l" pos="3657600"/>
+                <a:tab algn="l" pos="4114800"/>
+                <a:tab algn="l" pos="4572000"/>
+                <a:tab algn="l" pos="5029200"/>
+                <a:tab algn="l" pos="5486400"/>
+                <a:tab algn="l" pos="5943600"/>
+                <a:tab algn="l" pos="6400800"/>
+                <a:tab algn="l" pos="6858000"/>
+                <a:tab algn="l" pos="7315200"/>
+                <a:tab algn="l" pos="7772400"/>
+                <a:tab algn="l" pos="8229600"/>
+                <a:tab algn="l" pos="8686800"/>
+                <a:tab algn="l" pos="9144000"/>
+              </a:tabLst>
+            </a:pPr>
+            <a:r>
+              <a:rPr b="0" lang="en-US" sz="2000" spc="-1" strike="noStrike">
+                <a:solidFill>
+                  <a:srgbClr val="000000"/>
+                </a:solidFill>
+                <a:latin typeface="Times New Roman"/>
+                <a:ea typeface="WenQuanYi Micro Hei"/>
+              </a:rPr>
+              <a:t>For example, the fopen() library function uses the open() system call to actually open a file.</a:t>
+            </a:r>
+            <a:endParaRPr b="0" lang="en-US" sz="2000" spc="-1" strike="noStrike">
               <a:solidFill>
                 <a:srgbClr val="000000"/>
               </a:solidFill>
@@ -8438,8 +8072,41 @@
               <a:lnSpc>
                 <a:spcPct val="100000"/>
               </a:lnSpc>
-            </a:pPr>
-            <a:endParaRPr b="0" lang="en-US" sz="1800" spc="-1" strike="noStrike">
+              <a:tabLst>
+                <a:tab algn="l" pos="0"/>
+                <a:tab algn="l" pos="457200"/>
+                <a:tab algn="l" pos="914400"/>
+                <a:tab algn="l" pos="1371600"/>
+                <a:tab algn="l" pos="1828800"/>
+                <a:tab algn="l" pos="2286000"/>
+                <a:tab algn="l" pos="2743200"/>
+                <a:tab algn="l" pos="3200400"/>
+                <a:tab algn="l" pos="3657600"/>
+                <a:tab algn="l" pos="4114800"/>
+                <a:tab algn="l" pos="4572000"/>
+                <a:tab algn="l" pos="5029200"/>
+                <a:tab algn="l" pos="5486400"/>
+                <a:tab algn="l" pos="5943600"/>
+                <a:tab algn="l" pos="6400800"/>
+                <a:tab algn="l" pos="6858000"/>
+                <a:tab algn="l" pos="7315200"/>
+                <a:tab algn="l" pos="7772400"/>
+                <a:tab algn="l" pos="8229600"/>
+                <a:tab algn="l" pos="8686800"/>
+                <a:tab algn="l" pos="9144000"/>
+              </a:tabLst>
+            </a:pPr>
+            <a:r>
+              <a:rPr b="0" lang="en-US" sz="2000" spc="-1" strike="noStrike">
+                <a:solidFill>
+                  <a:srgbClr val="000000"/>
+                </a:solidFill>
+                <a:latin typeface="Times New Roman"/>
+                <a:ea typeface="WenQuanYi Micro Hei"/>
+              </a:rPr>
+              <a:t>Often, library functions are designed to provide a more caller-friendly interface than the</a:t>
+            </a:r>
+            <a:endParaRPr b="0" lang="en-US" sz="2000" spc="-1" strike="noStrike">
               <a:solidFill>
                 <a:srgbClr val="000000"/>
               </a:solidFill>
@@ -8451,8 +8118,41 @@
               <a:lnSpc>
                 <a:spcPct val="100000"/>
               </a:lnSpc>
-            </a:pPr>
-            <a:endParaRPr b="0" lang="en-US" sz="1800" spc="-1" strike="noStrike">
+              <a:tabLst>
+                <a:tab algn="l" pos="0"/>
+                <a:tab algn="l" pos="457200"/>
+                <a:tab algn="l" pos="914400"/>
+                <a:tab algn="l" pos="1371600"/>
+                <a:tab algn="l" pos="1828800"/>
+                <a:tab algn="l" pos="2286000"/>
+                <a:tab algn="l" pos="2743200"/>
+                <a:tab algn="l" pos="3200400"/>
+                <a:tab algn="l" pos="3657600"/>
+                <a:tab algn="l" pos="4114800"/>
+                <a:tab algn="l" pos="4572000"/>
+                <a:tab algn="l" pos="5029200"/>
+                <a:tab algn="l" pos="5486400"/>
+                <a:tab algn="l" pos="5943600"/>
+                <a:tab algn="l" pos="6400800"/>
+                <a:tab algn="l" pos="6858000"/>
+                <a:tab algn="l" pos="7315200"/>
+                <a:tab algn="l" pos="7772400"/>
+                <a:tab algn="l" pos="8229600"/>
+                <a:tab algn="l" pos="8686800"/>
+                <a:tab algn="l" pos="9144000"/>
+              </a:tabLst>
+            </a:pPr>
+            <a:r>
+              <a:rPr b="0" lang="en-US" sz="2000" spc="-1" strike="noStrike">
+                <a:solidFill>
+                  <a:srgbClr val="000000"/>
+                </a:solidFill>
+                <a:latin typeface="Times New Roman"/>
+                <a:ea typeface="WenQuanYi Micro Hei"/>
+              </a:rPr>
+              <a:t>underlying system call. </a:t>
+            </a:r>
+            <a:endParaRPr b="0" lang="en-US" sz="2000" spc="-1" strike="noStrike">
               <a:solidFill>
                 <a:srgbClr val="000000"/>
               </a:solidFill>
@@ -8464,8 +8164,31 @@
               <a:lnSpc>
                 <a:spcPct val="100000"/>
               </a:lnSpc>
-            </a:pPr>
-            <a:endParaRPr b="0" lang="en-US" sz="1800" spc="-1" strike="noStrike">
+              <a:tabLst>
+                <a:tab algn="l" pos="0"/>
+                <a:tab algn="l" pos="457200"/>
+                <a:tab algn="l" pos="914400"/>
+                <a:tab algn="l" pos="1371600"/>
+                <a:tab algn="l" pos="1828800"/>
+                <a:tab algn="l" pos="2286000"/>
+                <a:tab algn="l" pos="2743200"/>
+                <a:tab algn="l" pos="3200400"/>
+                <a:tab algn="l" pos="3657600"/>
+                <a:tab algn="l" pos="4114800"/>
+                <a:tab algn="l" pos="4572000"/>
+                <a:tab algn="l" pos="5029200"/>
+                <a:tab algn="l" pos="5486400"/>
+                <a:tab algn="l" pos="5943600"/>
+                <a:tab algn="l" pos="6400800"/>
+                <a:tab algn="l" pos="6858000"/>
+                <a:tab algn="l" pos="7315200"/>
+                <a:tab algn="l" pos="7772400"/>
+                <a:tab algn="l" pos="8229600"/>
+                <a:tab algn="l" pos="8686800"/>
+                <a:tab algn="l" pos="9144000"/>
+              </a:tabLst>
+            </a:pPr>
+            <a:endParaRPr b="0" lang="en-US" sz="2000" spc="-1" strike="noStrike">
               <a:solidFill>
                 <a:srgbClr val="000000"/>
               </a:solidFill>
@@ -8477,8 +8200,41 @@
               <a:lnSpc>
                 <a:spcPct val="100000"/>
               </a:lnSpc>
-            </a:pPr>
-            <a:endParaRPr b="0" lang="en-US" sz="1800" spc="-1" strike="noStrike">
+              <a:tabLst>
+                <a:tab algn="l" pos="0"/>
+                <a:tab algn="l" pos="457200"/>
+                <a:tab algn="l" pos="914400"/>
+                <a:tab algn="l" pos="1371600"/>
+                <a:tab algn="l" pos="1828800"/>
+                <a:tab algn="l" pos="2286000"/>
+                <a:tab algn="l" pos="2743200"/>
+                <a:tab algn="l" pos="3200400"/>
+                <a:tab algn="l" pos="3657600"/>
+                <a:tab algn="l" pos="4114800"/>
+                <a:tab algn="l" pos="4572000"/>
+                <a:tab algn="l" pos="5029200"/>
+                <a:tab algn="l" pos="5486400"/>
+                <a:tab algn="l" pos="5943600"/>
+                <a:tab algn="l" pos="6400800"/>
+                <a:tab algn="l" pos="6858000"/>
+                <a:tab algn="l" pos="7315200"/>
+                <a:tab algn="l" pos="7772400"/>
+                <a:tab algn="l" pos="8229600"/>
+                <a:tab algn="l" pos="8686800"/>
+                <a:tab algn="l" pos="9144000"/>
+              </a:tabLst>
+            </a:pPr>
+            <a:r>
+              <a:rPr b="0" lang="en-US" sz="2000" spc="-1" strike="noStrike">
+                <a:solidFill>
+                  <a:srgbClr val="000000"/>
+                </a:solidFill>
+                <a:latin typeface="Times New Roman"/>
+                <a:ea typeface="WenQuanYi Micro Hei"/>
+              </a:rPr>
+              <a:t>For example, the printf() function provides output formatting and data buffering, </a:t>
+            </a:r>
+            <a:endParaRPr b="0" lang="en-US" sz="2000" spc="-1" strike="noStrike">
               <a:solidFill>
                 <a:srgbClr val="000000"/>
               </a:solidFill>
@@ -8490,8 +8246,41 @@
               <a:lnSpc>
                 <a:spcPct val="100000"/>
               </a:lnSpc>
-            </a:pPr>
-            <a:endParaRPr b="0" lang="en-US" sz="1800" spc="-1" strike="noStrike">
+              <a:tabLst>
+                <a:tab algn="l" pos="0"/>
+                <a:tab algn="l" pos="457200"/>
+                <a:tab algn="l" pos="914400"/>
+                <a:tab algn="l" pos="1371600"/>
+                <a:tab algn="l" pos="1828800"/>
+                <a:tab algn="l" pos="2286000"/>
+                <a:tab algn="l" pos="2743200"/>
+                <a:tab algn="l" pos="3200400"/>
+                <a:tab algn="l" pos="3657600"/>
+                <a:tab algn="l" pos="4114800"/>
+                <a:tab algn="l" pos="4572000"/>
+                <a:tab algn="l" pos="5029200"/>
+                <a:tab algn="l" pos="5486400"/>
+                <a:tab algn="l" pos="5943600"/>
+                <a:tab algn="l" pos="6400800"/>
+                <a:tab algn="l" pos="6858000"/>
+                <a:tab algn="l" pos="7315200"/>
+                <a:tab algn="l" pos="7772400"/>
+                <a:tab algn="l" pos="8229600"/>
+                <a:tab algn="l" pos="8686800"/>
+                <a:tab algn="l" pos="9144000"/>
+              </a:tabLst>
+            </a:pPr>
+            <a:r>
+              <a:rPr b="0" lang="en-US" sz="2000" spc="-1" strike="noStrike">
+                <a:solidFill>
+                  <a:srgbClr val="000000"/>
+                </a:solidFill>
+                <a:latin typeface="Times New Roman"/>
+                <a:ea typeface="WenQuanYi Micro Hei"/>
+              </a:rPr>
+              <a:t>whereas the write() systemcall just outputs a block of bytes. </a:t>
+            </a:r>
+            <a:endParaRPr b="0" lang="en-US" sz="2000" spc="-1" strike="noStrike">
               <a:solidFill>
                 <a:srgbClr val="000000"/>
               </a:solidFill>
@@ -8503,8 +8292,41 @@
               <a:lnSpc>
                 <a:spcPct val="100000"/>
               </a:lnSpc>
-            </a:pPr>
-            <a:endParaRPr b="0" lang="en-US" sz="1800" spc="-1" strike="noStrike">
+              <a:tabLst>
+                <a:tab algn="l" pos="0"/>
+                <a:tab algn="l" pos="457200"/>
+                <a:tab algn="l" pos="914400"/>
+                <a:tab algn="l" pos="1371600"/>
+                <a:tab algn="l" pos="1828800"/>
+                <a:tab algn="l" pos="2286000"/>
+                <a:tab algn="l" pos="2743200"/>
+                <a:tab algn="l" pos="3200400"/>
+                <a:tab algn="l" pos="3657600"/>
+                <a:tab algn="l" pos="4114800"/>
+                <a:tab algn="l" pos="4572000"/>
+                <a:tab algn="l" pos="5029200"/>
+                <a:tab algn="l" pos="5486400"/>
+                <a:tab algn="l" pos="5943600"/>
+                <a:tab algn="l" pos="6400800"/>
+                <a:tab algn="l" pos="6858000"/>
+                <a:tab algn="l" pos="7315200"/>
+                <a:tab algn="l" pos="7772400"/>
+                <a:tab algn="l" pos="8229600"/>
+                <a:tab algn="l" pos="8686800"/>
+                <a:tab algn="l" pos="9144000"/>
+              </a:tabLst>
+            </a:pPr>
+            <a:r>
+              <a:rPr b="0" lang="en-US" sz="2000" spc="-1" strike="noStrike">
+                <a:solidFill>
+                  <a:srgbClr val="000000"/>
+                </a:solidFill>
+                <a:latin typeface="Times New Roman"/>
+                <a:ea typeface="WenQuanYi Micro Hei"/>
+              </a:rPr>
+              <a:t>Similarly, the malloc() and free() functions performvarious bookkeeping tasks </a:t>
+            </a:r>
+            <a:endParaRPr b="0" lang="en-US" sz="2000" spc="-1" strike="noStrike">
               <a:solidFill>
                 <a:srgbClr val="000000"/>
               </a:solidFill>
@@ -8516,8 +8338,41 @@
               <a:lnSpc>
                 <a:spcPct val="100000"/>
               </a:lnSpc>
-            </a:pPr>
-            <a:endParaRPr b="0" lang="en-US" sz="1800" spc="-1" strike="noStrike">
+              <a:tabLst>
+                <a:tab algn="l" pos="0"/>
+                <a:tab algn="l" pos="457200"/>
+                <a:tab algn="l" pos="914400"/>
+                <a:tab algn="l" pos="1371600"/>
+                <a:tab algn="l" pos="1828800"/>
+                <a:tab algn="l" pos="2286000"/>
+                <a:tab algn="l" pos="2743200"/>
+                <a:tab algn="l" pos="3200400"/>
+                <a:tab algn="l" pos="3657600"/>
+                <a:tab algn="l" pos="4114800"/>
+                <a:tab algn="l" pos="4572000"/>
+                <a:tab algn="l" pos="5029200"/>
+                <a:tab algn="l" pos="5486400"/>
+                <a:tab algn="l" pos="5943600"/>
+                <a:tab algn="l" pos="6400800"/>
+                <a:tab algn="l" pos="6858000"/>
+                <a:tab algn="l" pos="7315200"/>
+                <a:tab algn="l" pos="7772400"/>
+                <a:tab algn="l" pos="8229600"/>
+                <a:tab algn="l" pos="8686800"/>
+                <a:tab algn="l" pos="9144000"/>
+              </a:tabLst>
+            </a:pPr>
+            <a:r>
+              <a:rPr b="0" lang="en-US" sz="2000" spc="-1" strike="noStrike">
+                <a:solidFill>
+                  <a:srgbClr val="000000"/>
+                </a:solidFill>
+                <a:latin typeface="Times New Roman"/>
+                <a:ea typeface="WenQuanYi Micro Hei"/>
+              </a:rPr>
+              <a:t>that make them a much easier way to allocate and free memory than the </a:t>
+            </a:r>
+            <a:endParaRPr b="0" lang="en-US" sz="2000" spc="-1" strike="noStrike">
               <a:solidFill>
                 <a:srgbClr val="000000"/>
               </a:solidFill>
@@ -8529,241 +8384,77 @@
               <a:lnSpc>
                 <a:spcPct val="100000"/>
               </a:lnSpc>
-            </a:pPr>
-            <a:r>
-              <a:rPr b="0" lang="en-IN" sz="1800" spc="-1" strike="noStrike">
-                <a:solidFill>
-                  <a:srgbClr val="000000"/>
-                </a:solidFill>
-                <a:latin typeface="Arial"/>
-                <a:ea typeface="DejaVu Sans"/>
-              </a:rPr>
-              <a:t>void perror(const char *msg );</a:t>
-            </a:r>
-            <a:endParaRPr b="0" lang="en-US" sz="1800" spc="-1" strike="noStrike">
-              <a:solidFill>
-                <a:srgbClr val="000000"/>
-              </a:solidFill>
-              <a:latin typeface="Arial"/>
-            </a:endParaRPr>
-          </a:p>
-        </p:txBody>
-      </p:sp>
-      <p:sp>
-        <p:nvSpPr>
-          <p:cNvPr id="90" name="CustomShape 3"/>
-          <p:cNvSpPr/>
-          <p:nvPr/>
-        </p:nvSpPr>
-        <p:spPr>
-          <a:xfrm>
-            <a:off x="360000" y="2589480"/>
-            <a:ext cx="3674520" cy="1368360"/>
-          </a:xfrm>
-          <a:prstGeom prst="rect">
-            <a:avLst/>
-          </a:prstGeom>
-          <a:noFill/>
-          <a:ln w="0">
-            <a:noFill/>
-          </a:ln>
-        </p:spPr>
-        <p:style>
-          <a:lnRef idx="0"/>
-          <a:fillRef idx="0"/>
-          <a:effectRef idx="0"/>
-          <a:fontRef idx="minor"/>
-        </p:style>
-        <p:txBody>
-          <a:bodyPr lIns="90000" rIns="90000" tIns="45000" bIns="45000" anchor="t">
-            <a:noAutofit/>
-          </a:bodyPr>
+              <a:tabLst>
+                <a:tab algn="l" pos="0"/>
+                <a:tab algn="l" pos="457200"/>
+                <a:tab algn="l" pos="914400"/>
+                <a:tab algn="l" pos="1371600"/>
+                <a:tab algn="l" pos="1828800"/>
+                <a:tab algn="l" pos="2286000"/>
+                <a:tab algn="l" pos="2743200"/>
+                <a:tab algn="l" pos="3200400"/>
+                <a:tab algn="l" pos="3657600"/>
+                <a:tab algn="l" pos="4114800"/>
+                <a:tab algn="l" pos="4572000"/>
+                <a:tab algn="l" pos="5029200"/>
+                <a:tab algn="l" pos="5486400"/>
+                <a:tab algn="l" pos="5943600"/>
+                <a:tab algn="l" pos="6400800"/>
+                <a:tab algn="l" pos="6858000"/>
+                <a:tab algn="l" pos="7315200"/>
+                <a:tab algn="l" pos="7772400"/>
+                <a:tab algn="l" pos="8229600"/>
+                <a:tab algn="l" pos="8686800"/>
+                <a:tab algn="l" pos="9144000"/>
+              </a:tabLst>
+            </a:pPr>
+            <a:r>
+              <a:rPr b="0" lang="en-US" sz="2000" spc="-1" strike="noStrike">
+                <a:solidFill>
+                  <a:srgbClr val="000000"/>
+                </a:solidFill>
+                <a:latin typeface="Times New Roman"/>
+                <a:ea typeface="WenQuanYi Micro Hei"/>
+              </a:rPr>
+              <a:t>underlying brk() system call.</a:t>
+            </a:r>
+            <a:endParaRPr b="0" lang="en-US" sz="2000" spc="-1" strike="noStrike">
+              <a:solidFill>
+                <a:srgbClr val="000000"/>
+              </a:solidFill>
+              <a:latin typeface="Arial"/>
+            </a:endParaRPr>
+          </a:p>
           <a:p>
             <a:pPr>
               <a:lnSpc>
                 <a:spcPct val="100000"/>
               </a:lnSpc>
-            </a:pPr>
-            <a:r>
-              <a:rPr b="0" lang="en-IN" sz="1800" spc="-1" strike="noStrike">
-                <a:solidFill>
-                  <a:srgbClr val="000000"/>
-                </a:solidFill>
-                <a:latin typeface="Arial"/>
-                <a:ea typeface="DejaVu Sans"/>
-              </a:rPr>
-              <a:t>fd = open(pathname, flags, mode);</a:t>
-            </a:r>
-            <a:endParaRPr b="0" lang="en-US" sz="1800" spc="-1" strike="noStrike">
-              <a:solidFill>
-                <a:srgbClr val="000000"/>
-              </a:solidFill>
-              <a:latin typeface="Arial"/>
-            </a:endParaRPr>
-          </a:p>
-          <a:p>
-            <a:pPr>
-              <a:lnSpc>
-                <a:spcPct val="100000"/>
-              </a:lnSpc>
-            </a:pPr>
-            <a:r>
-              <a:rPr b="0" lang="en-IN" sz="1800" spc="-1" strike="noStrike">
-                <a:solidFill>
-                  <a:srgbClr val="000000"/>
-                </a:solidFill>
-                <a:latin typeface="Arial"/>
-                <a:ea typeface="DejaVu Sans"/>
-              </a:rPr>
-              <a:t>if (fd == -1) {</a:t>
-            </a:r>
-            <a:endParaRPr b="0" lang="en-US" sz="1800" spc="-1" strike="noStrike">
-              <a:solidFill>
-                <a:srgbClr val="000000"/>
-              </a:solidFill>
-              <a:latin typeface="Arial"/>
-            </a:endParaRPr>
-          </a:p>
-          <a:p>
-            <a:pPr>
-              <a:lnSpc>
-                <a:spcPct val="100000"/>
-              </a:lnSpc>
-            </a:pPr>
-            <a:r>
-              <a:rPr b="0" lang="en-IN" sz="1800" spc="-1" strike="noStrike">
-                <a:solidFill>
-                  <a:srgbClr val="000000"/>
-                </a:solidFill>
-                <a:latin typeface="Arial"/>
-                <a:ea typeface="DejaVu Sans"/>
-              </a:rPr>
-              <a:t>perror("open");</a:t>
-            </a:r>
-            <a:endParaRPr b="0" lang="en-US" sz="1800" spc="-1" strike="noStrike">
-              <a:solidFill>
-                <a:srgbClr val="000000"/>
-              </a:solidFill>
-              <a:latin typeface="Arial"/>
-            </a:endParaRPr>
-          </a:p>
-          <a:p>
-            <a:pPr>
-              <a:lnSpc>
-                <a:spcPct val="100000"/>
-              </a:lnSpc>
-            </a:pPr>
-            <a:r>
-              <a:rPr b="0" lang="en-IN" sz="1800" spc="-1" strike="noStrike">
-                <a:solidFill>
-                  <a:srgbClr val="000000"/>
-                </a:solidFill>
-                <a:latin typeface="Arial"/>
-                <a:ea typeface="DejaVu Sans"/>
-              </a:rPr>
-              <a:t>exit(EXIT_FAILURE);</a:t>
-            </a:r>
-            <a:endParaRPr b="0" lang="en-US" sz="1800" spc="-1" strike="noStrike">
-              <a:solidFill>
-                <a:srgbClr val="000000"/>
-              </a:solidFill>
-              <a:latin typeface="Arial"/>
-            </a:endParaRPr>
-          </a:p>
-          <a:p>
-            <a:pPr>
-              <a:lnSpc>
-                <a:spcPct val="100000"/>
-              </a:lnSpc>
-            </a:pPr>
-            <a:r>
-              <a:rPr b="0" lang="en-IN" sz="1800" spc="-1" strike="noStrike">
-                <a:solidFill>
-                  <a:srgbClr val="000000"/>
-                </a:solidFill>
-                <a:latin typeface="Arial"/>
-                <a:ea typeface="DejaVu Sans"/>
-              </a:rPr>
-              <a:t>}</a:t>
-            </a:r>
-            <a:endParaRPr b="0" lang="en-US" sz="1800" spc="-1" strike="noStrike">
-              <a:solidFill>
-                <a:srgbClr val="000000"/>
-              </a:solidFill>
-              <a:latin typeface="Arial"/>
-            </a:endParaRPr>
-          </a:p>
-        </p:txBody>
-      </p:sp>
-      <p:sp>
-        <p:nvSpPr>
-          <p:cNvPr id="91" name="CustomShape 4"/>
-          <p:cNvSpPr/>
-          <p:nvPr/>
-        </p:nvSpPr>
-        <p:spPr>
-          <a:xfrm>
-            <a:off x="318240" y="4343400"/>
-            <a:ext cx="8596800" cy="600480"/>
-          </a:xfrm>
-          <a:prstGeom prst="rect">
-            <a:avLst/>
-          </a:prstGeom>
-          <a:noFill/>
-          <a:ln w="0">
-            <a:noFill/>
-          </a:ln>
-        </p:spPr>
-        <p:style>
-          <a:lnRef idx="0"/>
-          <a:fillRef idx="0"/>
-          <a:effectRef idx="0"/>
-          <a:fontRef idx="minor"/>
-        </p:style>
-        <p:txBody>
-          <a:bodyPr lIns="90000" rIns="90000" tIns="45000" bIns="45000" anchor="t">
-            <a:noAutofit/>
-          </a:bodyPr>
-          <a:p>
-            <a:pPr>
-              <a:lnSpc>
-                <a:spcPct val="100000"/>
-              </a:lnSpc>
-            </a:pPr>
-            <a:r>
-              <a:rPr b="0" lang="en-IN" sz="1800" spc="-1" strike="noStrike">
-                <a:solidFill>
-                  <a:srgbClr val="000000"/>
-                </a:solidFill>
-                <a:latin typeface="Arial"/>
-                <a:ea typeface="DejaVu Sans"/>
-              </a:rPr>
-              <a:t>The perror() function prints the string pointed to by its msg argument, followed</a:t>
-            </a:r>
-            <a:endParaRPr b="0" lang="en-US" sz="1800" spc="-1" strike="noStrike">
-              <a:solidFill>
-                <a:srgbClr val="000000"/>
-              </a:solidFill>
-              <a:latin typeface="Arial"/>
-            </a:endParaRPr>
-          </a:p>
-          <a:p>
-            <a:pPr>
-              <a:lnSpc>
-                <a:spcPct val="100000"/>
-              </a:lnSpc>
-            </a:pPr>
-            <a:r>
-              <a:rPr b="0" lang="en-IN" sz="1800" spc="-1" strike="noStrike">
-                <a:solidFill>
-                  <a:srgbClr val="000000"/>
-                </a:solidFill>
-                <a:latin typeface="Arial"/>
-                <a:ea typeface="DejaVu Sans"/>
-              </a:rPr>
-              <a:t>by a message corresponding to the current value of errno.</a:t>
-            </a:r>
-            <a:endParaRPr b="0" lang="en-US" sz="1800" spc="-1" strike="noStrike">
+              <a:tabLst>
+                <a:tab algn="l" pos="0"/>
+                <a:tab algn="l" pos="457200"/>
+                <a:tab algn="l" pos="914400"/>
+                <a:tab algn="l" pos="1371600"/>
+                <a:tab algn="l" pos="1828800"/>
+                <a:tab algn="l" pos="2286000"/>
+                <a:tab algn="l" pos="2743200"/>
+                <a:tab algn="l" pos="3200400"/>
+                <a:tab algn="l" pos="3657600"/>
+                <a:tab algn="l" pos="4114800"/>
+                <a:tab algn="l" pos="4572000"/>
+                <a:tab algn="l" pos="5029200"/>
+                <a:tab algn="l" pos="5486400"/>
+                <a:tab algn="l" pos="5943600"/>
+                <a:tab algn="l" pos="6400800"/>
+                <a:tab algn="l" pos="6858000"/>
+                <a:tab algn="l" pos="7315200"/>
+                <a:tab algn="l" pos="7772400"/>
+                <a:tab algn="l" pos="8229600"/>
+                <a:tab algn="l" pos="8686800"/>
+                <a:tab algn="l" pos="9144000"/>
+              </a:tabLst>
+            </a:pPr>
+            <a:endParaRPr b="0" lang="en-US" sz="2000" spc="-1" strike="noStrike">
               <a:solidFill>
                 <a:srgbClr val="000000"/>
               </a:solidFill>
@@ -8804,14 +8495,14 @@
       </p:grpSpPr>
       <p:sp>
         <p:nvSpPr>
-          <p:cNvPr id="92" name="CustomShape 1"/>
+          <p:cNvPr id="91" name="CustomShape 1"/>
           <p:cNvSpPr/>
           <p:nvPr/>
         </p:nvSpPr>
         <p:spPr>
           <a:xfrm>
-            <a:off x="84600" y="196200"/>
-            <a:ext cx="8841240" cy="6399000"/>
+            <a:off x="178560" y="144000"/>
+            <a:ext cx="8964720" cy="1623960"/>
           </a:xfrm>
           <a:prstGeom prst="rect">
             <a:avLst/>
@@ -8829,7 +8520,7 @@
         </p:style>
         <p:txBody>
           <a:bodyPr lIns="90000" rIns="90000" tIns="45000" bIns="45000" anchor="t">
-            <a:spAutoFit/>
+            <a:noAutofit/>
           </a:bodyPr>
           <a:p>
             <a:pPr>
@@ -8838,14 +8529,14 @@
               </a:lnSpc>
             </a:pPr>
             <a:r>
-              <a:rPr b="0" lang="en-US" sz="1800" spc="-1" strike="noStrike">
-                <a:solidFill>
-                  <a:srgbClr val="000000"/>
-                </a:solidFill>
-                <a:latin typeface="Calibri"/>
+              <a:rPr b="1" lang="en-IN" sz="1800" spc="-1" strike="noStrike">
+                <a:solidFill>
+                  <a:srgbClr val="000000"/>
+                </a:solidFill>
+                <a:latin typeface="Arial"/>
                 <a:ea typeface="DejaVu Sans"/>
               </a:rPr>
-              <a:t>Linux provides uniform interface to various kinds of objects through its basic I/O system calls. All these objects are called files.  But these files could refer to different things like, regular file,  character device, block device, named pipe (FIFO), symbolic link,  or a network socket. This means that the same four system calls—open(), read(), write(), and close()—are used to perform I/O on all types of files, including devices such as terminals</a:t>
+              <a:t>Handling Errors from System Calls and Library Functions</a:t>
             </a:r>
             <a:endParaRPr b="0" lang="en-US" sz="1800" spc="-1" strike="noStrike">
               <a:solidFill>
@@ -8868,20 +8559,179 @@
             </a:endParaRPr>
           </a:p>
           <a:p>
+            <a:pPr algn="just">
+              <a:lnSpc>
+                <a:spcPct val="100000"/>
+              </a:lnSpc>
+            </a:pPr>
+            <a:r>
+              <a:rPr b="0" lang="en-IN" sz="1800" spc="-1" strike="noStrike">
+                <a:solidFill>
+                  <a:srgbClr val="000000"/>
+                </a:solidFill>
+                <a:latin typeface="Arial"/>
+                <a:ea typeface="DejaVu Sans"/>
+              </a:rPr>
+              <a:t>Almost every system call and library function returns some type of status value indi</a:t>
+            </a:r>
+            <a:endParaRPr b="0" lang="en-US" sz="1800" spc="-1" strike="noStrike">
+              <a:solidFill>
+                <a:srgbClr val="000000"/>
+              </a:solidFill>
+              <a:latin typeface="Arial"/>
+            </a:endParaRPr>
+          </a:p>
+          <a:p>
+            <a:pPr algn="just">
+              <a:lnSpc>
+                <a:spcPct val="100000"/>
+              </a:lnSpc>
+            </a:pPr>
+            <a:r>
+              <a:rPr b="0" lang="en-IN" sz="1800" spc="-1" strike="noStrike">
+                <a:solidFill>
+                  <a:srgbClr val="000000"/>
+                </a:solidFill>
+                <a:latin typeface="Arial"/>
+                <a:ea typeface="DejaVu Sans"/>
+              </a:rPr>
+              <a:t>cating whether the call succeeded or failed. This status value should always be</a:t>
+            </a:r>
+            <a:endParaRPr b="0" lang="en-US" sz="1800" spc="-1" strike="noStrike">
+              <a:solidFill>
+                <a:srgbClr val="000000"/>
+              </a:solidFill>
+              <a:latin typeface="Arial"/>
+            </a:endParaRPr>
+          </a:p>
+          <a:p>
+            <a:pPr algn="just">
+              <a:lnSpc>
+                <a:spcPct val="100000"/>
+              </a:lnSpc>
+            </a:pPr>
+            <a:r>
+              <a:rPr b="0" lang="en-IN" sz="1800" spc="-1" strike="noStrike">
+                <a:solidFill>
+                  <a:srgbClr val="000000"/>
+                </a:solidFill>
+                <a:latin typeface="Arial"/>
+                <a:ea typeface="DejaVu Sans"/>
+              </a:rPr>
+              <a:t>checked to see whether the call succeeded. If it did not, then appropriate action</a:t>
+            </a:r>
+            <a:endParaRPr b="0" lang="en-US" sz="1800" spc="-1" strike="noStrike">
+              <a:solidFill>
+                <a:srgbClr val="000000"/>
+              </a:solidFill>
+              <a:latin typeface="Arial"/>
+            </a:endParaRPr>
+          </a:p>
+          <a:p>
+            <a:pPr algn="just">
+              <a:lnSpc>
+                <a:spcPct val="100000"/>
+              </a:lnSpc>
+            </a:pPr>
+            <a:r>
+              <a:rPr b="0" lang="en-IN" sz="1800" spc="-1" strike="noStrike">
+                <a:solidFill>
+                  <a:srgbClr val="000000"/>
+                </a:solidFill>
+                <a:latin typeface="Arial"/>
+                <a:ea typeface="DejaVu Sans"/>
+              </a:rPr>
+              <a:t>should be taken—at the very least, the program should display an error message</a:t>
+            </a:r>
+            <a:endParaRPr b="0" lang="en-US" sz="1800" spc="-1" strike="noStrike">
+              <a:solidFill>
+                <a:srgbClr val="000000"/>
+              </a:solidFill>
+              <a:latin typeface="Arial"/>
+            </a:endParaRPr>
+          </a:p>
+          <a:p>
+            <a:pPr algn="just">
+              <a:lnSpc>
+                <a:spcPct val="100000"/>
+              </a:lnSpc>
+            </a:pPr>
+            <a:r>
+              <a:rPr b="0" lang="en-IN" sz="1800" spc="-1" strike="noStrike">
+                <a:solidFill>
+                  <a:srgbClr val="000000"/>
+                </a:solidFill>
+                <a:latin typeface="Arial"/>
+                <a:ea typeface="DejaVu Sans"/>
+              </a:rPr>
+              <a:t>warning that something unexpected occurred.</a:t>
+            </a:r>
+            <a:endParaRPr b="0" lang="en-US" sz="1800" spc="-1" strike="noStrike">
+              <a:solidFill>
+                <a:srgbClr val="000000"/>
+              </a:solidFill>
+              <a:latin typeface="Arial"/>
+            </a:endParaRPr>
+          </a:p>
+        </p:txBody>
+      </p:sp>
+      <p:sp>
+        <p:nvSpPr>
+          <p:cNvPr id="92" name="CustomShape 2"/>
+          <p:cNvSpPr/>
+          <p:nvPr/>
+        </p:nvSpPr>
+        <p:spPr>
+          <a:xfrm>
+            <a:off x="360000" y="1845360"/>
+            <a:ext cx="3249000" cy="600120"/>
+          </a:xfrm>
+          <a:prstGeom prst="rect">
+            <a:avLst/>
+          </a:prstGeom>
+          <a:noFill/>
+          <a:ln w="0">
+            <a:noFill/>
+          </a:ln>
+        </p:spPr>
+        <p:style>
+          <a:lnRef idx="0"/>
+          <a:fillRef idx="0"/>
+          <a:effectRef idx="0"/>
+          <a:fontRef idx="minor"/>
+        </p:style>
+        <p:txBody>
+          <a:bodyPr lIns="90000" rIns="90000" tIns="45000" bIns="45000" anchor="t">
+            <a:noAutofit/>
+          </a:bodyPr>
+          <a:p>
             <a:pPr>
               <a:lnSpc>
                 <a:spcPct val="100000"/>
               </a:lnSpc>
             </a:pPr>
-            <a:r>
-              <a:rPr b="0" lang="en-US" sz="1800" spc="-1" strike="noStrike">
-                <a:solidFill>
-                  <a:srgbClr val="000000"/>
-                </a:solidFill>
-                <a:latin typeface="Calibri"/>
+            <a:endParaRPr b="0" lang="en-US" sz="1800" spc="-1" strike="noStrike">
+              <a:solidFill>
+                <a:srgbClr val="000000"/>
+              </a:solidFill>
+              <a:latin typeface="Arial"/>
+            </a:endParaRPr>
+          </a:p>
+          <a:p>
+            <a:pPr>
+              <a:lnSpc>
+                <a:spcPct val="100000"/>
+              </a:lnSpc>
+            </a:pPr>
+            <a:r>
+              <a:rPr b="0" lang="en-IN" sz="1800" spc="-1" strike="noStrike">
+                <a:solidFill>
+                  <a:srgbClr val="000000"/>
+                </a:solidFill>
+                <a:latin typeface="Arial"/>
                 <a:ea typeface="DejaVu Sans"/>
               </a:rPr>
-              <a:t>So we can use read() and write() system calls to:  </a:t>
+              <a:t>#include &lt;stdio.h&gt;</a:t>
             </a:r>
             <a:endParaRPr b="0" lang="en-US" sz="1800" spc="-1" strike="noStrike">
               <a:solidFill>
@@ -8896,23 +8746,184 @@
                 <a:spcPct val="100000"/>
               </a:lnSpc>
             </a:pPr>
-            <a:r>
-              <a:rPr b="0" lang="en-US" sz="1800" spc="-1" strike="noStrike">
-                <a:solidFill>
-                  <a:srgbClr val="000000"/>
-                </a:solidFill>
-                <a:latin typeface="Calibri"/>
+            <a:endParaRPr b="0" lang="en-US" sz="1800" spc="-1" strike="noStrike">
+              <a:solidFill>
+                <a:srgbClr val="000000"/>
+              </a:solidFill>
+              <a:latin typeface="Arial"/>
+            </a:endParaRPr>
+          </a:p>
+          <a:p>
+            <a:pPr>
+              <a:lnSpc>
+                <a:spcPct val="100000"/>
+              </a:lnSpc>
+            </a:pPr>
+            <a:endParaRPr b="0" lang="en-US" sz="1800" spc="-1" strike="noStrike">
+              <a:solidFill>
+                <a:srgbClr val="000000"/>
+              </a:solidFill>
+              <a:latin typeface="Arial"/>
+            </a:endParaRPr>
+          </a:p>
+          <a:p>
+            <a:pPr>
+              <a:lnSpc>
+                <a:spcPct val="100000"/>
+              </a:lnSpc>
+            </a:pPr>
+            <a:endParaRPr b="0" lang="en-US" sz="1800" spc="-1" strike="noStrike">
+              <a:solidFill>
+                <a:srgbClr val="000000"/>
+              </a:solidFill>
+              <a:latin typeface="Arial"/>
+            </a:endParaRPr>
+          </a:p>
+          <a:p>
+            <a:pPr>
+              <a:lnSpc>
+                <a:spcPct val="100000"/>
+              </a:lnSpc>
+            </a:pPr>
+            <a:endParaRPr b="0" lang="en-US" sz="1800" spc="-1" strike="noStrike">
+              <a:solidFill>
+                <a:srgbClr val="000000"/>
+              </a:solidFill>
+              <a:latin typeface="Arial"/>
+            </a:endParaRPr>
+          </a:p>
+          <a:p>
+            <a:pPr>
+              <a:lnSpc>
+                <a:spcPct val="100000"/>
+              </a:lnSpc>
+            </a:pPr>
+            <a:endParaRPr b="0" lang="en-US" sz="1800" spc="-1" strike="noStrike">
+              <a:solidFill>
+                <a:srgbClr val="000000"/>
+              </a:solidFill>
+              <a:latin typeface="Arial"/>
+            </a:endParaRPr>
+          </a:p>
+          <a:p>
+            <a:pPr>
+              <a:lnSpc>
+                <a:spcPct val="100000"/>
+              </a:lnSpc>
+            </a:pPr>
+            <a:endParaRPr b="0" lang="en-US" sz="1800" spc="-1" strike="noStrike">
+              <a:solidFill>
+                <a:srgbClr val="000000"/>
+              </a:solidFill>
+              <a:latin typeface="Arial"/>
+            </a:endParaRPr>
+          </a:p>
+          <a:p>
+            <a:pPr>
+              <a:lnSpc>
+                <a:spcPct val="100000"/>
+              </a:lnSpc>
+            </a:pPr>
+            <a:endParaRPr b="0" lang="en-US" sz="1800" spc="-1" strike="noStrike">
+              <a:solidFill>
+                <a:srgbClr val="000000"/>
+              </a:solidFill>
+              <a:latin typeface="Arial"/>
+            </a:endParaRPr>
+          </a:p>
+          <a:p>
+            <a:pPr>
+              <a:lnSpc>
+                <a:spcPct val="100000"/>
+              </a:lnSpc>
+            </a:pPr>
+            <a:endParaRPr b="0" lang="en-US" sz="1800" spc="-1" strike="noStrike">
+              <a:solidFill>
+                <a:srgbClr val="000000"/>
+              </a:solidFill>
+              <a:latin typeface="Arial"/>
+            </a:endParaRPr>
+          </a:p>
+          <a:p>
+            <a:pPr>
+              <a:lnSpc>
+                <a:spcPct val="100000"/>
+              </a:lnSpc>
+            </a:pPr>
+            <a:endParaRPr b="0" lang="en-US" sz="1800" spc="-1" strike="noStrike">
+              <a:solidFill>
+                <a:srgbClr val="000000"/>
+              </a:solidFill>
+              <a:latin typeface="Arial"/>
+            </a:endParaRPr>
+          </a:p>
+          <a:p>
+            <a:pPr>
+              <a:lnSpc>
+                <a:spcPct val="100000"/>
+              </a:lnSpc>
+            </a:pPr>
+            <a:endParaRPr b="0" lang="en-US" sz="1800" spc="-1" strike="noStrike">
+              <a:solidFill>
+                <a:srgbClr val="000000"/>
+              </a:solidFill>
+              <a:latin typeface="Arial"/>
+            </a:endParaRPr>
+          </a:p>
+          <a:p>
+            <a:pPr>
+              <a:lnSpc>
+                <a:spcPct val="100000"/>
+              </a:lnSpc>
+            </a:pPr>
+            <a:r>
+              <a:rPr b="0" lang="en-IN" sz="1800" spc="-1" strike="noStrike">
+                <a:solidFill>
+                  <a:srgbClr val="000000"/>
+                </a:solidFill>
+                <a:latin typeface="Arial"/>
                 <a:ea typeface="DejaVu Sans"/>
               </a:rPr>
-              <a:t>Read and write to files on hard disk or floppy disk</a:t>
-            </a:r>
-            <a:endParaRPr b="0" lang="en-US" sz="1800" spc="-1" strike="noStrike">
-              <a:solidFill>
-                <a:srgbClr val="000000"/>
-              </a:solidFill>
-              <a:latin typeface="Arial"/>
-            </a:endParaRPr>
-          </a:p>
+              <a:t>void perror(const char *msg );</a:t>
+            </a:r>
+            <a:endParaRPr b="0" lang="en-US" sz="1800" spc="-1" strike="noStrike">
+              <a:solidFill>
+                <a:srgbClr val="000000"/>
+              </a:solidFill>
+              <a:latin typeface="Arial"/>
+            </a:endParaRPr>
+          </a:p>
+        </p:txBody>
+      </p:sp>
+      <p:sp>
+        <p:nvSpPr>
+          <p:cNvPr id="93" name="CustomShape 3"/>
+          <p:cNvSpPr/>
+          <p:nvPr/>
+        </p:nvSpPr>
+        <p:spPr>
+          <a:xfrm>
+            <a:off x="360000" y="2589480"/>
+            <a:ext cx="3674160" cy="1368000"/>
+          </a:xfrm>
+          <a:prstGeom prst="rect">
+            <a:avLst/>
+          </a:prstGeom>
+          <a:noFill/>
+          <a:ln w="0">
+            <a:noFill/>
+          </a:ln>
+        </p:spPr>
+        <p:style>
+          <a:lnRef idx="0"/>
+          <a:fillRef idx="0"/>
+          <a:effectRef idx="0"/>
+          <a:fontRef idx="minor"/>
+        </p:style>
+        <p:txBody>
+          <a:bodyPr lIns="90000" rIns="90000" tIns="45000" bIns="45000" anchor="t">
+            <a:noAutofit/>
+          </a:bodyPr>
           <a:p>
             <a:pPr>
               <a:lnSpc>
@@ -8920,14 +8931,14 @@
               </a:lnSpc>
             </a:pPr>
             <a:r>
-              <a:rPr b="0" lang="en-US" sz="1800" spc="-1" strike="noStrike">
-                <a:solidFill>
-                  <a:srgbClr val="000000"/>
-                </a:solidFill>
-                <a:latin typeface="Calibri"/>
+              <a:rPr b="0" lang="en-IN" sz="1800" spc="-1" strike="noStrike">
+                <a:solidFill>
+                  <a:srgbClr val="000000"/>
+                </a:solidFill>
+                <a:latin typeface="Arial"/>
                 <a:ea typeface="DejaVu Sans"/>
               </a:rPr>
-              <a:t>Read and write to I/O devices like printers, modems, terminals, Audio devices</a:t>
+              <a:t>fd = open(pathname, flags, mode);</a:t>
             </a:r>
             <a:endParaRPr b="0" lang="en-US" sz="1800" spc="-1" strike="noStrike">
               <a:solidFill>
@@ -8943,14 +8954,14 @@
               </a:lnSpc>
             </a:pPr>
             <a:r>
-              <a:rPr b="0" lang="en-US" sz="1800" spc="-1" strike="noStrike">
-                <a:solidFill>
-                  <a:srgbClr val="000000"/>
-                </a:solidFill>
-                <a:latin typeface="Calibri"/>
+              <a:rPr b="0" lang="en-IN" sz="1800" spc="-1" strike="noStrike">
+                <a:solidFill>
+                  <a:srgbClr val="000000"/>
+                </a:solidFill>
+                <a:latin typeface="Arial"/>
                 <a:ea typeface="DejaVu Sans"/>
               </a:rPr>
-              <a:t>Read and write to IPC object such as Pipes and FIFOs</a:t>
+              <a:t>if (fd == -1) {</a:t>
             </a:r>
             <a:endParaRPr b="0" lang="en-US" sz="1800" spc="-1" strike="noStrike">
               <a:solidFill>
@@ -8966,14 +8977,14 @@
               </a:lnSpc>
             </a:pPr>
             <a:r>
-              <a:rPr b="0" lang="en-US" sz="1800" spc="-1" strike="noStrike">
-                <a:solidFill>
-                  <a:srgbClr val="000000"/>
-                </a:solidFill>
-                <a:latin typeface="Calibri"/>
+              <a:rPr b="0" lang="en-IN" sz="1800" spc="-1" strike="noStrike">
+                <a:solidFill>
+                  <a:srgbClr val="000000"/>
+                </a:solidFill>
+                <a:latin typeface="Arial"/>
                 <a:ea typeface="DejaVu Sans"/>
               </a:rPr>
-              <a:t>Read and write to network objects such as Sockets</a:t>
+              <a:t>perror("open");</a:t>
             </a:r>
             <a:endParaRPr b="0" lang="en-US" sz="1800" spc="-1" strike="noStrike">
               <a:solidFill>
@@ -8989,14 +9000,14 @@
               </a:lnSpc>
             </a:pPr>
             <a:r>
-              <a:rPr b="0" lang="en-US" sz="1800" spc="-1" strike="noStrike">
-                <a:solidFill>
-                  <a:srgbClr val="000000"/>
-                </a:solidFill>
-                <a:latin typeface="Calibri"/>
+              <a:rPr b="0" lang="en-IN" sz="1800" spc="-1" strike="noStrike">
+                <a:solidFill>
+                  <a:srgbClr val="000000"/>
+                </a:solidFill>
+                <a:latin typeface="Arial"/>
                 <a:ea typeface="DejaVu Sans"/>
               </a:rPr>
-              <a:t>open(),read(),write(),lseek(),fcntl(),ioctl(),close() dup() dup2() unlink()</a:t>
+              <a:t>exit(EXIT_FAILURE);</a:t>
             </a:r>
             <a:endParaRPr b="0" lang="en-US" sz="1800" spc="-1" strike="noStrike">
               <a:solidFill>
@@ -9011,13 +9022,54 @@
                 <a:spcPct val="100000"/>
               </a:lnSpc>
             </a:pPr>
-            <a:endParaRPr b="0" lang="en-US" sz="1800" spc="-1" strike="noStrike">
-              <a:solidFill>
-                <a:srgbClr val="000000"/>
-              </a:solidFill>
-              <a:latin typeface="Arial"/>
-            </a:endParaRPr>
-          </a:p>
+            <a:r>
+              <a:rPr b="0" lang="en-IN" sz="1800" spc="-1" strike="noStrike">
+                <a:solidFill>
+                  <a:srgbClr val="000000"/>
+                </a:solidFill>
+                <a:latin typeface="Arial"/>
+                <a:ea typeface="DejaVu Sans"/>
+              </a:rPr>
+              <a:t>}</a:t>
+            </a:r>
+            <a:endParaRPr b="0" lang="en-US" sz="1800" spc="-1" strike="noStrike">
+              <a:solidFill>
+                <a:srgbClr val="000000"/>
+              </a:solidFill>
+              <a:latin typeface="Arial"/>
+            </a:endParaRPr>
+          </a:p>
+        </p:txBody>
+      </p:sp>
+      <p:sp>
+        <p:nvSpPr>
+          <p:cNvPr id="94" name="CustomShape 4"/>
+          <p:cNvSpPr/>
+          <p:nvPr/>
+        </p:nvSpPr>
+        <p:spPr>
+          <a:xfrm>
+            <a:off x="318240" y="4343400"/>
+            <a:ext cx="8596440" cy="600120"/>
+          </a:xfrm>
+          <a:prstGeom prst="rect">
+            <a:avLst/>
+          </a:prstGeom>
+          <a:noFill/>
+          <a:ln w="0">
+            <a:noFill/>
+          </a:ln>
+        </p:spPr>
+        <p:style>
+          <a:lnRef idx="0"/>
+          <a:fillRef idx="0"/>
+          <a:effectRef idx="0"/>
+          <a:fontRef idx="minor"/>
+        </p:style>
+        <p:txBody>
+          <a:bodyPr lIns="90000" rIns="90000" tIns="45000" bIns="45000" anchor="t">
+            <a:noAutofit/>
+          </a:bodyPr>
           <a:p>
             <a:pPr>
               <a:lnSpc>
@@ -9025,24 +9077,14 @@
               </a:lnSpc>
             </a:pPr>
             <a:r>
-              <a:rPr b="0" lang="en-US" sz="1800" spc="-1" strike="noStrike">
-                <a:solidFill>
-                  <a:srgbClr val="000000"/>
-                </a:solidFill>
-                <a:latin typeface="Calibri"/>
-                <a:ea typeface="Noto Sans CJK SC"/>
-              </a:rPr>
-              <a:t>$./copy test test.old </a:t>
-            </a:r>
-            <a:r>
-              <a:rPr b="0" lang="en-US" sz="1800" spc="-1" strike="noStrike">
-                <a:solidFill>
-                  <a:srgbClr val="000000"/>
-                </a:solidFill>
-                <a:latin typeface="Calibri"/>
+              <a:rPr b="0" lang="en-IN" sz="1800" spc="-1" strike="noStrike">
+                <a:solidFill>
+                  <a:srgbClr val="000000"/>
+                </a:solidFill>
+                <a:latin typeface="Arial"/>
                 <a:ea typeface="DejaVu Sans"/>
               </a:rPr>
-              <a:t>Copy a regular file</a:t>
+              <a:t>The perror() function prints the string pointed to by its msg argument, followed</a:t>
             </a:r>
             <a:endParaRPr b="0" lang="en-US" sz="1800" spc="-1" strike="noStrike">
               <a:solidFill>
@@ -9058,206 +9100,15 @@
               </a:lnSpc>
             </a:pPr>
             <a:r>
-              <a:rPr b="0" lang="en-US" sz="1800" spc="-1" strike="noStrike">
-                <a:solidFill>
-                  <a:srgbClr val="000000"/>
-                </a:solidFill>
-                <a:latin typeface="Calibri"/>
-                <a:ea typeface="Noto Sans CJK SC"/>
-              </a:rPr>
-              <a:t>$./copy a.txt /dev/tty </a:t>
-            </a:r>
-            <a:r>
-              <a:rPr b="0" lang="en-US" sz="1800" spc="-1" strike="noStrike">
-                <a:solidFill>
-                  <a:srgbClr val="000000"/>
-                </a:solidFill>
-                <a:latin typeface="Calibri"/>
+              <a:rPr b="0" lang="en-IN" sz="1800" spc="-1" strike="noStrike">
+                <a:solidFill>
+                  <a:srgbClr val="000000"/>
+                </a:solidFill>
+                <a:latin typeface="Arial"/>
                 <a:ea typeface="DejaVu Sans"/>
               </a:rPr>
-              <a:t>Copy a regular file to this terminal</a:t>
-            </a:r>
-            <a:endParaRPr b="0" lang="en-US" sz="1800" spc="-1" strike="noStrike">
-              <a:solidFill>
-                <a:srgbClr val="000000"/>
-              </a:solidFill>
-              <a:latin typeface="Arial"/>
-            </a:endParaRPr>
-          </a:p>
-          <a:p>
-            <a:pPr>
-              <a:lnSpc>
-                <a:spcPct val="100000"/>
-              </a:lnSpc>
-            </a:pPr>
-            <a:r>
-              <a:rPr b="0" lang="en-US" sz="1800" spc="-1" strike="noStrike">
-                <a:solidFill>
-                  <a:srgbClr val="000000"/>
-                </a:solidFill>
-                <a:latin typeface="Calibri"/>
-                <a:ea typeface="Noto Sans CJK SC"/>
-              </a:rPr>
-              <a:t>$./copy /dev/tty b.txt </a:t>
-            </a:r>
-            <a:r>
-              <a:rPr b="0" lang="en-US" sz="1800" spc="-1" strike="noStrike">
-                <a:solidFill>
-                  <a:srgbClr val="000000"/>
-                </a:solidFill>
-                <a:latin typeface="Calibri"/>
-                <a:ea typeface="DejaVu Sans"/>
-              </a:rPr>
-              <a:t>Copy input from this terminal to a regular file</a:t>
-            </a:r>
-            <a:endParaRPr b="0" lang="en-US" sz="1800" spc="-1" strike="noStrike">
-              <a:solidFill>
-                <a:srgbClr val="000000"/>
-              </a:solidFill>
-              <a:latin typeface="Arial"/>
-            </a:endParaRPr>
-          </a:p>
-          <a:p>
-            <a:pPr>
-              <a:lnSpc>
-                <a:spcPct val="100000"/>
-              </a:lnSpc>
-            </a:pPr>
-            <a:r>
-              <a:rPr b="0" lang="en-US" sz="1800" spc="-1" strike="noStrike">
-                <a:solidFill>
-                  <a:srgbClr val="000000"/>
-                </a:solidFill>
-                <a:latin typeface="Calibri"/>
-                <a:ea typeface="Noto Sans CJK SC"/>
-              </a:rPr>
-              <a:t>$./copy /dev/pts/16 /dev/tty </a:t>
-            </a:r>
-            <a:r>
-              <a:rPr b="0" lang="en-US" sz="1800" spc="-1" strike="noStrike">
-                <a:solidFill>
-                  <a:srgbClr val="000000"/>
-                </a:solidFill>
-                <a:latin typeface="Calibri"/>
-                <a:ea typeface="DejaVu Sans"/>
-              </a:rPr>
-              <a:t>Copy input from another terminal</a:t>
-            </a:r>
-            <a:endParaRPr b="0" lang="en-US" sz="1800" spc="-1" strike="noStrike">
-              <a:solidFill>
-                <a:srgbClr val="000000"/>
-              </a:solidFill>
-              <a:latin typeface="Arial"/>
-            </a:endParaRPr>
-          </a:p>
-          <a:p>
-            <a:pPr>
-              <a:lnSpc>
-                <a:spcPct val="100000"/>
-              </a:lnSpc>
-            </a:pPr>
-            <a:endParaRPr b="0" lang="en-US" sz="1800" spc="-1" strike="noStrike">
-              <a:solidFill>
-                <a:srgbClr val="000000"/>
-              </a:solidFill>
-              <a:latin typeface="Arial"/>
-            </a:endParaRPr>
-          </a:p>
-          <a:p>
-            <a:pPr>
-              <a:lnSpc>
-                <a:spcPct val="100000"/>
-              </a:lnSpc>
-            </a:pPr>
-            <a:r>
-              <a:rPr b="0" lang="en-US" sz="1800" spc="-1" strike="noStrike">
-                <a:solidFill>
-                  <a:srgbClr val="000000"/>
-                </a:solidFill>
-                <a:latin typeface="Calibri"/>
-                <a:ea typeface="DejaVu Sans"/>
-              </a:rPr>
-              <a:t>Programs on open, read, write, lseek and stat </a:t>
-            </a:r>
-            <a:r>
-              <a:rPr b="1" lang="en-US" sz="1800" spc="-1" strike="noStrike">
-                <a:solidFill>
-                  <a:srgbClr val="000000"/>
-                </a:solidFill>
-                <a:latin typeface="Calibri"/>
-                <a:ea typeface="DejaVu Sans"/>
-              </a:rPr>
-              <a:t>Execute Program</a:t>
-            </a:r>
-            <a:endParaRPr b="0" lang="en-US" sz="1800" spc="-1" strike="noStrike">
-              <a:solidFill>
-                <a:srgbClr val="000000"/>
-              </a:solidFill>
-              <a:latin typeface="Arial"/>
-            </a:endParaRPr>
-          </a:p>
-          <a:p>
-            <a:pPr>
-              <a:lnSpc>
-                <a:spcPct val="100000"/>
-              </a:lnSpc>
-            </a:pPr>
-            <a:r>
-              <a:rPr b="0" lang="en-US" sz="1800" spc="-1" strike="noStrike">
-                <a:solidFill>
-                  <a:srgbClr val="000000"/>
-                </a:solidFill>
-                <a:latin typeface="Calibri"/>
-                <a:ea typeface="DejaVu Sans"/>
-              </a:rPr>
-              <a:t> </a:t>
-            </a:r>
-            <a:endParaRPr b="0" lang="en-US" sz="1800" spc="-1" strike="noStrike">
-              <a:solidFill>
-                <a:srgbClr val="000000"/>
-              </a:solidFill>
-              <a:latin typeface="Arial"/>
-            </a:endParaRPr>
-          </a:p>
-          <a:p>
-            <a:pPr>
-              <a:lnSpc>
-                <a:spcPct val="100000"/>
-              </a:lnSpc>
-            </a:pPr>
-            <a:r>
-              <a:rPr b="0" lang="en-US" sz="1800" spc="-1" strike="noStrike">
-                <a:solidFill>
-                  <a:srgbClr val="000000"/>
-                </a:solidFill>
-                <a:latin typeface="Calibri"/>
-                <a:ea typeface="DejaVu Sans"/>
-              </a:rPr>
-              <a:t>About fd redirection, Dup System call </a:t>
-            </a:r>
-            <a:r>
-              <a:rPr b="1" lang="en-US" sz="1800" spc="-1" strike="noStrike">
-                <a:solidFill>
-                  <a:srgbClr val="000000"/>
-                </a:solidFill>
-                <a:latin typeface="Calibri"/>
-                <a:ea typeface="DejaVu Sans"/>
-              </a:rPr>
-              <a:t>Execute Program</a:t>
-            </a:r>
-            <a:endParaRPr b="0" lang="en-US" sz="1800" spc="-1" strike="noStrike">
-              <a:solidFill>
-                <a:srgbClr val="000000"/>
-              </a:solidFill>
-              <a:latin typeface="Arial"/>
-            </a:endParaRPr>
-          </a:p>
-          <a:p>
-            <a:pPr>
-              <a:lnSpc>
-                <a:spcPct val="100000"/>
-              </a:lnSpc>
-            </a:pPr>
+              <a:t>by a message corresponding to the current value of errno.</a:t>
+            </a:r>
             <a:endParaRPr b="0" lang="en-US" sz="1800" spc="-1" strike="noStrike">
               <a:solidFill>
                 <a:srgbClr val="000000"/>
@@ -9299,14 +9150,14 @@
       </p:grpSpPr>
       <p:sp>
         <p:nvSpPr>
-          <p:cNvPr id="93" name=""/>
+          <p:cNvPr id="95" name="CustomShape 1"/>
           <p:cNvSpPr/>
           <p:nvPr/>
         </p:nvSpPr>
         <p:spPr>
           <a:xfrm>
-            <a:off x="228600" y="228600"/>
-            <a:ext cx="8686440" cy="2905560"/>
+            <a:off x="84600" y="196200"/>
+            <a:ext cx="8840880" cy="6399000"/>
           </a:xfrm>
           <a:prstGeom prst="rect">
             <a:avLst/>
@@ -9324,7 +9175,7 @@
         </p:style>
         <p:txBody>
           <a:bodyPr lIns="90000" rIns="90000" tIns="45000" bIns="45000" anchor="t">
-            <a:noAutofit/>
+            <a:spAutoFit/>
           </a:bodyPr>
           <a:p>
             <a:pPr>
@@ -9333,13 +9184,356 @@
               </a:lnSpc>
             </a:pPr>
             <a:r>
+              <a:rPr b="0" lang="en-US" sz="1800" spc="-1" strike="noStrike">
+                <a:solidFill>
+                  <a:srgbClr val="000000"/>
+                </a:solidFill>
+                <a:latin typeface="Calibri"/>
+                <a:ea typeface="DejaVu Sans"/>
+              </a:rPr>
+              <a:t>Linux provides uniform interface to various kinds of objects through its basic I/O system calls. All these objects are called files.  But these files could refer to different things like, regular file,  character device, block device, named pipe (FIFO), symbolic link,  or a network socket. This means that the same four system calls—open(), read(), write(), and close()—are used to perform I/O on all types of files, including devices such as terminals</a:t>
+            </a:r>
+            <a:endParaRPr b="0" lang="en-US" sz="1800" spc="-1" strike="noStrike">
+              <a:solidFill>
+                <a:srgbClr val="000000"/>
+              </a:solidFill>
+              <a:latin typeface="Arial"/>
+            </a:endParaRPr>
+          </a:p>
+          <a:p>
+            <a:pPr>
+              <a:lnSpc>
+                <a:spcPct val="100000"/>
+              </a:lnSpc>
+            </a:pPr>
+            <a:endParaRPr b="0" lang="en-US" sz="1800" spc="-1" strike="noStrike">
+              <a:solidFill>
+                <a:srgbClr val="000000"/>
+              </a:solidFill>
+              <a:latin typeface="Arial"/>
+            </a:endParaRPr>
+          </a:p>
+          <a:p>
+            <a:pPr>
+              <a:lnSpc>
+                <a:spcPct val="100000"/>
+              </a:lnSpc>
+            </a:pPr>
+            <a:r>
+              <a:rPr b="0" lang="en-US" sz="1800" spc="-1" strike="noStrike">
+                <a:solidFill>
+                  <a:srgbClr val="000000"/>
+                </a:solidFill>
+                <a:latin typeface="Calibri"/>
+                <a:ea typeface="DejaVu Sans"/>
+              </a:rPr>
+              <a:t>So we can use read() and write() system calls to:  </a:t>
+            </a:r>
+            <a:endParaRPr b="0" lang="en-US" sz="1800" spc="-1" strike="noStrike">
+              <a:solidFill>
+                <a:srgbClr val="000000"/>
+              </a:solidFill>
+              <a:latin typeface="Arial"/>
+            </a:endParaRPr>
+          </a:p>
+          <a:p>
+            <a:pPr>
+              <a:lnSpc>
+                <a:spcPct val="100000"/>
+              </a:lnSpc>
+            </a:pPr>
+            <a:r>
+              <a:rPr b="0" lang="en-US" sz="1800" spc="-1" strike="noStrike">
+                <a:solidFill>
+                  <a:srgbClr val="000000"/>
+                </a:solidFill>
+                <a:latin typeface="Calibri"/>
+                <a:ea typeface="DejaVu Sans"/>
+              </a:rPr>
+              <a:t>Read and write to files on hard disk or floppy disk</a:t>
+            </a:r>
+            <a:endParaRPr b="0" lang="en-US" sz="1800" spc="-1" strike="noStrike">
+              <a:solidFill>
+                <a:srgbClr val="000000"/>
+              </a:solidFill>
+              <a:latin typeface="Arial"/>
+            </a:endParaRPr>
+          </a:p>
+          <a:p>
+            <a:pPr>
+              <a:lnSpc>
+                <a:spcPct val="100000"/>
+              </a:lnSpc>
+            </a:pPr>
+            <a:r>
+              <a:rPr b="0" lang="en-US" sz="1800" spc="-1" strike="noStrike">
+                <a:solidFill>
+                  <a:srgbClr val="000000"/>
+                </a:solidFill>
+                <a:latin typeface="Calibri"/>
+                <a:ea typeface="DejaVu Sans"/>
+              </a:rPr>
+              <a:t>Read and write to I/O devices like printers, modems, terminals, Audio devices</a:t>
+            </a:r>
+            <a:endParaRPr b="0" lang="en-US" sz="1800" spc="-1" strike="noStrike">
+              <a:solidFill>
+                <a:srgbClr val="000000"/>
+              </a:solidFill>
+              <a:latin typeface="Arial"/>
+            </a:endParaRPr>
+          </a:p>
+          <a:p>
+            <a:pPr>
+              <a:lnSpc>
+                <a:spcPct val="100000"/>
+              </a:lnSpc>
+            </a:pPr>
+            <a:r>
+              <a:rPr b="0" lang="en-US" sz="1800" spc="-1" strike="noStrike">
+                <a:solidFill>
+                  <a:srgbClr val="000000"/>
+                </a:solidFill>
+                <a:latin typeface="Calibri"/>
+                <a:ea typeface="DejaVu Sans"/>
+              </a:rPr>
+              <a:t>Read and write to IPC object such as Pipes and FIFOs</a:t>
+            </a:r>
+            <a:endParaRPr b="0" lang="en-US" sz="1800" spc="-1" strike="noStrike">
+              <a:solidFill>
+                <a:srgbClr val="000000"/>
+              </a:solidFill>
+              <a:latin typeface="Arial"/>
+            </a:endParaRPr>
+          </a:p>
+          <a:p>
+            <a:pPr>
+              <a:lnSpc>
+                <a:spcPct val="100000"/>
+              </a:lnSpc>
+            </a:pPr>
+            <a:r>
+              <a:rPr b="0" lang="en-US" sz="1800" spc="-1" strike="noStrike">
+                <a:solidFill>
+                  <a:srgbClr val="000000"/>
+                </a:solidFill>
+                <a:latin typeface="Calibri"/>
+                <a:ea typeface="DejaVu Sans"/>
+              </a:rPr>
+              <a:t>Read and write to network objects such as Sockets</a:t>
+            </a:r>
+            <a:endParaRPr b="0" lang="en-US" sz="1800" spc="-1" strike="noStrike">
+              <a:solidFill>
+                <a:srgbClr val="000000"/>
+              </a:solidFill>
+              <a:latin typeface="Arial"/>
+            </a:endParaRPr>
+          </a:p>
+          <a:p>
+            <a:pPr>
+              <a:lnSpc>
+                <a:spcPct val="100000"/>
+              </a:lnSpc>
+            </a:pPr>
+            <a:r>
+              <a:rPr b="0" lang="en-US" sz="1800" spc="-1" strike="noStrike">
+                <a:solidFill>
+                  <a:srgbClr val="000000"/>
+                </a:solidFill>
+                <a:latin typeface="Calibri"/>
+                <a:ea typeface="DejaVu Sans"/>
+              </a:rPr>
+              <a:t>open(),read(),write(),lseek(),fcntl(),ioctl(),close() dup() dup2() unlink()</a:t>
+            </a:r>
+            <a:endParaRPr b="0" lang="en-US" sz="1800" spc="-1" strike="noStrike">
+              <a:solidFill>
+                <a:srgbClr val="000000"/>
+              </a:solidFill>
+              <a:latin typeface="Arial"/>
+            </a:endParaRPr>
+          </a:p>
+          <a:p>
+            <a:pPr>
+              <a:lnSpc>
+                <a:spcPct val="100000"/>
+              </a:lnSpc>
+            </a:pPr>
+            <a:endParaRPr b="0" lang="en-US" sz="1800" spc="-1" strike="noStrike">
+              <a:solidFill>
+                <a:srgbClr val="000000"/>
+              </a:solidFill>
+              <a:latin typeface="Arial"/>
+            </a:endParaRPr>
+          </a:p>
+          <a:p>
+            <a:pPr>
+              <a:lnSpc>
+                <a:spcPct val="100000"/>
+              </a:lnSpc>
+            </a:pPr>
+            <a:r>
+              <a:rPr b="0" lang="en-US" sz="1800" spc="-1" strike="noStrike">
+                <a:solidFill>
+                  <a:srgbClr val="000000"/>
+                </a:solidFill>
+                <a:latin typeface="Calibri"/>
+                <a:ea typeface="Noto Sans CJK SC"/>
+              </a:rPr>
+              <a:t>$./copy test test.old </a:t>
+            </a:r>
+            <a:r>
+              <a:rPr b="0" lang="en-US" sz="1800" spc="-1" strike="noStrike">
+                <a:solidFill>
+                  <a:srgbClr val="000000"/>
+                </a:solidFill>
+                <a:latin typeface="Calibri"/>
+                <a:ea typeface="DejaVu Sans"/>
+              </a:rPr>
+              <a:t>Copy a regular file</a:t>
+            </a:r>
+            <a:endParaRPr b="0" lang="en-US" sz="1800" spc="-1" strike="noStrike">
+              <a:solidFill>
+                <a:srgbClr val="000000"/>
+              </a:solidFill>
+              <a:latin typeface="Arial"/>
+            </a:endParaRPr>
+          </a:p>
+          <a:p>
+            <a:pPr>
+              <a:lnSpc>
+                <a:spcPct val="100000"/>
+              </a:lnSpc>
+            </a:pPr>
+            <a:r>
+              <a:rPr b="0" lang="en-US" sz="1800" spc="-1" strike="noStrike">
+                <a:solidFill>
+                  <a:srgbClr val="000000"/>
+                </a:solidFill>
+                <a:latin typeface="Calibri"/>
+                <a:ea typeface="Noto Sans CJK SC"/>
+              </a:rPr>
+              <a:t>$./copy a.txt /dev/tty </a:t>
+            </a:r>
+            <a:r>
+              <a:rPr b="0" lang="en-US" sz="1800" spc="-1" strike="noStrike">
+                <a:solidFill>
+                  <a:srgbClr val="000000"/>
+                </a:solidFill>
+                <a:latin typeface="Calibri"/>
+                <a:ea typeface="DejaVu Sans"/>
+              </a:rPr>
+              <a:t>Copy a regular file to this terminal</a:t>
+            </a:r>
+            <a:endParaRPr b="0" lang="en-US" sz="1800" spc="-1" strike="noStrike">
+              <a:solidFill>
+                <a:srgbClr val="000000"/>
+              </a:solidFill>
+              <a:latin typeface="Arial"/>
+            </a:endParaRPr>
+          </a:p>
+          <a:p>
+            <a:pPr>
+              <a:lnSpc>
+                <a:spcPct val="100000"/>
+              </a:lnSpc>
+            </a:pPr>
+            <a:r>
+              <a:rPr b="0" lang="en-US" sz="1800" spc="-1" strike="noStrike">
+                <a:solidFill>
+                  <a:srgbClr val="000000"/>
+                </a:solidFill>
+                <a:latin typeface="Calibri"/>
+                <a:ea typeface="Noto Sans CJK SC"/>
+              </a:rPr>
+              <a:t>$./copy /dev/tty b.txt </a:t>
+            </a:r>
+            <a:r>
+              <a:rPr b="0" lang="en-US" sz="1800" spc="-1" strike="noStrike">
+                <a:solidFill>
+                  <a:srgbClr val="000000"/>
+                </a:solidFill>
+                <a:latin typeface="Calibri"/>
+                <a:ea typeface="DejaVu Sans"/>
+              </a:rPr>
+              <a:t>Copy input from this terminal to a regular file</a:t>
+            </a:r>
+            <a:endParaRPr b="0" lang="en-US" sz="1800" spc="-1" strike="noStrike">
+              <a:solidFill>
+                <a:srgbClr val="000000"/>
+              </a:solidFill>
+              <a:latin typeface="Arial"/>
+            </a:endParaRPr>
+          </a:p>
+          <a:p>
+            <a:pPr>
+              <a:lnSpc>
+                <a:spcPct val="100000"/>
+              </a:lnSpc>
+            </a:pPr>
+            <a:r>
+              <a:rPr b="0" lang="en-US" sz="1800" spc="-1" strike="noStrike">
+                <a:solidFill>
+                  <a:srgbClr val="000000"/>
+                </a:solidFill>
+                <a:latin typeface="Calibri"/>
+                <a:ea typeface="Noto Sans CJK SC"/>
+              </a:rPr>
+              <a:t>$./copy /dev/pts/16 /dev/tty </a:t>
+            </a:r>
+            <a:r>
+              <a:rPr b="0" lang="en-US" sz="1800" spc="-1" strike="noStrike">
+                <a:solidFill>
+                  <a:srgbClr val="000000"/>
+                </a:solidFill>
+                <a:latin typeface="Calibri"/>
+                <a:ea typeface="DejaVu Sans"/>
+              </a:rPr>
+              <a:t>Copy input from another terminal</a:t>
+            </a:r>
+            <a:endParaRPr b="0" lang="en-US" sz="1800" spc="-1" strike="noStrike">
+              <a:solidFill>
+                <a:srgbClr val="000000"/>
+              </a:solidFill>
+              <a:latin typeface="Arial"/>
+            </a:endParaRPr>
+          </a:p>
+          <a:p>
+            <a:pPr>
+              <a:lnSpc>
+                <a:spcPct val="100000"/>
+              </a:lnSpc>
+            </a:pPr>
+            <a:endParaRPr b="0" lang="en-US" sz="1800" spc="-1" strike="noStrike">
+              <a:solidFill>
+                <a:srgbClr val="000000"/>
+              </a:solidFill>
+              <a:latin typeface="Arial"/>
+            </a:endParaRPr>
+          </a:p>
+          <a:p>
+            <a:pPr>
+              <a:lnSpc>
+                <a:spcPct val="100000"/>
+              </a:lnSpc>
+            </a:pPr>
+            <a:r>
+              <a:rPr b="0" lang="en-US" sz="1800" spc="-1" strike="noStrike">
+                <a:solidFill>
+                  <a:srgbClr val="000000"/>
+                </a:solidFill>
+                <a:latin typeface="Calibri"/>
+                <a:ea typeface="DejaVu Sans"/>
+              </a:rPr>
+              <a:t>Programs on open, read, write, lseek and stat </a:t>
+            </a:r>
+            <a:r>
               <a:rPr b="1" lang="en-US" sz="1800" spc="-1" strike="noStrike">
                 <a:solidFill>
                   <a:srgbClr val="000000"/>
                 </a:solidFill>
-                <a:latin typeface="Arial"/>
-              </a:rPr>
-              <a:t>Exercise:</a:t>
+                <a:latin typeface="Calibri"/>
+                <a:ea typeface="DejaVu Sans"/>
+              </a:rPr>
+              <a:t>Execute Program</a:t>
             </a:r>
             <a:endParaRPr b="0" lang="en-US" sz="1800" spc="-1" strike="noStrike">
               <a:solidFill>
@@ -9354,6 +9548,16 @@
                 <a:spcPct val="100000"/>
               </a:lnSpc>
             </a:pPr>
+            <a:r>
+              <a:rPr b="0" lang="en-US" sz="1800" spc="-1" strike="noStrike">
+                <a:solidFill>
+                  <a:srgbClr val="000000"/>
+                </a:solidFill>
+                <a:latin typeface="Calibri"/>
+                <a:ea typeface="DejaVu Sans"/>
+              </a:rPr>
+              <a:t> </a:t>
+            </a:r>
             <a:endParaRPr b="0" lang="en-US" sz="1800" spc="-1" strike="noStrike">
               <a:solidFill>
                 <a:srgbClr val="000000"/>
@@ -9372,9 +9576,20 @@
                 <a:solidFill>
                   <a:srgbClr val="000000"/>
                 </a:solidFill>
-                <a:latin typeface="Arial"/>
-              </a:rPr>
-              <a:t>1.     struct winsize w;  Use this structure</a:t>
+                <a:latin typeface="Calibri"/>
+                <a:ea typeface="DejaVu Sans"/>
+              </a:rPr>
+              <a:t>About fd redirection, Dup System call </a:t>
+            </a:r>
+            <a:r>
+              <a:rPr b="1" lang="en-US" sz="1800" spc="-1" strike="noStrike">
+                <a:solidFill>
+                  <a:srgbClr val="000000"/>
+                </a:solidFill>
+                <a:latin typeface="Calibri"/>
+                <a:ea typeface="DejaVu Sans"/>
+              </a:rPr>
+              <a:t>Execute Program</a:t>
             </a:r>
             <a:endParaRPr b="0" lang="en-US" sz="1800" spc="-1" strike="noStrike">
               <a:solidFill>
@@ -9389,151 +9604,6 @@
                 <a:spcPct val="100000"/>
               </a:lnSpc>
             </a:pPr>
-            <a:endParaRPr b="0" lang="en-US" sz="1800" spc="-1" strike="noStrike">
-              <a:solidFill>
-                <a:srgbClr val="000000"/>
-              </a:solidFill>
-              <a:latin typeface="Arial"/>
-            </a:endParaRPr>
-          </a:p>
-          <a:p>
-            <a:pPr>
-              <a:lnSpc>
-                <a:spcPct val="100000"/>
-              </a:lnSpc>
-            </a:pPr>
-            <a:r>
-              <a:rPr b="0" lang="en-US" sz="1800" spc="-1" strike="noStrike">
-                <a:solidFill>
-                  <a:srgbClr val="000000"/>
-                </a:solidFill>
-                <a:latin typeface="Arial"/>
-              </a:rPr>
-              <a:t>2.      Open /dev/tty with open system call</a:t>
-            </a:r>
-            <a:endParaRPr b="0" lang="en-US" sz="1800" spc="-1" strike="noStrike">
-              <a:solidFill>
-                <a:srgbClr val="000000"/>
-              </a:solidFill>
-              <a:latin typeface="Arial"/>
-            </a:endParaRPr>
-          </a:p>
-          <a:p>
-            <a:pPr>
-              <a:lnSpc>
-                <a:spcPct val="100000"/>
-              </a:lnSpc>
-            </a:pPr>
-            <a:endParaRPr b="0" lang="en-US" sz="1800" spc="-1" strike="noStrike">
-              <a:solidFill>
-                <a:srgbClr val="000000"/>
-              </a:solidFill>
-              <a:latin typeface="Arial"/>
-            </a:endParaRPr>
-          </a:p>
-          <a:p>
-            <a:pPr>
-              <a:lnSpc>
-                <a:spcPct val="100000"/>
-              </a:lnSpc>
-            </a:pPr>
-            <a:r>
-              <a:rPr b="0" lang="en-US" sz="1800" spc="-1" strike="noStrike">
-                <a:solidFill>
-                  <a:srgbClr val="000000"/>
-                </a:solidFill>
-                <a:latin typeface="Arial"/>
-              </a:rPr>
-              <a:t>3.     Get terminal attributes using</a:t>
-            </a:r>
-            <a:r>
-              <a:rPr b="1" lang="en-US" sz="1800" spc="-1" strike="noStrike">
-                <a:solidFill>
-                  <a:srgbClr val="000000"/>
-                </a:solidFill>
-                <a:latin typeface="Arial"/>
-              </a:rPr>
-              <a:t> ioctl(fd, TIOCGWINSZ, &amp;w)</a:t>
-            </a:r>
-            <a:endParaRPr b="0" lang="en-US" sz="1800" spc="-1" strike="noStrike">
-              <a:solidFill>
-                <a:srgbClr val="000000"/>
-              </a:solidFill>
-              <a:latin typeface="Arial"/>
-            </a:endParaRPr>
-          </a:p>
-          <a:p>
-            <a:pPr>
-              <a:lnSpc>
-                <a:spcPct val="100000"/>
-              </a:lnSpc>
-            </a:pPr>
-            <a:endParaRPr b="0" lang="en-US" sz="1800" spc="-1" strike="noStrike">
-              <a:solidFill>
-                <a:srgbClr val="000000"/>
-              </a:solidFill>
-              <a:latin typeface="Arial"/>
-            </a:endParaRPr>
-          </a:p>
-          <a:p>
-            <a:pPr>
-              <a:lnSpc>
-                <a:spcPct val="100000"/>
-              </a:lnSpc>
-            </a:pPr>
-            <a:r>
-              <a:rPr b="0" lang="en-US" sz="1800" spc="-1" strike="noStrike">
-                <a:solidFill>
-                  <a:srgbClr val="000000"/>
-                </a:solidFill>
-                <a:latin typeface="Arial"/>
-              </a:rPr>
-              <a:t>4.     Print current terminal size, columns, xpixel, ypixel.</a:t>
-            </a:r>
-            <a:endParaRPr b="0" lang="en-US" sz="1800" spc="-1" strike="noStrike">
-              <a:solidFill>
-                <a:srgbClr val="000000"/>
-              </a:solidFill>
-              <a:latin typeface="Arial"/>
-            </a:endParaRPr>
-          </a:p>
-          <a:p>
-            <a:pPr>
-              <a:lnSpc>
-                <a:spcPct val="100000"/>
-              </a:lnSpc>
-            </a:pPr>
-            <a:endParaRPr b="0" lang="en-US" sz="1800" spc="-1" strike="noStrike">
-              <a:solidFill>
-                <a:srgbClr val="000000"/>
-              </a:solidFill>
-              <a:latin typeface="Arial"/>
-            </a:endParaRPr>
-          </a:p>
-          <a:p>
-            <a:pPr>
-              <a:lnSpc>
-                <a:spcPct val="100000"/>
-              </a:lnSpc>
-            </a:pPr>
-            <a:r>
-              <a:rPr b="0" lang="en-US" sz="1800" spc="-1" strike="noStrike">
-                <a:solidFill>
-                  <a:srgbClr val="000000"/>
-                </a:solidFill>
-                <a:latin typeface="Arial"/>
-              </a:rPr>
-              <a:t>5.     Set terminal size to 40x100 </a:t>
-            </a:r>
-            <a:r>
-              <a:rPr b="1" lang="en-US" sz="1800" spc="-1" strike="noStrike">
-                <a:solidFill>
-                  <a:srgbClr val="000000"/>
-                </a:solidFill>
-                <a:latin typeface="Arial"/>
-              </a:rPr>
-              <a:t>using ioctl(fd, TIOCSWINSZ, &amp;w)</a:t>
-            </a:r>
             <a:endParaRPr b="0" lang="en-US" sz="1800" spc="-1" strike="noStrike">
               <a:solidFill>
                 <a:srgbClr val="000000"/>
@@ -9573,29 +9643,260 @@
           <a:chExt cx="0" cy="0"/>
         </a:xfrm>
       </p:grpSpPr>
-      <p:pic>
-        <p:nvPicPr>
-          <p:cNvPr id="94" name="" descr=""/>
-          <p:cNvPicPr/>
+      <p:sp>
+        <p:nvSpPr>
+          <p:cNvPr id="96" name=""/>
+          <p:cNvSpPr/>
           <p:nvPr/>
-        </p:nvPicPr>
-        <p:blipFill>
-          <a:blip r:embed="rId1"/>
-          <a:stretch/>
-        </p:blipFill>
+        </p:nvSpPr>
         <p:spPr>
           <a:xfrm>
-            <a:off x="20880" y="809640"/>
-            <a:ext cx="9142920" cy="5257440"/>
+            <a:off x="228600" y="228600"/>
+            <a:ext cx="8686080" cy="2905200"/>
           </a:xfrm>
           <a:prstGeom prst="rect">
             <a:avLst/>
           </a:prstGeom>
+          <a:noFill/>
           <a:ln w="0">
             <a:noFill/>
           </a:ln>
         </p:spPr>
-      </p:pic>
+        <p:style>
+          <a:lnRef idx="0"/>
+          <a:fillRef idx="0"/>
+          <a:effectRef idx="0"/>
+          <a:fontRef idx="minor"/>
+        </p:style>
+        <p:txBody>
+          <a:bodyPr lIns="90000" rIns="90000" tIns="45000" bIns="45000" anchor="t">
+            <a:noAutofit/>
+          </a:bodyPr>
+          <a:p>
+            <a:pPr>
+              <a:lnSpc>
+                <a:spcPct val="100000"/>
+              </a:lnSpc>
+            </a:pPr>
+            <a:r>
+              <a:rPr b="1" lang="en-US" sz="1800" spc="-1" strike="noStrike">
+                <a:solidFill>
+                  <a:srgbClr val="000000"/>
+                </a:solidFill>
+                <a:latin typeface="Arial"/>
+                <a:ea typeface="DejaVu Sans"/>
+              </a:rPr>
+              <a:t>Exercise:</a:t>
+            </a:r>
+            <a:endParaRPr b="0" lang="en-US" sz="1800" spc="-1" strike="noStrike">
+              <a:solidFill>
+                <a:srgbClr val="000000"/>
+              </a:solidFill>
+              <a:latin typeface="Arial"/>
+            </a:endParaRPr>
+          </a:p>
+          <a:p>
+            <a:pPr>
+              <a:lnSpc>
+                <a:spcPct val="100000"/>
+              </a:lnSpc>
+            </a:pPr>
+            <a:endParaRPr b="0" lang="en-US" sz="1800" spc="-1" strike="noStrike">
+              <a:solidFill>
+                <a:srgbClr val="000000"/>
+              </a:solidFill>
+              <a:latin typeface="Arial"/>
+            </a:endParaRPr>
+          </a:p>
+          <a:p>
+            <a:pPr>
+              <a:lnSpc>
+                <a:spcPct val="100000"/>
+              </a:lnSpc>
+            </a:pPr>
+            <a:r>
+              <a:rPr b="0" lang="en-US" sz="1800" spc="-1" strike="noStrike">
+                <a:solidFill>
+                  <a:srgbClr val="000000"/>
+                </a:solidFill>
+                <a:latin typeface="Arial"/>
+                <a:ea typeface="DejaVu Sans"/>
+              </a:rPr>
+              <a:t>1.     struct winsize w;  Use this structure</a:t>
+            </a:r>
+            <a:endParaRPr b="0" lang="en-US" sz="1800" spc="-1" strike="noStrike">
+              <a:solidFill>
+                <a:srgbClr val="000000"/>
+              </a:solidFill>
+              <a:latin typeface="Arial"/>
+            </a:endParaRPr>
+          </a:p>
+          <a:p>
+            <a:pPr>
+              <a:lnSpc>
+                <a:spcPct val="100000"/>
+              </a:lnSpc>
+            </a:pPr>
+            <a:endParaRPr b="0" lang="en-US" sz="1800" spc="-1" strike="noStrike">
+              <a:solidFill>
+                <a:srgbClr val="000000"/>
+              </a:solidFill>
+              <a:latin typeface="Arial"/>
+            </a:endParaRPr>
+          </a:p>
+          <a:p>
+            <a:pPr>
+              <a:lnSpc>
+                <a:spcPct val="100000"/>
+              </a:lnSpc>
+            </a:pPr>
+            <a:r>
+              <a:rPr b="0" lang="en-US" sz="1800" spc="-1" strike="noStrike">
+                <a:solidFill>
+                  <a:srgbClr val="000000"/>
+                </a:solidFill>
+                <a:latin typeface="Arial"/>
+                <a:ea typeface="DejaVu Sans"/>
+              </a:rPr>
+              <a:t>2.      Open /dev/tty with open system call</a:t>
+            </a:r>
+            <a:endParaRPr b="0" lang="en-US" sz="1800" spc="-1" strike="noStrike">
+              <a:solidFill>
+                <a:srgbClr val="000000"/>
+              </a:solidFill>
+              <a:latin typeface="Arial"/>
+            </a:endParaRPr>
+          </a:p>
+          <a:p>
+            <a:pPr>
+              <a:lnSpc>
+                <a:spcPct val="100000"/>
+              </a:lnSpc>
+            </a:pPr>
+            <a:endParaRPr b="0" lang="en-US" sz="1800" spc="-1" strike="noStrike">
+              <a:solidFill>
+                <a:srgbClr val="000000"/>
+              </a:solidFill>
+              <a:latin typeface="Arial"/>
+            </a:endParaRPr>
+          </a:p>
+          <a:p>
+            <a:pPr>
+              <a:lnSpc>
+                <a:spcPct val="100000"/>
+              </a:lnSpc>
+            </a:pPr>
+            <a:r>
+              <a:rPr b="0" lang="en-US" sz="1800" spc="-1" strike="noStrike">
+                <a:solidFill>
+                  <a:srgbClr val="000000"/>
+                </a:solidFill>
+                <a:latin typeface="Arial"/>
+                <a:ea typeface="DejaVu Sans"/>
+              </a:rPr>
+              <a:t>3.     Get terminal attributes using</a:t>
+            </a:r>
+            <a:r>
+              <a:rPr b="1" lang="en-US" sz="1800" spc="-1" strike="noStrike">
+                <a:solidFill>
+                  <a:srgbClr val="000000"/>
+                </a:solidFill>
+                <a:latin typeface="Arial"/>
+                <a:ea typeface="DejaVu Sans"/>
+              </a:rPr>
+              <a:t> ioctl(fd, TIOCGWINSZ, &amp;w)</a:t>
+            </a:r>
+            <a:endParaRPr b="0" lang="en-US" sz="1800" spc="-1" strike="noStrike">
+              <a:solidFill>
+                <a:srgbClr val="000000"/>
+              </a:solidFill>
+              <a:latin typeface="Arial"/>
+            </a:endParaRPr>
+          </a:p>
+          <a:p>
+            <a:pPr>
+              <a:lnSpc>
+                <a:spcPct val="100000"/>
+              </a:lnSpc>
+            </a:pPr>
+            <a:endParaRPr b="0" lang="en-US" sz="1800" spc="-1" strike="noStrike">
+              <a:solidFill>
+                <a:srgbClr val="000000"/>
+              </a:solidFill>
+              <a:latin typeface="Arial"/>
+            </a:endParaRPr>
+          </a:p>
+          <a:p>
+            <a:pPr>
+              <a:lnSpc>
+                <a:spcPct val="100000"/>
+              </a:lnSpc>
+            </a:pPr>
+            <a:r>
+              <a:rPr b="0" lang="en-US" sz="1800" spc="-1" strike="noStrike">
+                <a:solidFill>
+                  <a:srgbClr val="000000"/>
+                </a:solidFill>
+                <a:latin typeface="Arial"/>
+                <a:ea typeface="DejaVu Sans"/>
+              </a:rPr>
+              <a:t>4.     Print current terminal size, columns, xpixel, ypixel.</a:t>
+            </a:r>
+            <a:endParaRPr b="0" lang="en-US" sz="1800" spc="-1" strike="noStrike">
+              <a:solidFill>
+                <a:srgbClr val="000000"/>
+              </a:solidFill>
+              <a:latin typeface="Arial"/>
+            </a:endParaRPr>
+          </a:p>
+          <a:p>
+            <a:pPr>
+              <a:lnSpc>
+                <a:spcPct val="100000"/>
+              </a:lnSpc>
+            </a:pPr>
+            <a:endParaRPr b="0" lang="en-US" sz="1800" spc="-1" strike="noStrike">
+              <a:solidFill>
+                <a:srgbClr val="000000"/>
+              </a:solidFill>
+              <a:latin typeface="Arial"/>
+            </a:endParaRPr>
+          </a:p>
+          <a:p>
+            <a:pPr>
+              <a:lnSpc>
+                <a:spcPct val="100000"/>
+              </a:lnSpc>
+            </a:pPr>
+            <a:r>
+              <a:rPr b="0" lang="en-US" sz="1800" spc="-1" strike="noStrike">
+                <a:solidFill>
+                  <a:srgbClr val="000000"/>
+                </a:solidFill>
+                <a:latin typeface="Arial"/>
+                <a:ea typeface="DejaVu Sans"/>
+              </a:rPr>
+              <a:t>5.     Set terminal size to 40x100 </a:t>
+            </a:r>
+            <a:r>
+              <a:rPr b="1" lang="en-US" sz="1800" spc="-1" strike="noStrike">
+                <a:solidFill>
+                  <a:srgbClr val="000000"/>
+                </a:solidFill>
+                <a:latin typeface="Arial"/>
+                <a:ea typeface="DejaVu Sans"/>
+              </a:rPr>
+              <a:t>using ioctl(fd, TIOCSWINSZ, &amp;w)</a:t>
+            </a:r>
+            <a:endParaRPr b="0" lang="en-US" sz="1800" spc="-1" strike="noStrike">
+              <a:solidFill>
+                <a:srgbClr val="000000"/>
+              </a:solidFill>
+              <a:latin typeface="Arial"/>
+            </a:endParaRPr>
+          </a:p>
+        </p:txBody>
+      </p:sp>
     </p:spTree>
   </p:cSld>
   <mc:AlternateContent>
@@ -9626,473 +9927,29 @@
           <a:chExt cx="0" cy="0"/>
         </a:xfrm>
       </p:grpSpPr>
-      <p:sp>
-        <p:nvSpPr>
-          <p:cNvPr id="95" name="CustomShape 1"/>
-          <p:cNvSpPr/>
+      <p:pic>
+        <p:nvPicPr>
+          <p:cNvPr id="97" name="" descr=""/>
+          <p:cNvPicPr/>
           <p:nvPr/>
-        </p:nvSpPr>
+        </p:nvPicPr>
+        <p:blipFill>
+          <a:blip r:embed="rId1"/>
+          <a:stretch/>
+        </p:blipFill>
         <p:spPr>
           <a:xfrm>
-            <a:off x="116280" y="144000"/>
-            <a:ext cx="8665560" cy="1112400"/>
+            <a:off x="20880" y="809640"/>
+            <a:ext cx="9142560" cy="5257080"/>
           </a:xfrm>
           <a:prstGeom prst="rect">
             <a:avLst/>
           </a:prstGeom>
-          <a:noFill/>
           <a:ln w="0">
             <a:noFill/>
           </a:ln>
         </p:spPr>
-        <p:style>
-          <a:lnRef idx="0"/>
-          <a:fillRef idx="0"/>
-          <a:effectRef idx="0"/>
-          <a:fontRef idx="minor"/>
-        </p:style>
-        <p:txBody>
-          <a:bodyPr lIns="90000" rIns="90000" tIns="45000" bIns="45000" anchor="t">
-            <a:noAutofit/>
-          </a:bodyPr>
-          <a:p>
-            <a:pPr>
-              <a:lnSpc>
-                <a:spcPct val="100000"/>
-              </a:lnSpc>
-            </a:pPr>
-            <a:r>
-              <a:rPr b="1" lang="en-IN" sz="1800" spc="-1" strike="noStrike">
-                <a:solidFill>
-                  <a:srgbClr val="000000"/>
-                </a:solidFill>
-                <a:latin typeface="Arial"/>
-                <a:ea typeface="DejaVu Sans"/>
-              </a:rPr>
-              <a:t>File I/O at a Specified Offset: pread() and pwrite()</a:t>
-            </a:r>
-            <a:endParaRPr b="0" lang="en-US" sz="1800" spc="-1" strike="noStrike">
-              <a:solidFill>
-                <a:srgbClr val="000000"/>
-              </a:solidFill>
-              <a:latin typeface="Arial"/>
-            </a:endParaRPr>
-          </a:p>
-          <a:p>
-            <a:pPr>
-              <a:lnSpc>
-                <a:spcPct val="100000"/>
-              </a:lnSpc>
-            </a:pPr>
-            <a:endParaRPr b="0" lang="en-US" sz="1800" spc="-1" strike="noStrike">
-              <a:solidFill>
-                <a:srgbClr val="000000"/>
-              </a:solidFill>
-              <a:latin typeface="Arial"/>
-            </a:endParaRPr>
-          </a:p>
-          <a:p>
-            <a:pPr>
-              <a:lnSpc>
-                <a:spcPct val="100000"/>
-              </a:lnSpc>
-            </a:pPr>
-            <a:r>
-              <a:rPr b="0" lang="en-IN" sz="1800" spc="-1" strike="noStrike">
-                <a:solidFill>
-                  <a:srgbClr val="000000"/>
-                </a:solidFill>
-                <a:latin typeface="Arial"/>
-                <a:ea typeface="DejaVu Sans"/>
-              </a:rPr>
-              <a:t>The pread() and pwrite() system calls operate just like read() and write(), except that the file I/O is performed at the location specified by offset, rather than at the current file offset. The file offset is left unchanged by these calls.</a:t>
-            </a:r>
-            <a:endParaRPr b="0" lang="en-US" sz="1800" spc="-1" strike="noStrike">
-              <a:solidFill>
-                <a:srgbClr val="000000"/>
-              </a:solidFill>
-              <a:latin typeface="Arial"/>
-            </a:endParaRPr>
-          </a:p>
-        </p:txBody>
-      </p:sp>
-      <p:sp>
-        <p:nvSpPr>
-          <p:cNvPr id="96" name="CustomShape 2"/>
-          <p:cNvSpPr/>
-          <p:nvPr/>
-        </p:nvSpPr>
-        <p:spPr>
-          <a:xfrm>
-            <a:off x="155520" y="1929600"/>
-            <a:ext cx="8759520" cy="2136240"/>
-          </a:xfrm>
-          <a:prstGeom prst="rect">
-            <a:avLst/>
-          </a:prstGeom>
-          <a:noFill/>
-          <a:ln w="0">
-            <a:noFill/>
-          </a:ln>
-        </p:spPr>
-        <p:style>
-          <a:lnRef idx="0"/>
-          <a:fillRef idx="0"/>
-          <a:effectRef idx="0"/>
-          <a:fontRef idx="minor"/>
-        </p:style>
-        <p:txBody>
-          <a:bodyPr lIns="90000" rIns="90000" tIns="45000" bIns="45000" anchor="t">
-            <a:noAutofit/>
-          </a:bodyPr>
-          <a:p>
-            <a:pPr>
-              <a:lnSpc>
-                <a:spcPct val="100000"/>
-              </a:lnSpc>
-            </a:pPr>
-            <a:r>
-              <a:rPr b="0" lang="en-IN" sz="1800" spc="-1" strike="noStrike">
-                <a:solidFill>
-                  <a:srgbClr val="000000"/>
-                </a:solidFill>
-                <a:latin typeface="Arial"/>
-                <a:ea typeface="DejaVu Sans"/>
-              </a:rPr>
-              <a:t>Calling pread() is equivalent to atomically performing the following calls:</a:t>
-            </a:r>
-            <a:endParaRPr b="0" lang="en-US" sz="1800" spc="-1" strike="noStrike">
-              <a:solidFill>
-                <a:srgbClr val="000000"/>
-              </a:solidFill>
-              <a:latin typeface="Arial"/>
-            </a:endParaRPr>
-          </a:p>
-          <a:p>
-            <a:pPr>
-              <a:lnSpc>
-                <a:spcPct val="100000"/>
-              </a:lnSpc>
-            </a:pPr>
-            <a:r>
-              <a:rPr b="0" lang="en-IN" sz="1800" spc="-1" strike="noStrike">
-                <a:solidFill>
-                  <a:srgbClr val="000000"/>
-                </a:solidFill>
-                <a:latin typeface="Arial"/>
-                <a:ea typeface="DejaVu Sans"/>
-              </a:rPr>
-              <a:t>off_t orig;</a:t>
-            </a:r>
-            <a:endParaRPr b="0" lang="en-US" sz="1800" spc="-1" strike="noStrike">
-              <a:solidFill>
-                <a:srgbClr val="000000"/>
-              </a:solidFill>
-              <a:latin typeface="Arial"/>
-            </a:endParaRPr>
-          </a:p>
-          <a:p>
-            <a:pPr>
-              <a:lnSpc>
-                <a:spcPct val="100000"/>
-              </a:lnSpc>
-            </a:pPr>
-            <a:r>
-              <a:rPr b="0" lang="en-IN" sz="1800" spc="-1" strike="noStrike">
-                <a:solidFill>
-                  <a:srgbClr val="000000"/>
-                </a:solidFill>
-                <a:latin typeface="Arial"/>
-                <a:ea typeface="DejaVu Sans"/>
-              </a:rPr>
-              <a:t>orig = lseek(fd, 0, SEEK_CUR);</a:t>
-            </a:r>
-            <a:endParaRPr b="0" lang="en-US" sz="1800" spc="-1" strike="noStrike">
-              <a:solidFill>
-                <a:srgbClr val="000000"/>
-              </a:solidFill>
-              <a:latin typeface="Arial"/>
-            </a:endParaRPr>
-          </a:p>
-          <a:p>
-            <a:pPr>
-              <a:lnSpc>
-                <a:spcPct val="100000"/>
-              </a:lnSpc>
-            </a:pPr>
-            <a:r>
-              <a:rPr b="0" lang="en-IN" sz="1800" spc="-1" strike="noStrike">
-                <a:solidFill>
-                  <a:srgbClr val="000000"/>
-                </a:solidFill>
-                <a:latin typeface="Arial"/>
-                <a:ea typeface="Noto Sans CJK SC"/>
-              </a:rPr>
-              <a:t>lseek(fd, offset, SEEK_SET);  /* Save current offset */</a:t>
-            </a:r>
-            <a:endParaRPr b="0" lang="en-US" sz="1800" spc="-1" strike="noStrike">
-              <a:solidFill>
-                <a:srgbClr val="000000"/>
-              </a:solidFill>
-              <a:latin typeface="Arial"/>
-            </a:endParaRPr>
-          </a:p>
-          <a:p>
-            <a:pPr>
-              <a:lnSpc>
-                <a:spcPct val="100000"/>
-              </a:lnSpc>
-            </a:pPr>
-            <a:r>
-              <a:rPr b="0" lang="en-IN" sz="1800" spc="-1" strike="noStrike">
-                <a:solidFill>
-                  <a:srgbClr val="000000"/>
-                </a:solidFill>
-                <a:latin typeface="Arial"/>
-                <a:ea typeface="Noto Sans CJK SC"/>
-              </a:rPr>
-              <a:t>s = read(fd, buf, len);</a:t>
-            </a:r>
-            <a:endParaRPr b="0" lang="en-US" sz="1800" spc="-1" strike="noStrike">
-              <a:solidFill>
-                <a:srgbClr val="000000"/>
-              </a:solidFill>
-              <a:latin typeface="Arial"/>
-            </a:endParaRPr>
-          </a:p>
-          <a:p>
-            <a:pPr>
-              <a:lnSpc>
-                <a:spcPct val="100000"/>
-              </a:lnSpc>
-            </a:pPr>
-            <a:r>
-              <a:rPr b="0" lang="en-IN" sz="1800" spc="-1" strike="noStrike">
-                <a:solidFill>
-                  <a:srgbClr val="000000"/>
-                </a:solidFill>
-                <a:latin typeface="Arial"/>
-                <a:ea typeface="Noto Sans CJK SC"/>
-              </a:rPr>
-              <a:t>lseek(fd, orig, SEEK_SET); /* Restore original file offset */</a:t>
-            </a:r>
-            <a:endParaRPr b="0" lang="en-US" sz="1800" spc="-1" strike="noStrike">
-              <a:solidFill>
-                <a:srgbClr val="000000"/>
-              </a:solidFill>
-              <a:latin typeface="Arial"/>
-            </a:endParaRPr>
-          </a:p>
-          <a:p>
-            <a:pPr>
-              <a:lnSpc>
-                <a:spcPct val="100000"/>
-              </a:lnSpc>
-            </a:pPr>
-            <a:endParaRPr b="0" lang="en-US" sz="1800" spc="-1" strike="noStrike">
-              <a:solidFill>
-                <a:srgbClr val="000000"/>
-              </a:solidFill>
-              <a:latin typeface="Arial"/>
-            </a:endParaRPr>
-          </a:p>
-          <a:p>
-            <a:pPr>
-              <a:lnSpc>
-                <a:spcPct val="100000"/>
-              </a:lnSpc>
-            </a:pPr>
-            <a:endParaRPr b="0" lang="en-US" sz="1800" spc="-1" strike="noStrike">
-              <a:solidFill>
-                <a:srgbClr val="000000"/>
-              </a:solidFill>
-              <a:latin typeface="Arial"/>
-            </a:endParaRPr>
-          </a:p>
-        </p:txBody>
-      </p:sp>
-      <p:sp>
-        <p:nvSpPr>
-          <p:cNvPr id="97" name="CustomShape 3"/>
-          <p:cNvSpPr/>
-          <p:nvPr/>
-        </p:nvSpPr>
-        <p:spPr>
-          <a:xfrm>
-            <a:off x="155520" y="3685320"/>
-            <a:ext cx="8586360" cy="2647800"/>
-          </a:xfrm>
-          <a:prstGeom prst="rect">
-            <a:avLst/>
-          </a:prstGeom>
-          <a:noFill/>
-          <a:ln w="0">
-            <a:noFill/>
-          </a:ln>
-        </p:spPr>
-        <p:style>
-          <a:lnRef idx="0"/>
-          <a:fillRef idx="0"/>
-          <a:effectRef idx="0"/>
-          <a:fontRef idx="minor"/>
-        </p:style>
-        <p:txBody>
-          <a:bodyPr lIns="90000" rIns="90000" tIns="45000" bIns="45000" anchor="t">
-            <a:noAutofit/>
-          </a:bodyPr>
-          <a:p>
-            <a:pPr>
-              <a:lnSpc>
-                <a:spcPct val="100000"/>
-              </a:lnSpc>
-            </a:pPr>
-            <a:endParaRPr b="0" lang="en-US" sz="1800" spc="-1" strike="noStrike">
-              <a:solidFill>
-                <a:srgbClr val="000000"/>
-              </a:solidFill>
-              <a:latin typeface="Arial"/>
-            </a:endParaRPr>
-          </a:p>
-          <a:p>
-            <a:pPr>
-              <a:lnSpc>
-                <a:spcPct val="100000"/>
-              </a:lnSpc>
-            </a:pPr>
-            <a:r>
-              <a:rPr b="0" lang="en-IN" sz="1800" spc="-1" strike="noStrike">
-                <a:solidFill>
-                  <a:srgbClr val="000000"/>
-                </a:solidFill>
-                <a:latin typeface="Arial"/>
-                <a:ea typeface="Noto Sans CJK SC"/>
-              </a:rPr>
-              <a:t>These system calls can be particularly useful in multithreaded applications. This means that the file offset for each open file is global to all threads. Using</a:t>
-            </a:r>
-            <a:endParaRPr b="0" lang="en-US" sz="1800" spc="-1" strike="noStrike">
-              <a:solidFill>
-                <a:srgbClr val="000000"/>
-              </a:solidFill>
-              <a:latin typeface="Arial"/>
-            </a:endParaRPr>
-          </a:p>
-          <a:p>
-            <a:pPr>
-              <a:lnSpc>
-                <a:spcPct val="100000"/>
-              </a:lnSpc>
-            </a:pPr>
-            <a:r>
-              <a:rPr b="0" lang="en-IN" sz="1800" spc="-1" strike="noStrike">
-                <a:solidFill>
-                  <a:srgbClr val="000000"/>
-                </a:solidFill>
-                <a:latin typeface="Arial"/>
-                <a:ea typeface="Noto Sans CJK SC"/>
-              </a:rPr>
-              <a:t>pread() or pwrite(), multiple threads can simultaneously perform I/O on the same</a:t>
-            </a:r>
-            <a:endParaRPr b="0" lang="en-US" sz="1800" spc="-1" strike="noStrike">
-              <a:solidFill>
-                <a:srgbClr val="000000"/>
-              </a:solidFill>
-              <a:latin typeface="Arial"/>
-            </a:endParaRPr>
-          </a:p>
-          <a:p>
-            <a:pPr>
-              <a:lnSpc>
-                <a:spcPct val="100000"/>
-              </a:lnSpc>
-            </a:pPr>
-            <a:r>
-              <a:rPr b="0" lang="en-IN" sz="1800" spc="-1" strike="noStrike">
-                <a:solidFill>
-                  <a:srgbClr val="000000"/>
-                </a:solidFill>
-                <a:latin typeface="Arial"/>
-                <a:ea typeface="Noto Sans CJK SC"/>
-              </a:rPr>
-              <a:t>file descriptor without being affected by changes made to the file offset by other</a:t>
-            </a:r>
-            <a:endParaRPr b="0" lang="en-US" sz="1800" spc="-1" strike="noStrike">
-              <a:solidFill>
-                <a:srgbClr val="000000"/>
-              </a:solidFill>
-              <a:latin typeface="Arial"/>
-            </a:endParaRPr>
-          </a:p>
-          <a:p>
-            <a:pPr>
-              <a:lnSpc>
-                <a:spcPct val="100000"/>
-              </a:lnSpc>
-            </a:pPr>
-            <a:r>
-              <a:rPr b="0" lang="en-IN" sz="1800" spc="-1" strike="noStrike">
-                <a:solidFill>
-                  <a:srgbClr val="000000"/>
-                </a:solidFill>
-                <a:latin typeface="Arial"/>
-                <a:ea typeface="Noto Sans CJK SC"/>
-              </a:rPr>
-              <a:t>threads. If we attempted to use lseek() plus read() (or write()) instead, then we would create a race condition</a:t>
-            </a:r>
-            <a:endParaRPr b="0" lang="en-US" sz="1800" spc="-1" strike="noStrike">
-              <a:solidFill>
-                <a:srgbClr val="000000"/>
-              </a:solidFill>
-              <a:latin typeface="Arial"/>
-            </a:endParaRPr>
-          </a:p>
-          <a:p>
-            <a:pPr>
-              <a:lnSpc>
-                <a:spcPct val="100000"/>
-              </a:lnSpc>
-            </a:pPr>
-            <a:endParaRPr b="0" lang="en-US" sz="1800" spc="-1" strike="noStrike">
-              <a:solidFill>
-                <a:srgbClr val="000000"/>
-              </a:solidFill>
-              <a:latin typeface="Arial"/>
-            </a:endParaRPr>
-          </a:p>
-          <a:p>
-            <a:pPr>
-              <a:lnSpc>
-                <a:spcPct val="100000"/>
-              </a:lnSpc>
-            </a:pPr>
-            <a:r>
-              <a:rPr b="0" lang="en-IN" sz="1800" spc="-1" strike="noStrike">
-                <a:solidFill>
-                  <a:srgbClr val="000000"/>
-                </a:solidFill>
-                <a:latin typeface="Arial"/>
-                <a:ea typeface="Noto Sans CJK SC"/>
-              </a:rPr>
-              <a:t>-&gt; </a:t>
-            </a:r>
-            <a:r>
-              <a:rPr b="1" lang="en-IN" sz="1800" spc="-1" strike="noStrike">
-                <a:solidFill>
-                  <a:srgbClr val="000000"/>
-                </a:solidFill>
-                <a:latin typeface="Arial"/>
-                <a:ea typeface="Noto Sans CJK SC"/>
-              </a:rPr>
-              <a:t>Execute programs on pread, pwrite</a:t>
-            </a:r>
-            <a:endParaRPr b="0" lang="en-US" sz="1800" spc="-1" strike="noStrike">
-              <a:solidFill>
-                <a:srgbClr val="000000"/>
-              </a:solidFill>
-              <a:latin typeface="Arial"/>
-            </a:endParaRPr>
-          </a:p>
-        </p:txBody>
-      </p:sp>
+      </p:pic>
     </p:spTree>
   </p:cSld>
   <mc:AlternateContent>
@@ -10131,8 +9988,505 @@
         </p:nvSpPr>
         <p:spPr>
           <a:xfrm>
+            <a:off x="116280" y="144000"/>
+            <a:ext cx="8665200" cy="1112040"/>
+          </a:xfrm>
+          <a:prstGeom prst="rect">
+            <a:avLst/>
+          </a:prstGeom>
+          <a:noFill/>
+          <a:ln w="0">
+            <a:noFill/>
+          </a:ln>
+        </p:spPr>
+        <p:style>
+          <a:lnRef idx="0"/>
+          <a:fillRef idx="0"/>
+          <a:effectRef idx="0"/>
+          <a:fontRef idx="minor"/>
+        </p:style>
+        <p:txBody>
+          <a:bodyPr lIns="90000" rIns="90000" tIns="45000" bIns="45000" anchor="t">
+            <a:noAutofit/>
+          </a:bodyPr>
+          <a:p>
+            <a:pPr>
+              <a:lnSpc>
+                <a:spcPct val="100000"/>
+              </a:lnSpc>
+            </a:pPr>
+            <a:r>
+              <a:rPr b="1" lang="en-IN" sz="1800" spc="-1" strike="noStrike">
+                <a:solidFill>
+                  <a:srgbClr val="000000"/>
+                </a:solidFill>
+                <a:latin typeface="Arial"/>
+                <a:ea typeface="DejaVu Sans"/>
+              </a:rPr>
+              <a:t>File I/O at a Specified Offset: pread() and pwrite()</a:t>
+            </a:r>
+            <a:endParaRPr b="0" lang="en-US" sz="1800" spc="-1" strike="noStrike">
+              <a:solidFill>
+                <a:srgbClr val="000000"/>
+              </a:solidFill>
+              <a:latin typeface="Arial"/>
+            </a:endParaRPr>
+          </a:p>
+          <a:p>
+            <a:pPr>
+              <a:lnSpc>
+                <a:spcPct val="100000"/>
+              </a:lnSpc>
+            </a:pPr>
+            <a:endParaRPr b="0" lang="en-US" sz="1800" spc="-1" strike="noStrike">
+              <a:solidFill>
+                <a:srgbClr val="000000"/>
+              </a:solidFill>
+              <a:latin typeface="Arial"/>
+            </a:endParaRPr>
+          </a:p>
+          <a:p>
+            <a:pPr>
+              <a:lnSpc>
+                <a:spcPct val="100000"/>
+              </a:lnSpc>
+            </a:pPr>
+            <a:r>
+              <a:rPr b="0" lang="en-IN" sz="1800" spc="-1" strike="noStrike">
+                <a:solidFill>
+                  <a:srgbClr val="000000"/>
+                </a:solidFill>
+                <a:latin typeface="Arial"/>
+                <a:ea typeface="DejaVu Sans"/>
+              </a:rPr>
+              <a:t>The pread() and pwrite() system calls operate just like read() and write(), except that the file I/O is performed at the location specified by offset, rather than at the current file offset. The file offset is left unchanged by these calls.</a:t>
+            </a:r>
+            <a:endParaRPr b="0" lang="en-US" sz="1800" spc="-1" strike="noStrike">
+              <a:solidFill>
+                <a:srgbClr val="000000"/>
+              </a:solidFill>
+              <a:latin typeface="Arial"/>
+            </a:endParaRPr>
+          </a:p>
+        </p:txBody>
+      </p:sp>
+      <p:sp>
+        <p:nvSpPr>
+          <p:cNvPr id="99" name="CustomShape 2"/>
+          <p:cNvSpPr/>
+          <p:nvPr/>
+        </p:nvSpPr>
+        <p:spPr>
+          <a:xfrm>
+            <a:off x="155520" y="1929600"/>
+            <a:ext cx="8759160" cy="2135880"/>
+          </a:xfrm>
+          <a:prstGeom prst="rect">
+            <a:avLst/>
+          </a:prstGeom>
+          <a:noFill/>
+          <a:ln w="0">
+            <a:noFill/>
+          </a:ln>
+        </p:spPr>
+        <p:style>
+          <a:lnRef idx="0"/>
+          <a:fillRef idx="0"/>
+          <a:effectRef idx="0"/>
+          <a:fontRef idx="minor"/>
+        </p:style>
+        <p:txBody>
+          <a:bodyPr lIns="90000" rIns="90000" tIns="45000" bIns="45000" anchor="t">
+            <a:noAutofit/>
+          </a:bodyPr>
+          <a:p>
+            <a:pPr>
+              <a:lnSpc>
+                <a:spcPct val="100000"/>
+              </a:lnSpc>
+            </a:pPr>
+            <a:r>
+              <a:rPr b="0" lang="en-IN" sz="1800" spc="-1" strike="noStrike">
+                <a:solidFill>
+                  <a:srgbClr val="000000"/>
+                </a:solidFill>
+                <a:latin typeface="Arial"/>
+                <a:ea typeface="DejaVu Sans"/>
+              </a:rPr>
+              <a:t>Calling pread() is equivalent to atomically performing the following calls:</a:t>
+            </a:r>
+            <a:endParaRPr b="0" lang="en-US" sz="1800" spc="-1" strike="noStrike">
+              <a:solidFill>
+                <a:srgbClr val="000000"/>
+              </a:solidFill>
+              <a:latin typeface="Arial"/>
+            </a:endParaRPr>
+          </a:p>
+          <a:p>
+            <a:pPr>
+              <a:lnSpc>
+                <a:spcPct val="100000"/>
+              </a:lnSpc>
+            </a:pPr>
+            <a:r>
+              <a:rPr b="0" lang="en-IN" sz="1800" spc="-1" strike="noStrike">
+                <a:solidFill>
+                  <a:srgbClr val="000000"/>
+                </a:solidFill>
+                <a:latin typeface="Arial"/>
+                <a:ea typeface="DejaVu Sans"/>
+              </a:rPr>
+              <a:t>off_t orig;</a:t>
+            </a:r>
+            <a:endParaRPr b="0" lang="en-US" sz="1800" spc="-1" strike="noStrike">
+              <a:solidFill>
+                <a:srgbClr val="000000"/>
+              </a:solidFill>
+              <a:latin typeface="Arial"/>
+            </a:endParaRPr>
+          </a:p>
+          <a:p>
+            <a:pPr>
+              <a:lnSpc>
+                <a:spcPct val="100000"/>
+              </a:lnSpc>
+            </a:pPr>
+            <a:r>
+              <a:rPr b="0" lang="en-IN" sz="1800" spc="-1" strike="noStrike">
+                <a:solidFill>
+                  <a:srgbClr val="000000"/>
+                </a:solidFill>
+                <a:latin typeface="Arial"/>
+                <a:ea typeface="DejaVu Sans"/>
+              </a:rPr>
+              <a:t>orig = lseek(fd, 0, SEEK_CUR);</a:t>
+            </a:r>
+            <a:endParaRPr b="0" lang="en-US" sz="1800" spc="-1" strike="noStrike">
+              <a:solidFill>
+                <a:srgbClr val="000000"/>
+              </a:solidFill>
+              <a:latin typeface="Arial"/>
+            </a:endParaRPr>
+          </a:p>
+          <a:p>
+            <a:pPr>
+              <a:lnSpc>
+                <a:spcPct val="100000"/>
+              </a:lnSpc>
+            </a:pPr>
+            <a:r>
+              <a:rPr b="0" lang="en-IN" sz="1800" spc="-1" strike="noStrike">
+                <a:solidFill>
+                  <a:srgbClr val="000000"/>
+                </a:solidFill>
+                <a:latin typeface="Arial"/>
+                <a:ea typeface="Noto Sans CJK SC"/>
+              </a:rPr>
+              <a:t>lseek(fd, offset, SEEK_SET);  /* Save current offset */</a:t>
+            </a:r>
+            <a:endParaRPr b="0" lang="en-US" sz="1800" spc="-1" strike="noStrike">
+              <a:solidFill>
+                <a:srgbClr val="000000"/>
+              </a:solidFill>
+              <a:latin typeface="Arial"/>
+            </a:endParaRPr>
+          </a:p>
+          <a:p>
+            <a:pPr>
+              <a:lnSpc>
+                <a:spcPct val="100000"/>
+              </a:lnSpc>
+            </a:pPr>
+            <a:r>
+              <a:rPr b="0" lang="en-IN" sz="1800" spc="-1" strike="noStrike">
+                <a:solidFill>
+                  <a:srgbClr val="000000"/>
+                </a:solidFill>
+                <a:latin typeface="Arial"/>
+                <a:ea typeface="Noto Sans CJK SC"/>
+              </a:rPr>
+              <a:t>s = read(fd, buf, len);</a:t>
+            </a:r>
+            <a:endParaRPr b="0" lang="en-US" sz="1800" spc="-1" strike="noStrike">
+              <a:solidFill>
+                <a:srgbClr val="000000"/>
+              </a:solidFill>
+              <a:latin typeface="Arial"/>
+            </a:endParaRPr>
+          </a:p>
+          <a:p>
+            <a:pPr>
+              <a:lnSpc>
+                <a:spcPct val="100000"/>
+              </a:lnSpc>
+            </a:pPr>
+            <a:r>
+              <a:rPr b="0" lang="en-IN" sz="1800" spc="-1" strike="noStrike">
+                <a:solidFill>
+                  <a:srgbClr val="000000"/>
+                </a:solidFill>
+                <a:latin typeface="Arial"/>
+                <a:ea typeface="Noto Sans CJK SC"/>
+              </a:rPr>
+              <a:t>lseek(fd, orig, SEEK_SET); /* Restore original file offset */</a:t>
+            </a:r>
+            <a:endParaRPr b="0" lang="en-US" sz="1800" spc="-1" strike="noStrike">
+              <a:solidFill>
+                <a:srgbClr val="000000"/>
+              </a:solidFill>
+              <a:latin typeface="Arial"/>
+            </a:endParaRPr>
+          </a:p>
+          <a:p>
+            <a:pPr>
+              <a:lnSpc>
+                <a:spcPct val="100000"/>
+              </a:lnSpc>
+            </a:pPr>
+            <a:endParaRPr b="0" lang="en-US" sz="1800" spc="-1" strike="noStrike">
+              <a:solidFill>
+                <a:srgbClr val="000000"/>
+              </a:solidFill>
+              <a:latin typeface="Arial"/>
+            </a:endParaRPr>
+          </a:p>
+          <a:p>
+            <a:pPr>
+              <a:lnSpc>
+                <a:spcPct val="100000"/>
+              </a:lnSpc>
+            </a:pPr>
+            <a:endParaRPr b="0" lang="en-US" sz="1800" spc="-1" strike="noStrike">
+              <a:solidFill>
+                <a:srgbClr val="000000"/>
+              </a:solidFill>
+              <a:latin typeface="Arial"/>
+            </a:endParaRPr>
+          </a:p>
+        </p:txBody>
+      </p:sp>
+      <p:sp>
+        <p:nvSpPr>
+          <p:cNvPr id="100" name="CustomShape 3"/>
+          <p:cNvSpPr/>
+          <p:nvPr/>
+        </p:nvSpPr>
+        <p:spPr>
+          <a:xfrm>
+            <a:off x="155520" y="3685320"/>
+            <a:ext cx="8586000" cy="2647440"/>
+          </a:xfrm>
+          <a:prstGeom prst="rect">
+            <a:avLst/>
+          </a:prstGeom>
+          <a:noFill/>
+          <a:ln w="0">
+            <a:noFill/>
+          </a:ln>
+        </p:spPr>
+        <p:style>
+          <a:lnRef idx="0"/>
+          <a:fillRef idx="0"/>
+          <a:effectRef idx="0"/>
+          <a:fontRef idx="minor"/>
+        </p:style>
+        <p:txBody>
+          <a:bodyPr lIns="90000" rIns="90000" tIns="45000" bIns="45000" anchor="t">
+            <a:noAutofit/>
+          </a:bodyPr>
+          <a:p>
+            <a:pPr>
+              <a:lnSpc>
+                <a:spcPct val="100000"/>
+              </a:lnSpc>
+            </a:pPr>
+            <a:endParaRPr b="0" lang="en-US" sz="1800" spc="-1" strike="noStrike">
+              <a:solidFill>
+                <a:srgbClr val="000000"/>
+              </a:solidFill>
+              <a:latin typeface="Arial"/>
+            </a:endParaRPr>
+          </a:p>
+          <a:p>
+            <a:pPr>
+              <a:lnSpc>
+                <a:spcPct val="100000"/>
+              </a:lnSpc>
+            </a:pPr>
+            <a:r>
+              <a:rPr b="0" lang="en-IN" sz="1800" spc="-1" strike="noStrike">
+                <a:solidFill>
+                  <a:srgbClr val="000000"/>
+                </a:solidFill>
+                <a:latin typeface="Arial"/>
+                <a:ea typeface="Noto Sans CJK SC"/>
+              </a:rPr>
+              <a:t>These system calls can be particularly useful in multithreaded applications. This means that the file offset for each open file is global to all threads. Using</a:t>
+            </a:r>
+            <a:endParaRPr b="0" lang="en-US" sz="1800" spc="-1" strike="noStrike">
+              <a:solidFill>
+                <a:srgbClr val="000000"/>
+              </a:solidFill>
+              <a:latin typeface="Arial"/>
+            </a:endParaRPr>
+          </a:p>
+          <a:p>
+            <a:pPr>
+              <a:lnSpc>
+                <a:spcPct val="100000"/>
+              </a:lnSpc>
+            </a:pPr>
+            <a:r>
+              <a:rPr b="0" lang="en-IN" sz="1800" spc="-1" strike="noStrike">
+                <a:solidFill>
+                  <a:srgbClr val="000000"/>
+                </a:solidFill>
+                <a:latin typeface="Arial"/>
+                <a:ea typeface="Noto Sans CJK SC"/>
+              </a:rPr>
+              <a:t>pread() or pwrite(), multiple threads can simultaneously perform I/O on the same</a:t>
+            </a:r>
+            <a:endParaRPr b="0" lang="en-US" sz="1800" spc="-1" strike="noStrike">
+              <a:solidFill>
+                <a:srgbClr val="000000"/>
+              </a:solidFill>
+              <a:latin typeface="Arial"/>
+            </a:endParaRPr>
+          </a:p>
+          <a:p>
+            <a:pPr>
+              <a:lnSpc>
+                <a:spcPct val="100000"/>
+              </a:lnSpc>
+            </a:pPr>
+            <a:r>
+              <a:rPr b="0" lang="en-IN" sz="1800" spc="-1" strike="noStrike">
+                <a:solidFill>
+                  <a:srgbClr val="000000"/>
+                </a:solidFill>
+                <a:latin typeface="Arial"/>
+                <a:ea typeface="Noto Sans CJK SC"/>
+              </a:rPr>
+              <a:t>file descriptor without being affected by changes made to the file offset by other</a:t>
+            </a:r>
+            <a:endParaRPr b="0" lang="en-US" sz="1800" spc="-1" strike="noStrike">
+              <a:solidFill>
+                <a:srgbClr val="000000"/>
+              </a:solidFill>
+              <a:latin typeface="Arial"/>
+            </a:endParaRPr>
+          </a:p>
+          <a:p>
+            <a:pPr>
+              <a:lnSpc>
+                <a:spcPct val="100000"/>
+              </a:lnSpc>
+            </a:pPr>
+            <a:r>
+              <a:rPr b="0" lang="en-IN" sz="1800" spc="-1" strike="noStrike">
+                <a:solidFill>
+                  <a:srgbClr val="000000"/>
+                </a:solidFill>
+                <a:latin typeface="Arial"/>
+                <a:ea typeface="Noto Sans CJK SC"/>
+              </a:rPr>
+              <a:t>threads. If we attempted to use lseek() plus read() (or write()) instead, then we would create a race condition</a:t>
+            </a:r>
+            <a:endParaRPr b="0" lang="en-US" sz="1800" spc="-1" strike="noStrike">
+              <a:solidFill>
+                <a:srgbClr val="000000"/>
+              </a:solidFill>
+              <a:latin typeface="Arial"/>
+            </a:endParaRPr>
+          </a:p>
+          <a:p>
+            <a:pPr>
+              <a:lnSpc>
+                <a:spcPct val="100000"/>
+              </a:lnSpc>
+            </a:pPr>
+            <a:endParaRPr b="0" lang="en-US" sz="1800" spc="-1" strike="noStrike">
+              <a:solidFill>
+                <a:srgbClr val="000000"/>
+              </a:solidFill>
+              <a:latin typeface="Arial"/>
+            </a:endParaRPr>
+          </a:p>
+          <a:p>
+            <a:pPr>
+              <a:lnSpc>
+                <a:spcPct val="100000"/>
+              </a:lnSpc>
+            </a:pPr>
+            <a:r>
+              <a:rPr b="0" lang="en-IN" sz="1800" spc="-1" strike="noStrike">
+                <a:solidFill>
+                  <a:srgbClr val="000000"/>
+                </a:solidFill>
+                <a:latin typeface="Arial"/>
+                <a:ea typeface="Noto Sans CJK SC"/>
+              </a:rPr>
+              <a:t>-&gt; </a:t>
+            </a:r>
+            <a:r>
+              <a:rPr b="1" lang="en-IN" sz="1800" spc="-1" strike="noStrike">
+                <a:solidFill>
+                  <a:srgbClr val="000000"/>
+                </a:solidFill>
+                <a:latin typeface="Arial"/>
+                <a:ea typeface="Noto Sans CJK SC"/>
+              </a:rPr>
+              <a:t>Execute programs on pread, pwrite</a:t>
+            </a:r>
+            <a:endParaRPr b="0" lang="en-US" sz="1800" spc="-1" strike="noStrike">
+              <a:solidFill>
+                <a:srgbClr val="000000"/>
+              </a:solidFill>
+              <a:latin typeface="Arial"/>
+            </a:endParaRPr>
+          </a:p>
+        </p:txBody>
+      </p:sp>
+    </p:spTree>
+  </p:cSld>
+  <mc:AlternateContent>
+    <mc:Choice Requires="p14">
+      <p:transition spd="slow" p14:dur="2000"/>
+    </mc:Choice>
+    <mc:Fallback>
+      <p:transition spd="slow"/>
+    </mc:Fallback>
+  </mc:AlternateContent>
+</p:sld>
+</file>
+
+<file path=ppt/slides/slide17.xml><?xml version="1.0" encoding="utf-8"?>
+<p:sld xmlns:a="http://schemas.openxmlformats.org/drawingml/2006/main" xmlns:p="http://schemas.openxmlformats.org/presentationml/2006/main" xmlns:r="http://schemas.openxmlformats.org/officeDocument/2006/relationships" xmlns:p14="http://schemas.microsoft.com/office/powerpoint/2010/main" xmlns:p15="http://schemas.microsoft.com/office/powerpoint/2012/main" xmlns:mc="http://schemas.openxmlformats.org/markup-compatibility/2006">
+  <p:cSld>
+    <p:spTree>
+      <p:nvGrpSpPr>
+        <p:cNvPr id="1" name=""/>
+        <p:cNvGrpSpPr/>
+        <p:nvPr/>
+      </p:nvGrpSpPr>
+      <p:grpSpPr>
+        <a:xfrm>
+          <a:off x="0" y="0"/>
+          <a:ext cx="0" cy="0"/>
+          <a:chOff x="0" y="0"/>
+          <a:chExt cx="0" cy="0"/>
+        </a:xfrm>
+      </p:grpSpPr>
+      <p:sp>
+        <p:nvSpPr>
+          <p:cNvPr id="101" name="CustomShape 1"/>
+          <p:cNvSpPr/>
+          <p:nvPr/>
+        </p:nvSpPr>
+        <p:spPr>
+          <a:xfrm>
             <a:off x="51480" y="216000"/>
-            <a:ext cx="8910720" cy="5207760"/>
+            <a:ext cx="8910360" cy="5207400"/>
           </a:xfrm>
           <a:prstGeom prst="rect">
             <a:avLst/>
@@ -10612,7 +10966,7 @@
       </p:grpSpPr>
       <p:pic>
         <p:nvPicPr>
-          <p:cNvPr id="60" name="Picture 2" descr=""/>
+          <p:cNvPr id="62" name="Picture 2" descr=""/>
           <p:cNvPicPr/>
           <p:nvPr/>
         </p:nvPicPr>
@@ -10623,7 +10977,7 @@
         <p:spPr>
           <a:xfrm>
             <a:off x="2433960" y="1371600"/>
-            <a:ext cx="6712560" cy="5026680"/>
+            <a:ext cx="6712200" cy="5026320"/>
           </a:xfrm>
           <a:prstGeom prst="rect">
             <a:avLst/>
@@ -10635,14 +10989,14 @@
       </p:pic>
       <p:sp>
         <p:nvSpPr>
-          <p:cNvPr id="61" name="CustomShape 1"/>
+          <p:cNvPr id="63" name="CustomShape 1"/>
           <p:cNvSpPr/>
           <p:nvPr/>
         </p:nvSpPr>
         <p:spPr>
           <a:xfrm>
             <a:off x="0" y="990720"/>
-            <a:ext cx="2431440" cy="1467360"/>
+            <a:ext cx="2431080" cy="1467000"/>
           </a:xfrm>
           <a:prstGeom prst="rect">
             <a:avLst/>
@@ -10713,14 +11067,14 @@
       </p:sp>
       <p:sp>
         <p:nvSpPr>
-          <p:cNvPr id="62" name="CustomShape 2"/>
+          <p:cNvPr id="64" name="CustomShape 2"/>
           <p:cNvSpPr/>
           <p:nvPr/>
         </p:nvSpPr>
         <p:spPr>
           <a:xfrm>
             <a:off x="2057400" y="1600200"/>
-            <a:ext cx="374040" cy="302400"/>
+            <a:ext cx="373680" cy="302040"/>
           </a:xfrm>
           <a:prstGeom prst="rightArrow">
             <a:avLst>
@@ -10766,14 +11120,14 @@
       </p:sp>
       <p:sp>
         <p:nvSpPr>
-          <p:cNvPr id="63" name="CustomShape 3"/>
+          <p:cNvPr id="65" name="CustomShape 3"/>
           <p:cNvSpPr/>
           <p:nvPr/>
         </p:nvSpPr>
         <p:spPr>
           <a:xfrm>
             <a:off x="-76320" y="2590920"/>
-            <a:ext cx="2431440" cy="1467360"/>
+            <a:ext cx="2431080" cy="1467000"/>
           </a:xfrm>
           <a:prstGeom prst="rect">
             <a:avLst/>
@@ -10844,14 +11198,14 @@
       </p:sp>
       <p:sp>
         <p:nvSpPr>
-          <p:cNvPr id="64" name="CustomShape 4"/>
+          <p:cNvPr id="66" name="CustomShape 4"/>
           <p:cNvSpPr/>
           <p:nvPr/>
         </p:nvSpPr>
         <p:spPr>
           <a:xfrm>
             <a:off x="1873440" y="3192480"/>
-            <a:ext cx="374040" cy="302400"/>
+            <a:ext cx="373680" cy="302040"/>
           </a:xfrm>
           <a:prstGeom prst="rightArrow">
             <a:avLst>
@@ -10909,14 +11263,14 @@
       </p:sp>
       <p:sp>
         <p:nvSpPr>
-          <p:cNvPr id="65" name="CustomShape 5"/>
+          <p:cNvPr id="67" name="CustomShape 5"/>
           <p:cNvSpPr/>
           <p:nvPr/>
         </p:nvSpPr>
         <p:spPr>
           <a:xfrm>
             <a:off x="1833120" y="5257800"/>
-            <a:ext cx="374040" cy="302400"/>
+            <a:ext cx="373680" cy="302040"/>
           </a:xfrm>
           <a:prstGeom prst="rightArrow">
             <a:avLst>
@@ -10962,14 +11316,14 @@
       </p:sp>
       <p:sp>
         <p:nvSpPr>
-          <p:cNvPr id="66" name="CustomShape 6"/>
+          <p:cNvPr id="68" name="CustomShape 6"/>
           <p:cNvSpPr/>
           <p:nvPr/>
         </p:nvSpPr>
         <p:spPr>
           <a:xfrm>
             <a:off x="76320" y="4626000"/>
-            <a:ext cx="2431440" cy="1467360"/>
+            <a:ext cx="2431080" cy="1467000"/>
           </a:xfrm>
           <a:prstGeom prst="rect">
             <a:avLst/>
@@ -11040,14 +11394,14 @@
       </p:sp>
       <p:sp>
         <p:nvSpPr>
-          <p:cNvPr id="67" name="CustomShape 7"/>
+          <p:cNvPr id="69" name="CustomShape 7"/>
           <p:cNvSpPr/>
           <p:nvPr/>
         </p:nvSpPr>
         <p:spPr>
           <a:xfrm>
             <a:off x="914400" y="217440"/>
-            <a:ext cx="7922160" cy="1614240"/>
+            <a:ext cx="7921800" cy="1614240"/>
           </a:xfrm>
           <a:prstGeom prst="rect">
             <a:avLst/>
@@ -11193,7 +11547,7 @@
       </p:sp>
       <p:pic>
         <p:nvPicPr>
-          <p:cNvPr id="68" name="Picture 2" descr=""/>
+          <p:cNvPr id="70" name="Picture 2" descr=""/>
           <p:cNvPicPr/>
           <p:nvPr/>
         </p:nvPicPr>
@@ -11204,7 +11558,7 @@
         <p:spPr>
           <a:xfrm>
             <a:off x="0" y="0"/>
-            <a:ext cx="9141480" cy="6207840"/>
+            <a:ext cx="9141120" cy="6207480"/>
           </a:xfrm>
           <a:prstGeom prst="rect">
             <a:avLst/>
@@ -11216,14 +11570,14 @@
       </p:pic>
       <p:sp>
         <p:nvSpPr>
-          <p:cNvPr id="69" name="CustomShape 8"/>
+          <p:cNvPr id="71" name="CustomShape 8"/>
           <p:cNvSpPr/>
           <p:nvPr/>
         </p:nvSpPr>
         <p:spPr>
           <a:xfrm>
             <a:off x="3124080" y="6356520"/>
-            <a:ext cx="2892960" cy="362520"/>
+            <a:ext cx="2892600" cy="362160"/>
           </a:xfrm>
           <a:prstGeom prst="rect">
             <a:avLst/>
@@ -11300,14 +11654,14 @@
       </p:grpSpPr>
       <p:sp>
         <p:nvSpPr>
-          <p:cNvPr id="70" name="CustomShape 1"/>
+          <p:cNvPr id="72" name="CustomShape 1"/>
           <p:cNvSpPr/>
           <p:nvPr/>
         </p:nvSpPr>
         <p:spPr>
           <a:xfrm>
             <a:off x="48600" y="7560"/>
-            <a:ext cx="9095040" cy="6399000"/>
+            <a:ext cx="9094680" cy="6399000"/>
           </a:xfrm>
           <a:prstGeom prst="rect">
             <a:avLst/>
@@ -11564,14 +11918,14 @@
       </p:grpSpPr>
       <p:sp>
         <p:nvSpPr>
-          <p:cNvPr id="71" name="CustomShape 1"/>
+          <p:cNvPr id="73" name="CustomShape 1"/>
           <p:cNvSpPr/>
           <p:nvPr/>
         </p:nvSpPr>
         <p:spPr>
           <a:xfrm>
             <a:off x="0" y="0"/>
-            <a:ext cx="9143640" cy="6629040"/>
+            <a:ext cx="9143280" cy="6628680"/>
           </a:xfrm>
           <a:prstGeom prst="rect">
             <a:avLst/>
@@ -12058,14 +12412,14 @@
       </p:grpSpPr>
       <p:sp>
         <p:nvSpPr>
-          <p:cNvPr id="72" name=""/>
+          <p:cNvPr id="74" name=""/>
           <p:cNvSpPr/>
           <p:nvPr/>
         </p:nvSpPr>
         <p:spPr>
           <a:xfrm>
             <a:off x="0" y="184680"/>
-            <a:ext cx="9226800" cy="3929760"/>
+            <a:ext cx="9226440" cy="3929400"/>
           </a:xfrm>
           <a:prstGeom prst="rect">
             <a:avLst/>
@@ -12306,7 +12660,7 @@
       </p:grpSpPr>
       <p:pic>
         <p:nvPicPr>
-          <p:cNvPr id="73" name="" descr=""/>
+          <p:cNvPr id="75" name="" descr=""/>
           <p:cNvPicPr/>
           <p:nvPr/>
         </p:nvPicPr>
@@ -12317,7 +12671,7 @@
         <p:spPr>
           <a:xfrm>
             <a:off x="4114800" y="79200"/>
-            <a:ext cx="4800240" cy="5864040"/>
+            <a:ext cx="4799880" cy="5863680"/>
           </a:xfrm>
           <a:prstGeom prst="rect">
             <a:avLst/>
@@ -12329,14 +12683,14 @@
       </p:pic>
       <p:sp>
         <p:nvSpPr>
-          <p:cNvPr id="74" name=""/>
+          <p:cNvPr id="76" name=""/>
           <p:cNvSpPr/>
           <p:nvPr/>
         </p:nvSpPr>
         <p:spPr>
           <a:xfrm>
             <a:off x="27720" y="0"/>
-            <a:ext cx="4543920" cy="6857640"/>
+            <a:ext cx="4543560" cy="6857280"/>
           </a:xfrm>
           <a:prstGeom prst="rect">
             <a:avLst/>
@@ -12453,14 +12807,14 @@
       </p:grpSpPr>
       <p:sp>
         <p:nvSpPr>
-          <p:cNvPr id="75" name=""/>
+          <p:cNvPr id="77" name=""/>
           <p:cNvSpPr/>
           <p:nvPr/>
         </p:nvSpPr>
         <p:spPr>
           <a:xfrm>
             <a:off x="347040" y="487440"/>
-            <a:ext cx="2961360" cy="228960"/>
+            <a:ext cx="2961000" cy="228600"/>
           </a:xfrm>
           <a:prstGeom prst="rect">
             <a:avLst/>
@@ -12507,14 +12861,14 @@
       </p:sp>
       <p:sp>
         <p:nvSpPr>
-          <p:cNvPr id="76" name=""/>
+          <p:cNvPr id="78" name=""/>
           <p:cNvSpPr/>
           <p:nvPr/>
         </p:nvSpPr>
         <p:spPr>
           <a:xfrm>
             <a:off x="1066680" y="792000"/>
-            <a:ext cx="3503160" cy="343080"/>
+            <a:ext cx="3502800" cy="342720"/>
           </a:xfrm>
           <a:prstGeom prst="rect">
             <a:avLst/>
@@ -12561,14 +12915,14 @@
       </p:sp>
       <p:sp>
         <p:nvSpPr>
-          <p:cNvPr id="77" name=""/>
+          <p:cNvPr id="79" name=""/>
           <p:cNvSpPr/>
           <p:nvPr/>
         </p:nvSpPr>
         <p:spPr>
           <a:xfrm>
             <a:off x="2290680" y="0"/>
-            <a:ext cx="6489720" cy="1110600"/>
+            <a:ext cx="6489360" cy="1110240"/>
           </a:xfrm>
           <a:prstGeom prst="rect">
             <a:avLst/>
@@ -12615,14 +12969,14 @@
       </p:sp>
       <p:sp>
         <p:nvSpPr>
-          <p:cNvPr id="78" name=""/>
+          <p:cNvPr id="80" name=""/>
           <p:cNvSpPr/>
           <p:nvPr/>
         </p:nvSpPr>
         <p:spPr>
           <a:xfrm>
             <a:off x="417600" y="1207440"/>
-            <a:ext cx="1522800" cy="228960"/>
+            <a:ext cx="1522440" cy="228600"/>
           </a:xfrm>
           <a:prstGeom prst="rect">
             <a:avLst/>
@@ -12669,14 +13023,14 @@
       </p:sp>
       <p:sp>
         <p:nvSpPr>
-          <p:cNvPr id="79" name=""/>
+          <p:cNvPr id="81" name=""/>
           <p:cNvSpPr/>
           <p:nvPr/>
         </p:nvSpPr>
         <p:spPr>
           <a:xfrm>
             <a:off x="648000" y="1642320"/>
-            <a:ext cx="7412400" cy="789480"/>
+            <a:ext cx="7412040" cy="789120"/>
           </a:xfrm>
           <a:prstGeom prst="rect">
             <a:avLst/>
@@ -12746,14 +13100,14 @@
       </p:sp>
       <p:sp>
         <p:nvSpPr>
-          <p:cNvPr id="80" name=""/>
+          <p:cNvPr id="82" name=""/>
           <p:cNvSpPr/>
           <p:nvPr/>
         </p:nvSpPr>
         <p:spPr>
           <a:xfrm>
             <a:off x="1985760" y="2369880"/>
-            <a:ext cx="5596920" cy="1366920"/>
+            <a:ext cx="5596560" cy="1366560"/>
           </a:xfrm>
           <a:prstGeom prst="rect">
             <a:avLst/>
@@ -12892,14 +13246,14 @@
       </p:sp>
       <p:sp>
         <p:nvSpPr>
-          <p:cNvPr id="81" name=""/>
+          <p:cNvPr id="83" name=""/>
           <p:cNvSpPr/>
           <p:nvPr/>
         </p:nvSpPr>
         <p:spPr>
           <a:xfrm>
             <a:off x="480600" y="3891240"/>
-            <a:ext cx="8296200" cy="415440"/>
+            <a:ext cx="8295840" cy="415080"/>
           </a:xfrm>
           <a:prstGeom prst="rect">
             <a:avLst/>
@@ -12959,14 +13313,14 @@
       </p:sp>
       <p:sp>
         <p:nvSpPr>
-          <p:cNvPr id="82" name=""/>
+          <p:cNvPr id="84" name=""/>
           <p:cNvSpPr/>
           <p:nvPr/>
         </p:nvSpPr>
         <p:spPr>
           <a:xfrm>
             <a:off x="484200" y="4203720"/>
-            <a:ext cx="8492400" cy="708840"/>
+            <a:ext cx="8492040" cy="708480"/>
           </a:xfrm>
           <a:prstGeom prst="rect">
             <a:avLst/>
@@ -13059,14 +13413,14 @@
       </p:sp>
       <p:sp>
         <p:nvSpPr>
-          <p:cNvPr id="83" name=""/>
+          <p:cNvPr id="85" name=""/>
           <p:cNvSpPr/>
           <p:nvPr/>
         </p:nvSpPr>
         <p:spPr>
           <a:xfrm>
             <a:off x="518400" y="4914720"/>
-            <a:ext cx="8394840" cy="1314720"/>
+            <a:ext cx="8394480" cy="1314360"/>
           </a:xfrm>
           <a:prstGeom prst="rect">
             <a:avLst/>
@@ -13258,7 +13612,7 @@
       </p:grpSpPr>
       <p:pic>
         <p:nvPicPr>
-          <p:cNvPr id="84" name="" descr=""/>
+          <p:cNvPr id="86" name="" descr=""/>
           <p:cNvPicPr/>
           <p:nvPr/>
         </p:nvPicPr>
@@ -13269,7 +13623,7 @@
         <p:spPr>
           <a:xfrm>
             <a:off x="1980720" y="54360"/>
-            <a:ext cx="4568040" cy="6782400"/>
+            <a:ext cx="4567680" cy="6782040"/>
           </a:xfrm>
           <a:prstGeom prst="rect">
             <a:avLst/>
@@ -13311,7 +13665,7 @@
       </p:grpSpPr>
       <p:pic>
         <p:nvPicPr>
-          <p:cNvPr id="85" name="Picture 1" descr=""/>
+          <p:cNvPr id="87" name="" descr=""/>
           <p:cNvPicPr/>
           <p:nvPr/>
         </p:nvPicPr>
@@ -13321,8 +13675,8 @@
         </p:blipFill>
         <p:spPr>
           <a:xfrm>
-            <a:off x="152280" y="76320"/>
-            <a:ext cx="8989200" cy="6779160"/>
+            <a:off x="1894680" y="-1440"/>
+            <a:ext cx="5361480" cy="6857640"/>
           </a:xfrm>
           <a:prstGeom prst="rect">
             <a:avLst/>
